--- a/Week_2/Core_Java.pptx
+++ b/Week_2/Core_Java.pptx
@@ -39,6 +39,19 @@
     <p:sldId id="292" r:id="rId33"/>
     <p:sldId id="293" r:id="rId34"/>
     <p:sldId id="294" r:id="rId35"/>
+    <p:sldId id="295" r:id="rId36"/>
+    <p:sldId id="296" r:id="rId37"/>
+    <p:sldId id="297" r:id="rId38"/>
+    <p:sldId id="298" r:id="rId39"/>
+    <p:sldId id="299" r:id="rId40"/>
+    <p:sldId id="300" r:id="rId41"/>
+    <p:sldId id="301" r:id="rId42"/>
+    <p:sldId id="302" r:id="rId43"/>
+    <p:sldId id="303" r:id="rId44"/>
+    <p:sldId id="304" r:id="rId45"/>
+    <p:sldId id="305" r:id="rId46"/>
+    <p:sldId id="306" r:id="rId47"/>
+    <p:sldId id="307" r:id="rId48"/>
   </p:sldIdLst>
   <p:sldSz cx="12192000" cy="6858000"/>
   <p:notesSz cx="6858000" cy="9144000"/>
@@ -17622,6 +17635,1978 @@
 </p:sld>
 </file>
 
+<file path=ppt/slides/slide35.xml><?xml version="1.0" encoding="utf-8"?>
+<p:sld xmlns:a="http://schemas.openxmlformats.org/drawingml/2006/main" xmlns:r="http://schemas.openxmlformats.org/officeDocument/2006/relationships" xmlns:p="http://schemas.openxmlformats.org/presentationml/2006/main">
+  <p:cSld>
+    <p:spTree>
+      <p:nvGrpSpPr>
+        <p:cNvPr id="1" name=""/>
+        <p:cNvGrpSpPr/>
+        <p:nvPr/>
+      </p:nvGrpSpPr>
+      <p:grpSpPr>
+        <a:xfrm>
+          <a:off x="0" y="0"/>
+          <a:ext cx="0" cy="0"/>
+          <a:chOff x="0" y="0"/>
+          <a:chExt cx="0" cy="0"/>
+        </a:xfrm>
+      </p:grpSpPr>
+      <p:sp>
+        <p:nvSpPr>
+          <p:cNvPr id="2" name="Title 1">
+            <a:extLst>
+              <a:ext uri="{FF2B5EF4-FFF2-40B4-BE49-F238E27FC236}">
+                <a16:creationId xmlns:a16="http://schemas.microsoft.com/office/drawing/2014/main" id="{8DC84898-90B8-9667-2A57-06726A894188}"/>
+              </a:ext>
+            </a:extLst>
+          </p:cNvPr>
+          <p:cNvSpPr>
+            <a:spLocks noGrp="1"/>
+          </p:cNvSpPr>
+          <p:nvPr>
+            <p:ph type="title"/>
+          </p:nvPr>
+        </p:nvSpPr>
+        <p:spPr/>
+        <p:txBody>
+          <a:bodyPr/>
+          <a:lstStyle/>
+          <a:p>
+            <a:r>
+              <a:rPr lang="en-US" dirty="0"/>
+              <a:t>Classes &amp; Objects</a:t>
+            </a:r>
+          </a:p>
+        </p:txBody>
+      </p:sp>
+      <p:sp>
+        <p:nvSpPr>
+          <p:cNvPr id="3" name="Content Placeholder 2">
+            <a:extLst>
+              <a:ext uri="{FF2B5EF4-FFF2-40B4-BE49-F238E27FC236}">
+                <a16:creationId xmlns:a16="http://schemas.microsoft.com/office/drawing/2014/main" id="{0B2E823D-4649-6DAA-D859-2FA7A8D2A61E}"/>
+              </a:ext>
+            </a:extLst>
+          </p:cNvPr>
+          <p:cNvSpPr>
+            <a:spLocks noGrp="1"/>
+          </p:cNvSpPr>
+          <p:nvPr>
+            <p:ph idx="1"/>
+          </p:nvPr>
+        </p:nvSpPr>
+        <p:spPr>
+          <a:xfrm>
+            <a:off x="931921" y="2243127"/>
+            <a:ext cx="4097279" cy="1821570"/>
+          </a:xfrm>
+        </p:spPr>
+        <p:txBody>
+          <a:bodyPr>
+            <a:normAutofit lnSpcReduction="10000"/>
+          </a:bodyPr>
+          <a:lstStyle/>
+          <a:p>
+            <a:r>
+              <a:rPr lang="en-US" dirty="0"/>
+              <a:t>Classes – a blueprint for an object</a:t>
+            </a:r>
+          </a:p>
+          <a:p>
+            <a:pPr lvl="1"/>
+            <a:r>
+              <a:rPr lang="en-US" dirty="0"/>
+              <a:t>It has: State + Behavior </a:t>
+            </a:r>
+          </a:p>
+          <a:p>
+            <a:pPr lvl="1"/>
+            <a:r>
+              <a:rPr lang="en-US" dirty="0"/>
+              <a:t>State – properties/data that describe an object</a:t>
+            </a:r>
+          </a:p>
+          <a:p>
+            <a:pPr lvl="1"/>
+            <a:r>
+              <a:rPr lang="en-US" dirty="0"/>
+              <a:t>Behavior – the behavior/actions that an object can perform</a:t>
+            </a:r>
+          </a:p>
+        </p:txBody>
+      </p:sp>
+      <p:sp>
+        <p:nvSpPr>
+          <p:cNvPr id="4" name="Content Placeholder 2">
+            <a:extLst>
+              <a:ext uri="{FF2B5EF4-FFF2-40B4-BE49-F238E27FC236}">
+                <a16:creationId xmlns:a16="http://schemas.microsoft.com/office/drawing/2014/main" id="{C6A0FB88-9B03-1AE0-EB8C-B8F35E39892C}"/>
+              </a:ext>
+            </a:extLst>
+          </p:cNvPr>
+          <p:cNvSpPr txBox="1">
+            <a:spLocks/>
+          </p:cNvSpPr>
+          <p:nvPr/>
+        </p:nvSpPr>
+        <p:spPr>
+          <a:xfrm>
+            <a:off x="5988262" y="2167971"/>
+            <a:ext cx="4097279" cy="1821570"/>
+          </a:xfrm>
+          <a:prstGeom prst="rect">
+            <a:avLst/>
+          </a:prstGeom>
+        </p:spPr>
+        <p:txBody>
+          <a:bodyPr vert="horz" lIns="91440" tIns="45720" rIns="91440" bIns="45720" rtlCol="0" anchor="ctr">
+            <a:normAutofit/>
+          </a:bodyPr>
+          <a:lstStyle>
+            <a:lvl1pPr marL="306000" indent="-306000" algn="l" defTabSz="457200" rtl="0" eaLnBrk="1" latinLnBrk="0" hangingPunct="1">
+              <a:spcBef>
+                <a:spcPct val="20000"/>
+              </a:spcBef>
+              <a:spcAft>
+                <a:spcPts val="600"/>
+              </a:spcAft>
+              <a:buClr>
+                <a:schemeClr val="accent2"/>
+              </a:buClr>
+              <a:buSzPct val="92000"/>
+              <a:buFont typeface="Wingdings 2" panose="05020102010507070707" pitchFamily="18" charset="2"/>
+              <a:buChar char=""/>
+              <a:defRPr sz="1800" kern="1200">
+                <a:solidFill>
+                  <a:schemeClr val="tx2"/>
+                </a:solidFill>
+                <a:latin typeface="+mn-lt"/>
+                <a:ea typeface="+mn-ea"/>
+                <a:cs typeface="+mn-cs"/>
+              </a:defRPr>
+            </a:lvl1pPr>
+            <a:lvl2pPr marL="630000" indent="-306000" algn="l" defTabSz="457200" rtl="0" eaLnBrk="1" latinLnBrk="0" hangingPunct="1">
+              <a:spcBef>
+                <a:spcPct val="20000"/>
+              </a:spcBef>
+              <a:spcAft>
+                <a:spcPts val="600"/>
+              </a:spcAft>
+              <a:buClr>
+                <a:schemeClr val="accent2"/>
+              </a:buClr>
+              <a:buSzPct val="92000"/>
+              <a:buFont typeface="Wingdings 2" panose="05020102010507070707" pitchFamily="18" charset="2"/>
+              <a:buChar char=""/>
+              <a:defRPr sz="1600" kern="1200">
+                <a:solidFill>
+                  <a:schemeClr val="tx2"/>
+                </a:solidFill>
+                <a:latin typeface="+mn-lt"/>
+                <a:ea typeface="+mn-ea"/>
+                <a:cs typeface="+mn-cs"/>
+              </a:defRPr>
+            </a:lvl2pPr>
+            <a:lvl3pPr marL="900000" indent="-270000" algn="l" defTabSz="457200" rtl="0" eaLnBrk="1" latinLnBrk="0" hangingPunct="1">
+              <a:spcBef>
+                <a:spcPct val="20000"/>
+              </a:spcBef>
+              <a:spcAft>
+                <a:spcPts val="600"/>
+              </a:spcAft>
+              <a:buClr>
+                <a:schemeClr val="accent2"/>
+              </a:buClr>
+              <a:buSzPct val="92000"/>
+              <a:buFont typeface="Wingdings 2" panose="05020102010507070707" pitchFamily="18" charset="2"/>
+              <a:buChar char=""/>
+              <a:defRPr sz="1400" kern="1200">
+                <a:solidFill>
+                  <a:schemeClr val="tx2"/>
+                </a:solidFill>
+                <a:latin typeface="+mn-lt"/>
+                <a:ea typeface="+mn-ea"/>
+                <a:cs typeface="+mn-cs"/>
+              </a:defRPr>
+            </a:lvl3pPr>
+            <a:lvl4pPr marL="1242000" indent="-234000" algn="l" defTabSz="457200" rtl="0" eaLnBrk="1" latinLnBrk="0" hangingPunct="1">
+              <a:spcBef>
+                <a:spcPct val="20000"/>
+              </a:spcBef>
+              <a:spcAft>
+                <a:spcPts val="600"/>
+              </a:spcAft>
+              <a:buClr>
+                <a:schemeClr val="accent2"/>
+              </a:buClr>
+              <a:buSzPct val="92000"/>
+              <a:buFont typeface="Wingdings 2" panose="05020102010507070707" pitchFamily="18" charset="2"/>
+              <a:buChar char=""/>
+              <a:defRPr sz="1200" kern="1200">
+                <a:solidFill>
+                  <a:schemeClr val="tx2"/>
+                </a:solidFill>
+                <a:latin typeface="+mn-lt"/>
+                <a:ea typeface="+mn-ea"/>
+                <a:cs typeface="+mn-cs"/>
+              </a:defRPr>
+            </a:lvl4pPr>
+            <a:lvl5pPr marL="1602000" indent="-234000" algn="l" defTabSz="457200" rtl="0" eaLnBrk="1" latinLnBrk="0" hangingPunct="1">
+              <a:spcBef>
+                <a:spcPct val="20000"/>
+              </a:spcBef>
+              <a:spcAft>
+                <a:spcPts val="600"/>
+              </a:spcAft>
+              <a:buClr>
+                <a:schemeClr val="accent2"/>
+              </a:buClr>
+              <a:buSzPct val="92000"/>
+              <a:buFont typeface="Wingdings 2" panose="05020102010507070707" pitchFamily="18" charset="2"/>
+              <a:buChar char=""/>
+              <a:defRPr sz="1200" kern="1200">
+                <a:solidFill>
+                  <a:schemeClr val="tx2"/>
+                </a:solidFill>
+                <a:latin typeface="+mn-lt"/>
+                <a:ea typeface="+mn-ea"/>
+                <a:cs typeface="+mn-cs"/>
+              </a:defRPr>
+            </a:lvl5pPr>
+            <a:lvl6pPr marL="1900000" indent="-228600" algn="l" defTabSz="457200" rtl="0" eaLnBrk="1" latinLnBrk="0" hangingPunct="1">
+              <a:spcBef>
+                <a:spcPct val="20000"/>
+              </a:spcBef>
+              <a:spcAft>
+                <a:spcPts val="600"/>
+              </a:spcAft>
+              <a:buClr>
+                <a:schemeClr val="accent2"/>
+              </a:buClr>
+              <a:buSzPct val="92000"/>
+              <a:buFont typeface="Wingdings 2" panose="05020102010507070707" pitchFamily="18" charset="2"/>
+              <a:buChar char=""/>
+              <a:defRPr sz="1200" kern="1200">
+                <a:solidFill>
+                  <a:schemeClr val="tx2"/>
+                </a:solidFill>
+                <a:latin typeface="+mn-lt"/>
+                <a:ea typeface="+mn-ea"/>
+                <a:cs typeface="+mn-cs"/>
+              </a:defRPr>
+            </a:lvl6pPr>
+            <a:lvl7pPr marL="2200000" indent="-228600" algn="l" defTabSz="457200" rtl="0" eaLnBrk="1" latinLnBrk="0" hangingPunct="1">
+              <a:spcBef>
+                <a:spcPct val="20000"/>
+              </a:spcBef>
+              <a:spcAft>
+                <a:spcPts val="600"/>
+              </a:spcAft>
+              <a:buClr>
+                <a:schemeClr val="accent2"/>
+              </a:buClr>
+              <a:buSzPct val="92000"/>
+              <a:buFont typeface="Wingdings 2" panose="05020102010507070707" pitchFamily="18" charset="2"/>
+              <a:buChar char=""/>
+              <a:defRPr sz="1200" kern="1200">
+                <a:solidFill>
+                  <a:schemeClr val="tx2"/>
+                </a:solidFill>
+                <a:latin typeface="+mn-lt"/>
+                <a:ea typeface="+mn-ea"/>
+                <a:cs typeface="+mn-cs"/>
+              </a:defRPr>
+            </a:lvl7pPr>
+            <a:lvl8pPr marL="2500000" indent="-228600" algn="l" defTabSz="457200" rtl="0" eaLnBrk="1" latinLnBrk="0" hangingPunct="1">
+              <a:spcBef>
+                <a:spcPct val="20000"/>
+              </a:spcBef>
+              <a:spcAft>
+                <a:spcPts val="600"/>
+              </a:spcAft>
+              <a:buClr>
+                <a:schemeClr val="accent2"/>
+              </a:buClr>
+              <a:buSzPct val="92000"/>
+              <a:buFont typeface="Wingdings 2" panose="05020102010507070707" pitchFamily="18" charset="2"/>
+              <a:buChar char=""/>
+              <a:defRPr sz="1200" kern="1200">
+                <a:solidFill>
+                  <a:schemeClr val="tx2"/>
+                </a:solidFill>
+                <a:latin typeface="+mn-lt"/>
+                <a:ea typeface="+mn-ea"/>
+                <a:cs typeface="+mn-cs"/>
+              </a:defRPr>
+            </a:lvl8pPr>
+            <a:lvl9pPr marL="2800000" indent="-228600" algn="l" defTabSz="457200" rtl="0" eaLnBrk="1" latinLnBrk="0" hangingPunct="1">
+              <a:spcBef>
+                <a:spcPct val="20000"/>
+              </a:spcBef>
+              <a:spcAft>
+                <a:spcPts val="600"/>
+              </a:spcAft>
+              <a:buClr>
+                <a:schemeClr val="accent2"/>
+              </a:buClr>
+              <a:buSzPct val="92000"/>
+              <a:buFont typeface="Wingdings 2" panose="05020102010507070707" pitchFamily="18" charset="2"/>
+              <a:buChar char=""/>
+              <a:defRPr sz="1200" kern="1200">
+                <a:solidFill>
+                  <a:schemeClr val="tx2"/>
+                </a:solidFill>
+                <a:latin typeface="+mn-lt"/>
+                <a:ea typeface="+mn-ea"/>
+                <a:cs typeface="+mn-cs"/>
+              </a:defRPr>
+            </a:lvl9pPr>
+          </a:lstStyle>
+          <a:p>
+            <a:r>
+              <a:rPr lang="en-US" dirty="0"/>
+              <a:t>Objects – instantiations of a class</a:t>
+            </a:r>
+          </a:p>
+          <a:p>
+            <a:pPr lvl="1"/>
+            <a:r>
+              <a:rPr lang="en-US" dirty="0"/>
+              <a:t>Object state – Specific values to describe the object; unique to itself </a:t>
+            </a:r>
+          </a:p>
+          <a:p>
+            <a:pPr lvl="1"/>
+            <a:r>
+              <a:rPr lang="en-US" dirty="0"/>
+              <a:t>Object behavior – what this object can do; defined by the class</a:t>
+            </a:r>
+          </a:p>
+        </p:txBody>
+      </p:sp>
+      <p:sp>
+        <p:nvSpPr>
+          <p:cNvPr id="6" name="Content Placeholder 2">
+            <a:extLst>
+              <a:ext uri="{FF2B5EF4-FFF2-40B4-BE49-F238E27FC236}">
+                <a16:creationId xmlns:a16="http://schemas.microsoft.com/office/drawing/2014/main" id="{8630A83F-9D09-EE73-2CB4-B000EAD9964F}"/>
+              </a:ext>
+            </a:extLst>
+          </p:cNvPr>
+          <p:cNvSpPr txBox="1">
+            <a:spLocks/>
+          </p:cNvSpPr>
+          <p:nvPr/>
+        </p:nvSpPr>
+        <p:spPr>
+          <a:xfrm>
+            <a:off x="888080" y="4334274"/>
+            <a:ext cx="4097279" cy="1821570"/>
+          </a:xfrm>
+          <a:prstGeom prst="rect">
+            <a:avLst/>
+          </a:prstGeom>
+        </p:spPr>
+        <p:txBody>
+          <a:bodyPr vert="horz" lIns="91440" tIns="45720" rIns="91440" bIns="45720" rtlCol="0" anchor="ctr">
+            <a:normAutofit/>
+          </a:bodyPr>
+          <a:lstStyle>
+            <a:lvl1pPr marL="306000" indent="-306000" algn="l" defTabSz="457200" rtl="0" eaLnBrk="1" latinLnBrk="0" hangingPunct="1">
+              <a:spcBef>
+                <a:spcPct val="20000"/>
+              </a:spcBef>
+              <a:spcAft>
+                <a:spcPts val="600"/>
+              </a:spcAft>
+              <a:buClr>
+                <a:schemeClr val="accent2"/>
+              </a:buClr>
+              <a:buSzPct val="92000"/>
+              <a:buFont typeface="Wingdings 2" panose="05020102010507070707" pitchFamily="18" charset="2"/>
+              <a:buChar char=""/>
+              <a:defRPr sz="1800" kern="1200">
+                <a:solidFill>
+                  <a:schemeClr val="tx2"/>
+                </a:solidFill>
+                <a:latin typeface="+mn-lt"/>
+                <a:ea typeface="+mn-ea"/>
+                <a:cs typeface="+mn-cs"/>
+              </a:defRPr>
+            </a:lvl1pPr>
+            <a:lvl2pPr marL="630000" indent="-306000" algn="l" defTabSz="457200" rtl="0" eaLnBrk="1" latinLnBrk="0" hangingPunct="1">
+              <a:spcBef>
+                <a:spcPct val="20000"/>
+              </a:spcBef>
+              <a:spcAft>
+                <a:spcPts val="600"/>
+              </a:spcAft>
+              <a:buClr>
+                <a:schemeClr val="accent2"/>
+              </a:buClr>
+              <a:buSzPct val="92000"/>
+              <a:buFont typeface="Wingdings 2" panose="05020102010507070707" pitchFamily="18" charset="2"/>
+              <a:buChar char=""/>
+              <a:defRPr sz="1600" kern="1200">
+                <a:solidFill>
+                  <a:schemeClr val="tx2"/>
+                </a:solidFill>
+                <a:latin typeface="+mn-lt"/>
+                <a:ea typeface="+mn-ea"/>
+                <a:cs typeface="+mn-cs"/>
+              </a:defRPr>
+            </a:lvl2pPr>
+            <a:lvl3pPr marL="900000" indent="-270000" algn="l" defTabSz="457200" rtl="0" eaLnBrk="1" latinLnBrk="0" hangingPunct="1">
+              <a:spcBef>
+                <a:spcPct val="20000"/>
+              </a:spcBef>
+              <a:spcAft>
+                <a:spcPts val="600"/>
+              </a:spcAft>
+              <a:buClr>
+                <a:schemeClr val="accent2"/>
+              </a:buClr>
+              <a:buSzPct val="92000"/>
+              <a:buFont typeface="Wingdings 2" panose="05020102010507070707" pitchFamily="18" charset="2"/>
+              <a:buChar char=""/>
+              <a:defRPr sz="1400" kern="1200">
+                <a:solidFill>
+                  <a:schemeClr val="tx2"/>
+                </a:solidFill>
+                <a:latin typeface="+mn-lt"/>
+                <a:ea typeface="+mn-ea"/>
+                <a:cs typeface="+mn-cs"/>
+              </a:defRPr>
+            </a:lvl3pPr>
+            <a:lvl4pPr marL="1242000" indent="-234000" algn="l" defTabSz="457200" rtl="0" eaLnBrk="1" latinLnBrk="0" hangingPunct="1">
+              <a:spcBef>
+                <a:spcPct val="20000"/>
+              </a:spcBef>
+              <a:spcAft>
+                <a:spcPts val="600"/>
+              </a:spcAft>
+              <a:buClr>
+                <a:schemeClr val="accent2"/>
+              </a:buClr>
+              <a:buSzPct val="92000"/>
+              <a:buFont typeface="Wingdings 2" panose="05020102010507070707" pitchFamily="18" charset="2"/>
+              <a:buChar char=""/>
+              <a:defRPr sz="1200" kern="1200">
+                <a:solidFill>
+                  <a:schemeClr val="tx2"/>
+                </a:solidFill>
+                <a:latin typeface="+mn-lt"/>
+                <a:ea typeface="+mn-ea"/>
+                <a:cs typeface="+mn-cs"/>
+              </a:defRPr>
+            </a:lvl4pPr>
+            <a:lvl5pPr marL="1602000" indent="-234000" algn="l" defTabSz="457200" rtl="0" eaLnBrk="1" latinLnBrk="0" hangingPunct="1">
+              <a:spcBef>
+                <a:spcPct val="20000"/>
+              </a:spcBef>
+              <a:spcAft>
+                <a:spcPts val="600"/>
+              </a:spcAft>
+              <a:buClr>
+                <a:schemeClr val="accent2"/>
+              </a:buClr>
+              <a:buSzPct val="92000"/>
+              <a:buFont typeface="Wingdings 2" panose="05020102010507070707" pitchFamily="18" charset="2"/>
+              <a:buChar char=""/>
+              <a:defRPr sz="1200" kern="1200">
+                <a:solidFill>
+                  <a:schemeClr val="tx2"/>
+                </a:solidFill>
+                <a:latin typeface="+mn-lt"/>
+                <a:ea typeface="+mn-ea"/>
+                <a:cs typeface="+mn-cs"/>
+              </a:defRPr>
+            </a:lvl5pPr>
+            <a:lvl6pPr marL="1900000" indent="-228600" algn="l" defTabSz="457200" rtl="0" eaLnBrk="1" latinLnBrk="0" hangingPunct="1">
+              <a:spcBef>
+                <a:spcPct val="20000"/>
+              </a:spcBef>
+              <a:spcAft>
+                <a:spcPts val="600"/>
+              </a:spcAft>
+              <a:buClr>
+                <a:schemeClr val="accent2"/>
+              </a:buClr>
+              <a:buSzPct val="92000"/>
+              <a:buFont typeface="Wingdings 2" panose="05020102010507070707" pitchFamily="18" charset="2"/>
+              <a:buChar char=""/>
+              <a:defRPr sz="1200" kern="1200">
+                <a:solidFill>
+                  <a:schemeClr val="tx2"/>
+                </a:solidFill>
+                <a:latin typeface="+mn-lt"/>
+                <a:ea typeface="+mn-ea"/>
+                <a:cs typeface="+mn-cs"/>
+              </a:defRPr>
+            </a:lvl6pPr>
+            <a:lvl7pPr marL="2200000" indent="-228600" algn="l" defTabSz="457200" rtl="0" eaLnBrk="1" latinLnBrk="0" hangingPunct="1">
+              <a:spcBef>
+                <a:spcPct val="20000"/>
+              </a:spcBef>
+              <a:spcAft>
+                <a:spcPts val="600"/>
+              </a:spcAft>
+              <a:buClr>
+                <a:schemeClr val="accent2"/>
+              </a:buClr>
+              <a:buSzPct val="92000"/>
+              <a:buFont typeface="Wingdings 2" panose="05020102010507070707" pitchFamily="18" charset="2"/>
+              <a:buChar char=""/>
+              <a:defRPr sz="1200" kern="1200">
+                <a:solidFill>
+                  <a:schemeClr val="tx2"/>
+                </a:solidFill>
+                <a:latin typeface="+mn-lt"/>
+                <a:ea typeface="+mn-ea"/>
+                <a:cs typeface="+mn-cs"/>
+              </a:defRPr>
+            </a:lvl7pPr>
+            <a:lvl8pPr marL="2500000" indent="-228600" algn="l" defTabSz="457200" rtl="0" eaLnBrk="1" latinLnBrk="0" hangingPunct="1">
+              <a:spcBef>
+                <a:spcPct val="20000"/>
+              </a:spcBef>
+              <a:spcAft>
+                <a:spcPts val="600"/>
+              </a:spcAft>
+              <a:buClr>
+                <a:schemeClr val="accent2"/>
+              </a:buClr>
+              <a:buSzPct val="92000"/>
+              <a:buFont typeface="Wingdings 2" panose="05020102010507070707" pitchFamily="18" charset="2"/>
+              <a:buChar char=""/>
+              <a:defRPr sz="1200" kern="1200">
+                <a:solidFill>
+                  <a:schemeClr val="tx2"/>
+                </a:solidFill>
+                <a:latin typeface="+mn-lt"/>
+                <a:ea typeface="+mn-ea"/>
+                <a:cs typeface="+mn-cs"/>
+              </a:defRPr>
+            </a:lvl8pPr>
+            <a:lvl9pPr marL="2800000" indent="-228600" algn="l" defTabSz="457200" rtl="0" eaLnBrk="1" latinLnBrk="0" hangingPunct="1">
+              <a:spcBef>
+                <a:spcPct val="20000"/>
+              </a:spcBef>
+              <a:spcAft>
+                <a:spcPts val="600"/>
+              </a:spcAft>
+              <a:buClr>
+                <a:schemeClr val="accent2"/>
+              </a:buClr>
+              <a:buSzPct val="92000"/>
+              <a:buFont typeface="Wingdings 2" panose="05020102010507070707" pitchFamily="18" charset="2"/>
+              <a:buChar char=""/>
+              <a:defRPr sz="1200" kern="1200">
+                <a:solidFill>
+                  <a:schemeClr val="tx2"/>
+                </a:solidFill>
+                <a:latin typeface="+mn-lt"/>
+                <a:ea typeface="+mn-ea"/>
+                <a:cs typeface="+mn-cs"/>
+              </a:defRPr>
+            </a:lvl9pPr>
+          </a:lstStyle>
+          <a:p>
+            <a:r>
+              <a:rPr lang="en-US" dirty="0"/>
+              <a:t>Class: Car</a:t>
+            </a:r>
+          </a:p>
+          <a:p>
+            <a:pPr lvl="1"/>
+            <a:r>
+              <a:rPr lang="en-US" dirty="0"/>
+              <a:t>State: color, make, model</a:t>
+            </a:r>
+          </a:p>
+          <a:p>
+            <a:pPr lvl="1"/>
+            <a:r>
+              <a:rPr lang="en-US" dirty="0"/>
+              <a:t>Behavior: accelerate(), brake(), turn()</a:t>
+            </a:r>
+          </a:p>
+        </p:txBody>
+      </p:sp>
+      <p:sp>
+        <p:nvSpPr>
+          <p:cNvPr id="8" name="Content Placeholder 2">
+            <a:extLst>
+              <a:ext uri="{FF2B5EF4-FFF2-40B4-BE49-F238E27FC236}">
+                <a16:creationId xmlns:a16="http://schemas.microsoft.com/office/drawing/2014/main" id="{113E69E4-86F7-0152-C1C6-A181016BA9AE}"/>
+              </a:ext>
+            </a:extLst>
+          </p:cNvPr>
+          <p:cNvSpPr txBox="1">
+            <a:spLocks/>
+          </p:cNvSpPr>
+          <p:nvPr/>
+        </p:nvSpPr>
+        <p:spPr>
+          <a:xfrm>
+            <a:off x="6096000" y="4334274"/>
+            <a:ext cx="4097279" cy="1821570"/>
+          </a:xfrm>
+          <a:prstGeom prst="rect">
+            <a:avLst/>
+          </a:prstGeom>
+        </p:spPr>
+        <p:txBody>
+          <a:bodyPr vert="horz" lIns="91440" tIns="45720" rIns="91440" bIns="45720" rtlCol="0" anchor="ctr">
+            <a:normAutofit/>
+          </a:bodyPr>
+          <a:lstStyle>
+            <a:lvl1pPr marL="306000" indent="-306000" algn="l" defTabSz="457200" rtl="0" eaLnBrk="1" latinLnBrk="0" hangingPunct="1">
+              <a:spcBef>
+                <a:spcPct val="20000"/>
+              </a:spcBef>
+              <a:spcAft>
+                <a:spcPts val="600"/>
+              </a:spcAft>
+              <a:buClr>
+                <a:schemeClr val="accent2"/>
+              </a:buClr>
+              <a:buSzPct val="92000"/>
+              <a:buFont typeface="Wingdings 2" panose="05020102010507070707" pitchFamily="18" charset="2"/>
+              <a:buChar char=""/>
+              <a:defRPr sz="1800" kern="1200">
+                <a:solidFill>
+                  <a:schemeClr val="tx2"/>
+                </a:solidFill>
+                <a:latin typeface="+mn-lt"/>
+                <a:ea typeface="+mn-ea"/>
+                <a:cs typeface="+mn-cs"/>
+              </a:defRPr>
+            </a:lvl1pPr>
+            <a:lvl2pPr marL="630000" indent="-306000" algn="l" defTabSz="457200" rtl="0" eaLnBrk="1" latinLnBrk="0" hangingPunct="1">
+              <a:spcBef>
+                <a:spcPct val="20000"/>
+              </a:spcBef>
+              <a:spcAft>
+                <a:spcPts val="600"/>
+              </a:spcAft>
+              <a:buClr>
+                <a:schemeClr val="accent2"/>
+              </a:buClr>
+              <a:buSzPct val="92000"/>
+              <a:buFont typeface="Wingdings 2" panose="05020102010507070707" pitchFamily="18" charset="2"/>
+              <a:buChar char=""/>
+              <a:defRPr sz="1600" kern="1200">
+                <a:solidFill>
+                  <a:schemeClr val="tx2"/>
+                </a:solidFill>
+                <a:latin typeface="+mn-lt"/>
+                <a:ea typeface="+mn-ea"/>
+                <a:cs typeface="+mn-cs"/>
+              </a:defRPr>
+            </a:lvl2pPr>
+            <a:lvl3pPr marL="900000" indent="-270000" algn="l" defTabSz="457200" rtl="0" eaLnBrk="1" latinLnBrk="0" hangingPunct="1">
+              <a:spcBef>
+                <a:spcPct val="20000"/>
+              </a:spcBef>
+              <a:spcAft>
+                <a:spcPts val="600"/>
+              </a:spcAft>
+              <a:buClr>
+                <a:schemeClr val="accent2"/>
+              </a:buClr>
+              <a:buSzPct val="92000"/>
+              <a:buFont typeface="Wingdings 2" panose="05020102010507070707" pitchFamily="18" charset="2"/>
+              <a:buChar char=""/>
+              <a:defRPr sz="1400" kern="1200">
+                <a:solidFill>
+                  <a:schemeClr val="tx2"/>
+                </a:solidFill>
+                <a:latin typeface="+mn-lt"/>
+                <a:ea typeface="+mn-ea"/>
+                <a:cs typeface="+mn-cs"/>
+              </a:defRPr>
+            </a:lvl3pPr>
+            <a:lvl4pPr marL="1242000" indent="-234000" algn="l" defTabSz="457200" rtl="0" eaLnBrk="1" latinLnBrk="0" hangingPunct="1">
+              <a:spcBef>
+                <a:spcPct val="20000"/>
+              </a:spcBef>
+              <a:spcAft>
+                <a:spcPts val="600"/>
+              </a:spcAft>
+              <a:buClr>
+                <a:schemeClr val="accent2"/>
+              </a:buClr>
+              <a:buSzPct val="92000"/>
+              <a:buFont typeface="Wingdings 2" panose="05020102010507070707" pitchFamily="18" charset="2"/>
+              <a:buChar char=""/>
+              <a:defRPr sz="1200" kern="1200">
+                <a:solidFill>
+                  <a:schemeClr val="tx2"/>
+                </a:solidFill>
+                <a:latin typeface="+mn-lt"/>
+                <a:ea typeface="+mn-ea"/>
+                <a:cs typeface="+mn-cs"/>
+              </a:defRPr>
+            </a:lvl4pPr>
+            <a:lvl5pPr marL="1602000" indent="-234000" algn="l" defTabSz="457200" rtl="0" eaLnBrk="1" latinLnBrk="0" hangingPunct="1">
+              <a:spcBef>
+                <a:spcPct val="20000"/>
+              </a:spcBef>
+              <a:spcAft>
+                <a:spcPts val="600"/>
+              </a:spcAft>
+              <a:buClr>
+                <a:schemeClr val="accent2"/>
+              </a:buClr>
+              <a:buSzPct val="92000"/>
+              <a:buFont typeface="Wingdings 2" panose="05020102010507070707" pitchFamily="18" charset="2"/>
+              <a:buChar char=""/>
+              <a:defRPr sz="1200" kern="1200">
+                <a:solidFill>
+                  <a:schemeClr val="tx2"/>
+                </a:solidFill>
+                <a:latin typeface="+mn-lt"/>
+                <a:ea typeface="+mn-ea"/>
+                <a:cs typeface="+mn-cs"/>
+              </a:defRPr>
+            </a:lvl5pPr>
+            <a:lvl6pPr marL="1900000" indent="-228600" algn="l" defTabSz="457200" rtl="0" eaLnBrk="1" latinLnBrk="0" hangingPunct="1">
+              <a:spcBef>
+                <a:spcPct val="20000"/>
+              </a:spcBef>
+              <a:spcAft>
+                <a:spcPts val="600"/>
+              </a:spcAft>
+              <a:buClr>
+                <a:schemeClr val="accent2"/>
+              </a:buClr>
+              <a:buSzPct val="92000"/>
+              <a:buFont typeface="Wingdings 2" panose="05020102010507070707" pitchFamily="18" charset="2"/>
+              <a:buChar char=""/>
+              <a:defRPr sz="1200" kern="1200">
+                <a:solidFill>
+                  <a:schemeClr val="tx2"/>
+                </a:solidFill>
+                <a:latin typeface="+mn-lt"/>
+                <a:ea typeface="+mn-ea"/>
+                <a:cs typeface="+mn-cs"/>
+              </a:defRPr>
+            </a:lvl6pPr>
+            <a:lvl7pPr marL="2200000" indent="-228600" algn="l" defTabSz="457200" rtl="0" eaLnBrk="1" latinLnBrk="0" hangingPunct="1">
+              <a:spcBef>
+                <a:spcPct val="20000"/>
+              </a:spcBef>
+              <a:spcAft>
+                <a:spcPts val="600"/>
+              </a:spcAft>
+              <a:buClr>
+                <a:schemeClr val="accent2"/>
+              </a:buClr>
+              <a:buSzPct val="92000"/>
+              <a:buFont typeface="Wingdings 2" panose="05020102010507070707" pitchFamily="18" charset="2"/>
+              <a:buChar char=""/>
+              <a:defRPr sz="1200" kern="1200">
+                <a:solidFill>
+                  <a:schemeClr val="tx2"/>
+                </a:solidFill>
+                <a:latin typeface="+mn-lt"/>
+                <a:ea typeface="+mn-ea"/>
+                <a:cs typeface="+mn-cs"/>
+              </a:defRPr>
+            </a:lvl7pPr>
+            <a:lvl8pPr marL="2500000" indent="-228600" algn="l" defTabSz="457200" rtl="0" eaLnBrk="1" latinLnBrk="0" hangingPunct="1">
+              <a:spcBef>
+                <a:spcPct val="20000"/>
+              </a:spcBef>
+              <a:spcAft>
+                <a:spcPts val="600"/>
+              </a:spcAft>
+              <a:buClr>
+                <a:schemeClr val="accent2"/>
+              </a:buClr>
+              <a:buSzPct val="92000"/>
+              <a:buFont typeface="Wingdings 2" panose="05020102010507070707" pitchFamily="18" charset="2"/>
+              <a:buChar char=""/>
+              <a:defRPr sz="1200" kern="1200">
+                <a:solidFill>
+                  <a:schemeClr val="tx2"/>
+                </a:solidFill>
+                <a:latin typeface="+mn-lt"/>
+                <a:ea typeface="+mn-ea"/>
+                <a:cs typeface="+mn-cs"/>
+              </a:defRPr>
+            </a:lvl8pPr>
+            <a:lvl9pPr marL="2800000" indent="-228600" algn="l" defTabSz="457200" rtl="0" eaLnBrk="1" latinLnBrk="0" hangingPunct="1">
+              <a:spcBef>
+                <a:spcPct val="20000"/>
+              </a:spcBef>
+              <a:spcAft>
+                <a:spcPts val="600"/>
+              </a:spcAft>
+              <a:buClr>
+                <a:schemeClr val="accent2"/>
+              </a:buClr>
+              <a:buSzPct val="92000"/>
+              <a:buFont typeface="Wingdings 2" panose="05020102010507070707" pitchFamily="18" charset="2"/>
+              <a:buChar char=""/>
+              <a:defRPr sz="1200" kern="1200">
+                <a:solidFill>
+                  <a:schemeClr val="tx2"/>
+                </a:solidFill>
+                <a:latin typeface="+mn-lt"/>
+                <a:ea typeface="+mn-ea"/>
+                <a:cs typeface="+mn-cs"/>
+              </a:defRPr>
+            </a:lvl9pPr>
+          </a:lstStyle>
+          <a:p>
+            <a:r>
+              <a:rPr lang="en-US" dirty="0"/>
+              <a:t>Object: </a:t>
+            </a:r>
+            <a:r>
+              <a:rPr lang="en-US" dirty="0" err="1"/>
+              <a:t>myCar</a:t>
+            </a:r>
+            <a:endParaRPr lang="en-US" dirty="0"/>
+          </a:p>
+          <a:p>
+            <a:pPr lvl="1"/>
+            <a:r>
+              <a:rPr lang="en-US" dirty="0"/>
+              <a:t>State: color = “red’, make = “Toyota”</a:t>
+            </a:r>
+          </a:p>
+          <a:p>
+            <a:pPr lvl="1"/>
+            <a:r>
+              <a:rPr lang="en-US" dirty="0"/>
+              <a:t>Behavior: accelerate(), brake(), turn()</a:t>
+            </a:r>
+          </a:p>
+        </p:txBody>
+      </p:sp>
+    </p:spTree>
+    <p:extLst>
+      <p:ext uri="{BB962C8B-B14F-4D97-AF65-F5344CB8AC3E}">
+        <p14:creationId xmlns:p14="http://schemas.microsoft.com/office/powerpoint/2010/main" val="478182739"/>
+      </p:ext>
+    </p:extLst>
+  </p:cSld>
+  <p:clrMapOvr>
+    <a:masterClrMapping/>
+  </p:clrMapOvr>
+</p:sld>
+</file>
+
+<file path=ppt/slides/slide36.xml><?xml version="1.0" encoding="utf-8"?>
+<p:sld xmlns:a="http://schemas.openxmlformats.org/drawingml/2006/main" xmlns:r="http://schemas.openxmlformats.org/officeDocument/2006/relationships" xmlns:p="http://schemas.openxmlformats.org/presentationml/2006/main">
+  <p:cSld>
+    <p:spTree>
+      <p:nvGrpSpPr>
+        <p:cNvPr id="1" name=""/>
+        <p:cNvGrpSpPr/>
+        <p:nvPr/>
+      </p:nvGrpSpPr>
+      <p:grpSpPr>
+        <a:xfrm>
+          <a:off x="0" y="0"/>
+          <a:ext cx="0" cy="0"/>
+          <a:chOff x="0" y="0"/>
+          <a:chExt cx="0" cy="0"/>
+        </a:xfrm>
+      </p:grpSpPr>
+      <p:sp>
+        <p:nvSpPr>
+          <p:cNvPr id="2" name="Title 1">
+            <a:extLst>
+              <a:ext uri="{FF2B5EF4-FFF2-40B4-BE49-F238E27FC236}">
+                <a16:creationId xmlns:a16="http://schemas.microsoft.com/office/drawing/2014/main" id="{CC9F0D4C-03AC-DEF4-2D9C-D957F7174197}"/>
+              </a:ext>
+            </a:extLst>
+          </p:cNvPr>
+          <p:cNvSpPr>
+            <a:spLocks noGrp="1"/>
+          </p:cNvSpPr>
+          <p:nvPr>
+            <p:ph type="title"/>
+          </p:nvPr>
+        </p:nvSpPr>
+        <p:spPr/>
+        <p:txBody>
+          <a:bodyPr/>
+          <a:lstStyle/>
+          <a:p>
+            <a:r>
+              <a:rPr lang="en-US" dirty="0"/>
+              <a:t>Class, method, Method arguments example</a:t>
+            </a:r>
+          </a:p>
+        </p:txBody>
+      </p:sp>
+      <p:pic>
+        <p:nvPicPr>
+          <p:cNvPr id="7" name="Picture 6">
+            <a:extLst>
+              <a:ext uri="{FF2B5EF4-FFF2-40B4-BE49-F238E27FC236}">
+                <a16:creationId xmlns:a16="http://schemas.microsoft.com/office/drawing/2014/main" id="{276558CA-9C48-DCD2-F29B-C49ABF2A6739}"/>
+              </a:ext>
+            </a:extLst>
+          </p:cNvPr>
+          <p:cNvPicPr>
+            <a:picLocks noChangeAspect="1"/>
+          </p:cNvPicPr>
+          <p:nvPr/>
+        </p:nvPicPr>
+        <p:blipFill>
+          <a:blip r:embed="rId2"/>
+          <a:stretch>
+            <a:fillRect/>
+          </a:stretch>
+        </p:blipFill>
+        <p:spPr>
+          <a:xfrm>
+            <a:off x="956137" y="2115293"/>
+            <a:ext cx="4906060" cy="4305901"/>
+          </a:xfrm>
+          <a:prstGeom prst="rect">
+            <a:avLst/>
+          </a:prstGeom>
+        </p:spPr>
+      </p:pic>
+      <p:sp>
+        <p:nvSpPr>
+          <p:cNvPr id="8" name="TextBox 7">
+            <a:extLst>
+              <a:ext uri="{FF2B5EF4-FFF2-40B4-BE49-F238E27FC236}">
+                <a16:creationId xmlns:a16="http://schemas.microsoft.com/office/drawing/2014/main" id="{8CB5F59C-83C9-CE4E-0B32-C3148D05A0C0}"/>
+              </a:ext>
+            </a:extLst>
+          </p:cNvPr>
+          <p:cNvSpPr txBox="1"/>
+          <p:nvPr/>
+        </p:nvSpPr>
+        <p:spPr>
+          <a:xfrm>
+            <a:off x="6401513" y="2115293"/>
+            <a:ext cx="4834350" cy="923330"/>
+          </a:xfrm>
+          <a:prstGeom prst="rect">
+            <a:avLst/>
+          </a:prstGeom>
+          <a:noFill/>
+        </p:spPr>
+        <p:txBody>
+          <a:bodyPr wrap="square" rtlCol="0">
+            <a:spAutoFit/>
+          </a:bodyPr>
+          <a:lstStyle/>
+          <a:p>
+            <a:r>
+              <a:rPr lang="en-US" dirty="0"/>
+              <a:t>A method signature has: an access modifier, static keyword (optional), a return type, method name, and a list of parameters (optional) </a:t>
+            </a:r>
+          </a:p>
+        </p:txBody>
+      </p:sp>
+      <p:sp>
+        <p:nvSpPr>
+          <p:cNvPr id="10" name="TextBox 9">
+            <a:extLst>
+              <a:ext uri="{FF2B5EF4-FFF2-40B4-BE49-F238E27FC236}">
+                <a16:creationId xmlns:a16="http://schemas.microsoft.com/office/drawing/2014/main" id="{ABFDEB00-0CDB-C844-0091-54CFB85B8A15}"/>
+              </a:ext>
+            </a:extLst>
+          </p:cNvPr>
+          <p:cNvSpPr txBox="1"/>
+          <p:nvPr/>
+        </p:nvSpPr>
+        <p:spPr>
+          <a:xfrm>
+            <a:off x="4056403" y="6451199"/>
+            <a:ext cx="4079194" cy="369332"/>
+          </a:xfrm>
+          <a:prstGeom prst="rect">
+            <a:avLst/>
+          </a:prstGeom>
+          <a:noFill/>
+        </p:spPr>
+        <p:txBody>
+          <a:bodyPr wrap="none" rtlCol="0">
+            <a:spAutoFit/>
+          </a:bodyPr>
+          <a:lstStyle/>
+          <a:p>
+            <a:r>
+              <a:rPr lang="en-US" dirty="0"/>
+              <a:t>Note: these need to be separate .java files</a:t>
+            </a:r>
+          </a:p>
+        </p:txBody>
+      </p:sp>
+      <p:pic>
+        <p:nvPicPr>
+          <p:cNvPr id="12" name="Picture 11">
+            <a:extLst>
+              <a:ext uri="{FF2B5EF4-FFF2-40B4-BE49-F238E27FC236}">
+                <a16:creationId xmlns:a16="http://schemas.microsoft.com/office/drawing/2014/main" id="{70C88E2B-E253-9245-561D-FEC3A2E7DFA7}"/>
+              </a:ext>
+            </a:extLst>
+          </p:cNvPr>
+          <p:cNvPicPr>
+            <a:picLocks noChangeAspect="1"/>
+          </p:cNvPicPr>
+          <p:nvPr/>
+        </p:nvPicPr>
+        <p:blipFill>
+          <a:blip r:embed="rId3"/>
+          <a:stretch>
+            <a:fillRect/>
+          </a:stretch>
+        </p:blipFill>
+        <p:spPr>
+          <a:xfrm>
+            <a:off x="6946764" y="3366061"/>
+            <a:ext cx="3743847" cy="1629002"/>
+          </a:xfrm>
+          <a:prstGeom prst="rect">
+            <a:avLst/>
+          </a:prstGeom>
+        </p:spPr>
+      </p:pic>
+    </p:spTree>
+    <p:extLst>
+      <p:ext uri="{BB962C8B-B14F-4D97-AF65-F5344CB8AC3E}">
+        <p14:creationId xmlns:p14="http://schemas.microsoft.com/office/powerpoint/2010/main" val="3543706776"/>
+      </p:ext>
+    </p:extLst>
+  </p:cSld>
+  <p:clrMapOvr>
+    <a:masterClrMapping/>
+  </p:clrMapOvr>
+</p:sld>
+</file>
+
+<file path=ppt/slides/slide37.xml><?xml version="1.0" encoding="utf-8"?>
+<p:sld xmlns:a="http://schemas.openxmlformats.org/drawingml/2006/main" xmlns:r="http://schemas.openxmlformats.org/officeDocument/2006/relationships" xmlns:p="http://schemas.openxmlformats.org/presentationml/2006/main">
+  <p:cSld>
+    <p:spTree>
+      <p:nvGrpSpPr>
+        <p:cNvPr id="1" name=""/>
+        <p:cNvGrpSpPr/>
+        <p:nvPr/>
+      </p:nvGrpSpPr>
+      <p:grpSpPr>
+        <a:xfrm>
+          <a:off x="0" y="0"/>
+          <a:ext cx="0" cy="0"/>
+          <a:chOff x="0" y="0"/>
+          <a:chExt cx="0" cy="0"/>
+        </a:xfrm>
+      </p:grpSpPr>
+      <p:sp>
+        <p:nvSpPr>
+          <p:cNvPr id="2" name="Title 1">
+            <a:extLst>
+              <a:ext uri="{FF2B5EF4-FFF2-40B4-BE49-F238E27FC236}">
+                <a16:creationId xmlns:a16="http://schemas.microsoft.com/office/drawing/2014/main" id="{9DCCA99C-B3EC-D43B-5D5E-A4FFB1BC945A}"/>
+              </a:ext>
+            </a:extLst>
+          </p:cNvPr>
+          <p:cNvSpPr>
+            <a:spLocks noGrp="1"/>
+          </p:cNvSpPr>
+          <p:nvPr>
+            <p:ph type="title"/>
+          </p:nvPr>
+        </p:nvSpPr>
+        <p:spPr/>
+        <p:txBody>
+          <a:bodyPr/>
+          <a:lstStyle/>
+          <a:p>
+            <a:r>
+              <a:rPr lang="en-US" dirty="0"/>
+              <a:t>The main method</a:t>
+            </a:r>
+          </a:p>
+        </p:txBody>
+      </p:sp>
+      <p:pic>
+        <p:nvPicPr>
+          <p:cNvPr id="5" name="Content Placeholder 4">
+            <a:extLst>
+              <a:ext uri="{FF2B5EF4-FFF2-40B4-BE49-F238E27FC236}">
+                <a16:creationId xmlns:a16="http://schemas.microsoft.com/office/drawing/2014/main" id="{E68F18D7-7595-E180-4105-9B37F3F9698C}"/>
+              </a:ext>
+            </a:extLst>
+          </p:cNvPr>
+          <p:cNvPicPr>
+            <a:picLocks noGrp="1" noChangeAspect="1"/>
+          </p:cNvPicPr>
+          <p:nvPr>
+            <p:ph idx="1"/>
+          </p:nvPr>
+        </p:nvPicPr>
+        <p:blipFill>
+          <a:blip r:embed="rId2"/>
+          <a:stretch>
+            <a:fillRect/>
+          </a:stretch>
+        </p:blipFill>
+        <p:spPr>
+          <a:xfrm>
+            <a:off x="3671548" y="2671823"/>
+            <a:ext cx="4848902" cy="2095792"/>
+          </a:xfrm>
+          <a:prstGeom prst="rect">
+            <a:avLst/>
+          </a:prstGeom>
+        </p:spPr>
+      </p:pic>
+      <p:pic>
+        <p:nvPicPr>
+          <p:cNvPr id="7" name="Picture 6">
+            <a:extLst>
+              <a:ext uri="{FF2B5EF4-FFF2-40B4-BE49-F238E27FC236}">
+                <a16:creationId xmlns:a16="http://schemas.microsoft.com/office/drawing/2014/main" id="{D36E16C3-886A-FC2A-63DF-4B38BF077EAD}"/>
+              </a:ext>
+            </a:extLst>
+          </p:cNvPr>
+          <p:cNvPicPr>
+            <a:picLocks noChangeAspect="1"/>
+          </p:cNvPicPr>
+          <p:nvPr/>
+        </p:nvPicPr>
+        <p:blipFill>
+          <a:blip r:embed="rId3"/>
+          <a:stretch>
+            <a:fillRect/>
+          </a:stretch>
+        </p:blipFill>
+        <p:spPr>
+          <a:xfrm>
+            <a:off x="1509072" y="5410332"/>
+            <a:ext cx="9173855" cy="552527"/>
+          </a:xfrm>
+          <a:prstGeom prst="rect">
+            <a:avLst/>
+          </a:prstGeom>
+        </p:spPr>
+      </p:pic>
+      <p:sp>
+        <p:nvSpPr>
+          <p:cNvPr id="8" name="TextBox 7">
+            <a:extLst>
+              <a:ext uri="{FF2B5EF4-FFF2-40B4-BE49-F238E27FC236}">
+                <a16:creationId xmlns:a16="http://schemas.microsoft.com/office/drawing/2014/main" id="{6D25407F-5446-8F6A-D1D0-0A39F4081ABC}"/>
+              </a:ext>
+            </a:extLst>
+          </p:cNvPr>
+          <p:cNvSpPr txBox="1"/>
+          <p:nvPr/>
+        </p:nvSpPr>
+        <p:spPr>
+          <a:xfrm>
+            <a:off x="3466208" y="2029106"/>
+            <a:ext cx="5259581" cy="369332"/>
+          </a:xfrm>
+          <a:prstGeom prst="rect">
+            <a:avLst/>
+          </a:prstGeom>
+          <a:noFill/>
+        </p:spPr>
+        <p:txBody>
+          <a:bodyPr wrap="none" rtlCol="0">
+            <a:spAutoFit/>
+          </a:bodyPr>
+          <a:lstStyle/>
+          <a:p>
+            <a:r>
+              <a:rPr lang="en-US" dirty="0"/>
+              <a:t>The main method is the entry point to our application</a:t>
+            </a:r>
+          </a:p>
+        </p:txBody>
+      </p:sp>
+    </p:spTree>
+    <p:extLst>
+      <p:ext uri="{BB962C8B-B14F-4D97-AF65-F5344CB8AC3E}">
+        <p14:creationId xmlns:p14="http://schemas.microsoft.com/office/powerpoint/2010/main" val="2079994539"/>
+      </p:ext>
+    </p:extLst>
+  </p:cSld>
+  <p:clrMapOvr>
+    <a:masterClrMapping/>
+  </p:clrMapOvr>
+</p:sld>
+</file>
+
+<file path=ppt/slides/slide38.xml><?xml version="1.0" encoding="utf-8"?>
+<p:sld xmlns:a="http://schemas.openxmlformats.org/drawingml/2006/main" xmlns:r="http://schemas.openxmlformats.org/officeDocument/2006/relationships" xmlns:p="http://schemas.openxmlformats.org/presentationml/2006/main">
+  <p:cSld>
+    <p:spTree>
+      <p:nvGrpSpPr>
+        <p:cNvPr id="1" name=""/>
+        <p:cNvGrpSpPr/>
+        <p:nvPr/>
+      </p:nvGrpSpPr>
+      <p:grpSpPr>
+        <a:xfrm>
+          <a:off x="0" y="0"/>
+          <a:ext cx="0" cy="0"/>
+          <a:chOff x="0" y="0"/>
+          <a:chExt cx="0" cy="0"/>
+        </a:xfrm>
+      </p:grpSpPr>
+      <p:sp>
+        <p:nvSpPr>
+          <p:cNvPr id="2" name="Title 1">
+            <a:extLst>
+              <a:ext uri="{FF2B5EF4-FFF2-40B4-BE49-F238E27FC236}">
+                <a16:creationId xmlns:a16="http://schemas.microsoft.com/office/drawing/2014/main" id="{C07977DB-7686-BC3A-6D5B-103091022F22}"/>
+              </a:ext>
+            </a:extLst>
+          </p:cNvPr>
+          <p:cNvSpPr>
+            <a:spLocks noGrp="1"/>
+          </p:cNvSpPr>
+          <p:nvPr>
+            <p:ph type="title"/>
+          </p:nvPr>
+        </p:nvSpPr>
+        <p:spPr/>
+        <p:txBody>
+          <a:bodyPr/>
+          <a:lstStyle/>
+          <a:p>
+            <a:r>
+              <a:rPr lang="en-US" dirty="0"/>
+              <a:t>Stack &amp; </a:t>
+            </a:r>
+            <a:r>
+              <a:rPr lang="en-US" dirty="0" err="1"/>
+              <a:t>HEap</a:t>
+            </a:r>
+            <a:endParaRPr lang="en-US" dirty="0"/>
+          </a:p>
+        </p:txBody>
+      </p:sp>
+      <p:sp>
+        <p:nvSpPr>
+          <p:cNvPr id="3" name="Content Placeholder 2">
+            <a:extLst>
+              <a:ext uri="{FF2B5EF4-FFF2-40B4-BE49-F238E27FC236}">
+                <a16:creationId xmlns:a16="http://schemas.microsoft.com/office/drawing/2014/main" id="{3A274AC7-9D38-CD5B-BA0B-110BD87C016B}"/>
+              </a:ext>
+            </a:extLst>
+          </p:cNvPr>
+          <p:cNvSpPr>
+            <a:spLocks noGrp="1"/>
+          </p:cNvSpPr>
+          <p:nvPr>
+            <p:ph idx="1"/>
+          </p:nvPr>
+        </p:nvSpPr>
+        <p:spPr>
+          <a:xfrm>
+            <a:off x="581192" y="2180497"/>
+            <a:ext cx="11029615" cy="1577312"/>
+          </a:xfrm>
+        </p:spPr>
+        <p:txBody>
+          <a:bodyPr/>
+          <a:lstStyle/>
+          <a:p>
+            <a:r>
+              <a:rPr lang="en-US" dirty="0"/>
+              <a:t>When a Java program runs, the JVM manages memory in several areas</a:t>
+            </a:r>
+          </a:p>
+          <a:p>
+            <a:pPr lvl="1"/>
+            <a:r>
+              <a:rPr lang="en-US" dirty="0"/>
+              <a:t>Stack – keeps track of method calls, local variables, reference pointers</a:t>
+            </a:r>
+          </a:p>
+          <a:p>
+            <a:pPr lvl="1"/>
+            <a:r>
+              <a:rPr lang="en-US" dirty="0"/>
+              <a:t>Heap – stores instantiated objects, arrays, &amp; the String Pool</a:t>
+            </a:r>
+          </a:p>
+        </p:txBody>
+      </p:sp>
+      <p:sp>
+        <p:nvSpPr>
+          <p:cNvPr id="5" name="TextBox 4">
+            <a:extLst>
+              <a:ext uri="{FF2B5EF4-FFF2-40B4-BE49-F238E27FC236}">
+                <a16:creationId xmlns:a16="http://schemas.microsoft.com/office/drawing/2014/main" id="{564BB8AA-6CF2-41BB-C97D-4FAA0AFEE1C4}"/>
+              </a:ext>
+            </a:extLst>
+          </p:cNvPr>
+          <p:cNvSpPr txBox="1"/>
+          <p:nvPr/>
+        </p:nvSpPr>
+        <p:spPr>
+          <a:xfrm>
+            <a:off x="818889" y="4123093"/>
+            <a:ext cx="4824087" cy="2308324"/>
+          </a:xfrm>
+          <a:prstGeom prst="rect">
+            <a:avLst/>
+          </a:prstGeom>
+          <a:noFill/>
+        </p:spPr>
+        <p:txBody>
+          <a:bodyPr wrap="square">
+            <a:spAutoFit/>
+          </a:bodyPr>
+          <a:lstStyle/>
+          <a:p>
+            <a:r>
+              <a:rPr lang="en-US" sz="1800" b="0" i="0" dirty="0">
+                <a:solidFill>
+                  <a:schemeClr val="tx1"/>
+                </a:solidFill>
+                <a:effectLst/>
+                <a:latin typeface="+mn-lt"/>
+              </a:rPr>
+              <a:t>public class Main { </a:t>
+            </a:r>
+          </a:p>
+          <a:p>
+            <a:endParaRPr lang="en-US" dirty="0"/>
+          </a:p>
+          <a:p>
+            <a:pPr lvl="1"/>
+            <a:r>
+              <a:rPr lang="en-US" b="0" i="0" dirty="0">
+                <a:solidFill>
+                  <a:schemeClr val="tx1"/>
+                </a:solidFill>
+                <a:effectLst/>
+                <a:latin typeface="+mn-lt"/>
+              </a:rPr>
+              <a:t>public static void main(String[] </a:t>
+            </a:r>
+            <a:r>
+              <a:rPr lang="en-US" b="0" i="0" dirty="0" err="1">
+                <a:solidFill>
+                  <a:schemeClr val="tx1"/>
+                </a:solidFill>
+                <a:effectLst/>
+                <a:latin typeface="+mn-lt"/>
+              </a:rPr>
+              <a:t>args</a:t>
+            </a:r>
+            <a:r>
+              <a:rPr lang="en-US" b="0" i="0" dirty="0">
+                <a:solidFill>
+                  <a:schemeClr val="tx1"/>
+                </a:solidFill>
+                <a:effectLst/>
+                <a:latin typeface="+mn-lt"/>
+              </a:rPr>
+              <a:t>) { </a:t>
+            </a:r>
+          </a:p>
+          <a:p>
+            <a:pPr lvl="2"/>
+            <a:r>
+              <a:rPr lang="en-US" b="0" i="0" dirty="0">
+                <a:solidFill>
+                  <a:schemeClr val="tx1"/>
+                </a:solidFill>
+                <a:effectLst/>
+                <a:latin typeface="+mn-lt"/>
+              </a:rPr>
+              <a:t>int age = 25; </a:t>
+            </a:r>
+          </a:p>
+          <a:p>
+            <a:pPr lvl="2"/>
+            <a:r>
+              <a:rPr lang="en-US" b="0" i="0" dirty="0">
+                <a:solidFill>
+                  <a:schemeClr val="tx1"/>
+                </a:solidFill>
+                <a:effectLst/>
+                <a:latin typeface="+mn-lt"/>
+              </a:rPr>
+              <a:t>Person </a:t>
+            </a:r>
+            <a:r>
+              <a:rPr lang="en-US" b="0" i="0" dirty="0" err="1">
+                <a:solidFill>
+                  <a:schemeClr val="tx1"/>
+                </a:solidFill>
+                <a:effectLst/>
+                <a:latin typeface="+mn-lt"/>
+              </a:rPr>
+              <a:t>person</a:t>
+            </a:r>
+            <a:r>
+              <a:rPr lang="en-US" b="0" i="0" dirty="0">
+                <a:solidFill>
+                  <a:schemeClr val="tx1"/>
+                </a:solidFill>
+                <a:effectLst/>
+                <a:latin typeface="+mn-lt"/>
+              </a:rPr>
+              <a:t> = new Person("Alex"); </a:t>
+            </a:r>
+          </a:p>
+          <a:p>
+            <a:pPr lvl="2"/>
+            <a:r>
+              <a:rPr lang="en-US" b="0" i="0" dirty="0" err="1">
+                <a:solidFill>
+                  <a:schemeClr val="tx1"/>
+                </a:solidFill>
+                <a:effectLst/>
+                <a:latin typeface="+mn-lt"/>
+              </a:rPr>
+              <a:t>person.sayHello</a:t>
+            </a:r>
+            <a:r>
+              <a:rPr lang="en-US" b="0" i="0" dirty="0">
+                <a:solidFill>
+                  <a:schemeClr val="tx1"/>
+                </a:solidFill>
+                <a:effectLst/>
+                <a:latin typeface="+mn-lt"/>
+              </a:rPr>
+              <a:t>(); </a:t>
+            </a:r>
+          </a:p>
+          <a:p>
+            <a:pPr lvl="1"/>
+            <a:r>
+              <a:rPr lang="en-US" b="0" i="0" dirty="0">
+                <a:solidFill>
+                  <a:schemeClr val="tx1"/>
+                </a:solidFill>
+                <a:effectLst/>
+                <a:latin typeface="+mn-lt"/>
+              </a:rPr>
+              <a:t>} </a:t>
+            </a:r>
+          </a:p>
+          <a:p>
+            <a:r>
+              <a:rPr lang="en-US" sz="1800" b="0" i="0" dirty="0">
+                <a:solidFill>
+                  <a:schemeClr val="tx1"/>
+                </a:solidFill>
+                <a:effectLst/>
+                <a:latin typeface="+mn-lt"/>
+              </a:rPr>
+              <a:t>}</a:t>
+            </a:r>
+            <a:endParaRPr lang="en-US" dirty="0"/>
+          </a:p>
+        </p:txBody>
+      </p:sp>
+      <p:sp>
+        <p:nvSpPr>
+          <p:cNvPr id="10" name="TextBox 9">
+            <a:extLst>
+              <a:ext uri="{FF2B5EF4-FFF2-40B4-BE49-F238E27FC236}">
+                <a16:creationId xmlns:a16="http://schemas.microsoft.com/office/drawing/2014/main" id="{6B2057D8-F5FC-DA28-7684-2109EC39C9C4}"/>
+              </a:ext>
+            </a:extLst>
+          </p:cNvPr>
+          <p:cNvSpPr txBox="1"/>
+          <p:nvPr/>
+        </p:nvSpPr>
+        <p:spPr>
+          <a:xfrm>
+            <a:off x="6501007" y="4045907"/>
+            <a:ext cx="1127343" cy="1477328"/>
+          </a:xfrm>
+          <a:prstGeom prst="rect">
+            <a:avLst/>
+          </a:prstGeom>
+          <a:noFill/>
+        </p:spPr>
+        <p:txBody>
+          <a:bodyPr wrap="square" rtlCol="0">
+            <a:spAutoFit/>
+          </a:bodyPr>
+          <a:lstStyle/>
+          <a:p>
+            <a:r>
+              <a:rPr lang="en-US" dirty="0"/>
+              <a:t>Stack</a:t>
+            </a:r>
+          </a:p>
+          <a:p>
+            <a:endParaRPr lang="en-US" dirty="0"/>
+          </a:p>
+          <a:p>
+            <a:r>
+              <a:rPr lang="en-US" dirty="0"/>
+              <a:t>Main()</a:t>
+            </a:r>
+          </a:p>
+          <a:p>
+            <a:r>
+              <a:rPr lang="en-US" dirty="0"/>
+              <a:t>Age = 25</a:t>
+            </a:r>
+          </a:p>
+          <a:p>
+            <a:r>
+              <a:rPr lang="en-US" dirty="0"/>
+              <a:t>person</a:t>
+            </a:r>
+          </a:p>
+        </p:txBody>
+      </p:sp>
+      <p:sp>
+        <p:nvSpPr>
+          <p:cNvPr id="12" name="TextBox 11">
+            <a:extLst>
+              <a:ext uri="{FF2B5EF4-FFF2-40B4-BE49-F238E27FC236}">
+                <a16:creationId xmlns:a16="http://schemas.microsoft.com/office/drawing/2014/main" id="{A24795C2-1DAA-B995-3E1F-08C8F04F846F}"/>
+              </a:ext>
+            </a:extLst>
+          </p:cNvPr>
+          <p:cNvSpPr txBox="1"/>
+          <p:nvPr/>
+        </p:nvSpPr>
+        <p:spPr>
+          <a:xfrm>
+            <a:off x="8839198" y="4045907"/>
+            <a:ext cx="1889344" cy="1754326"/>
+          </a:xfrm>
+          <a:prstGeom prst="rect">
+            <a:avLst/>
+          </a:prstGeom>
+          <a:noFill/>
+        </p:spPr>
+        <p:txBody>
+          <a:bodyPr wrap="square" rtlCol="0">
+            <a:spAutoFit/>
+          </a:bodyPr>
+          <a:lstStyle/>
+          <a:p>
+            <a:r>
+              <a:rPr lang="en-US" dirty="0"/>
+              <a:t>Heap</a:t>
+            </a:r>
+          </a:p>
+          <a:p>
+            <a:endParaRPr lang="en-US" dirty="0"/>
+          </a:p>
+          <a:p>
+            <a:r>
+              <a:rPr lang="en-US" dirty="0"/>
+              <a:t>Person object</a:t>
+            </a:r>
+          </a:p>
+          <a:p>
+            <a:r>
+              <a:rPr lang="en-US" dirty="0"/>
+              <a:t>name = “Alex”</a:t>
+            </a:r>
+          </a:p>
+          <a:p>
+            <a:endParaRPr lang="en-US" dirty="0"/>
+          </a:p>
+          <a:p>
+            <a:r>
+              <a:rPr lang="en-US" dirty="0"/>
+              <a:t>The String Pool</a:t>
+            </a:r>
+          </a:p>
+        </p:txBody>
+      </p:sp>
+      <p:sp>
+        <p:nvSpPr>
+          <p:cNvPr id="13" name="Rectangle 12">
+            <a:extLst>
+              <a:ext uri="{FF2B5EF4-FFF2-40B4-BE49-F238E27FC236}">
+                <a16:creationId xmlns:a16="http://schemas.microsoft.com/office/drawing/2014/main" id="{A280DC81-6564-7A08-C5B8-F821C95149C3}"/>
+              </a:ext>
+            </a:extLst>
+          </p:cNvPr>
+          <p:cNvSpPr/>
+          <p:nvPr/>
+        </p:nvSpPr>
+        <p:spPr>
+          <a:xfrm>
+            <a:off x="6501007" y="4572000"/>
+            <a:ext cx="1127343" cy="1045923"/>
+          </a:xfrm>
+          <a:prstGeom prst="rect">
+            <a:avLst/>
+          </a:prstGeom>
+          <a:noFill/>
+          <a:ln>
+            <a:solidFill>
+              <a:schemeClr val="accent2"/>
+            </a:solidFill>
+          </a:ln>
+        </p:spPr>
+        <p:style>
+          <a:lnRef idx="2">
+            <a:schemeClr val="accent1">
+              <a:shade val="15000"/>
+            </a:schemeClr>
+          </a:lnRef>
+          <a:fillRef idx="1">
+            <a:schemeClr val="accent1"/>
+          </a:fillRef>
+          <a:effectRef idx="0">
+            <a:schemeClr val="accent1"/>
+          </a:effectRef>
+          <a:fontRef idx="minor">
+            <a:schemeClr val="lt1"/>
+          </a:fontRef>
+        </p:style>
+        <p:txBody>
+          <a:bodyPr rtlCol="0" anchor="ctr"/>
+          <a:lstStyle/>
+          <a:p>
+            <a:pPr algn="ctr"/>
+            <a:endParaRPr lang="en-US"/>
+          </a:p>
+        </p:txBody>
+      </p:sp>
+      <p:sp>
+        <p:nvSpPr>
+          <p:cNvPr id="15" name="Rectangle 14">
+            <a:extLst>
+              <a:ext uri="{FF2B5EF4-FFF2-40B4-BE49-F238E27FC236}">
+                <a16:creationId xmlns:a16="http://schemas.microsoft.com/office/drawing/2014/main" id="{996128B9-7050-944D-A969-A0781B6FBAED}"/>
+              </a:ext>
+            </a:extLst>
+          </p:cNvPr>
+          <p:cNvSpPr/>
+          <p:nvPr/>
+        </p:nvSpPr>
+        <p:spPr>
+          <a:xfrm>
+            <a:off x="8791181" y="4572000"/>
+            <a:ext cx="1774523" cy="1340285"/>
+          </a:xfrm>
+          <a:prstGeom prst="rect">
+            <a:avLst/>
+          </a:prstGeom>
+          <a:noFill/>
+          <a:ln>
+            <a:solidFill>
+              <a:schemeClr val="accent2"/>
+            </a:solidFill>
+          </a:ln>
+        </p:spPr>
+        <p:style>
+          <a:lnRef idx="2">
+            <a:schemeClr val="accent1">
+              <a:shade val="15000"/>
+            </a:schemeClr>
+          </a:lnRef>
+          <a:fillRef idx="1">
+            <a:schemeClr val="accent1"/>
+          </a:fillRef>
+          <a:effectRef idx="0">
+            <a:schemeClr val="accent1"/>
+          </a:effectRef>
+          <a:fontRef idx="minor">
+            <a:schemeClr val="lt1"/>
+          </a:fontRef>
+        </p:style>
+        <p:txBody>
+          <a:bodyPr rtlCol="0" anchor="ctr"/>
+          <a:lstStyle/>
+          <a:p>
+            <a:pPr algn="ctr"/>
+            <a:endParaRPr lang="en-US"/>
+          </a:p>
+        </p:txBody>
+      </p:sp>
+      <p:sp>
+        <p:nvSpPr>
+          <p:cNvPr id="17" name="Rectangle 16">
+            <a:extLst>
+              <a:ext uri="{FF2B5EF4-FFF2-40B4-BE49-F238E27FC236}">
+                <a16:creationId xmlns:a16="http://schemas.microsoft.com/office/drawing/2014/main" id="{4E667A01-A20C-46C4-0CAE-D431C5588AE9}"/>
+              </a:ext>
+            </a:extLst>
+          </p:cNvPr>
+          <p:cNvSpPr/>
+          <p:nvPr/>
+        </p:nvSpPr>
+        <p:spPr>
+          <a:xfrm>
+            <a:off x="818889" y="4096122"/>
+            <a:ext cx="4604881" cy="2417412"/>
+          </a:xfrm>
+          <a:prstGeom prst="rect">
+            <a:avLst/>
+          </a:prstGeom>
+          <a:noFill/>
+          <a:ln>
+            <a:solidFill>
+              <a:schemeClr val="accent2"/>
+            </a:solidFill>
+          </a:ln>
+        </p:spPr>
+        <p:style>
+          <a:lnRef idx="2">
+            <a:schemeClr val="accent1">
+              <a:shade val="15000"/>
+            </a:schemeClr>
+          </a:lnRef>
+          <a:fillRef idx="1">
+            <a:schemeClr val="accent1"/>
+          </a:fillRef>
+          <a:effectRef idx="0">
+            <a:schemeClr val="accent1"/>
+          </a:effectRef>
+          <a:fontRef idx="minor">
+            <a:schemeClr val="lt1"/>
+          </a:fontRef>
+        </p:style>
+        <p:txBody>
+          <a:bodyPr rtlCol="0" anchor="ctr"/>
+          <a:lstStyle/>
+          <a:p>
+            <a:pPr algn="ctr"/>
+            <a:endParaRPr lang="en-US"/>
+          </a:p>
+        </p:txBody>
+      </p:sp>
+      <p:cxnSp>
+        <p:nvCxnSpPr>
+          <p:cNvPr id="19" name="Straight Arrow Connector 18">
+            <a:extLst>
+              <a:ext uri="{FF2B5EF4-FFF2-40B4-BE49-F238E27FC236}">
+                <a16:creationId xmlns:a16="http://schemas.microsoft.com/office/drawing/2014/main" id="{35DF0252-E345-CC95-AC61-383A1473CB7B}"/>
+              </a:ext>
+            </a:extLst>
+          </p:cNvPr>
+          <p:cNvCxnSpPr/>
+          <p:nvPr/>
+        </p:nvCxnSpPr>
+        <p:spPr>
+          <a:xfrm>
+            <a:off x="5505189" y="5029200"/>
+            <a:ext cx="676406" cy="0"/>
+          </a:xfrm>
+          <a:prstGeom prst="straightConnector1">
+            <a:avLst/>
+          </a:prstGeom>
+          <a:ln>
+            <a:tailEnd type="triangle"/>
+          </a:ln>
+        </p:spPr>
+        <p:style>
+          <a:lnRef idx="1">
+            <a:schemeClr val="accent2"/>
+          </a:lnRef>
+          <a:fillRef idx="0">
+            <a:schemeClr val="accent2"/>
+          </a:fillRef>
+          <a:effectRef idx="0">
+            <a:schemeClr val="accent2"/>
+          </a:effectRef>
+          <a:fontRef idx="minor">
+            <a:schemeClr val="tx1"/>
+          </a:fontRef>
+        </p:style>
+      </p:cxnSp>
+      <p:cxnSp>
+        <p:nvCxnSpPr>
+          <p:cNvPr id="21" name="Connector: Elbow 20">
+            <a:extLst>
+              <a:ext uri="{FF2B5EF4-FFF2-40B4-BE49-F238E27FC236}">
+                <a16:creationId xmlns:a16="http://schemas.microsoft.com/office/drawing/2014/main" id="{E28AF7BE-02F1-084F-5708-046ED4FE31A2}"/>
+              </a:ext>
+            </a:extLst>
+          </p:cNvPr>
+          <p:cNvCxnSpPr/>
+          <p:nvPr/>
+        </p:nvCxnSpPr>
+        <p:spPr>
+          <a:xfrm flipV="1">
+            <a:off x="7271359" y="4778679"/>
+            <a:ext cx="1640909" cy="576198"/>
+          </a:xfrm>
+          <a:prstGeom prst="bentConnector3">
+            <a:avLst/>
+          </a:prstGeom>
+          <a:ln>
+            <a:tailEnd type="triangle"/>
+          </a:ln>
+        </p:spPr>
+        <p:style>
+          <a:lnRef idx="1">
+            <a:schemeClr val="accent2"/>
+          </a:lnRef>
+          <a:fillRef idx="0">
+            <a:schemeClr val="accent2"/>
+          </a:fillRef>
+          <a:effectRef idx="0">
+            <a:schemeClr val="accent2"/>
+          </a:effectRef>
+          <a:fontRef idx="minor">
+            <a:schemeClr val="tx1"/>
+          </a:fontRef>
+        </p:style>
+      </p:cxnSp>
+    </p:spTree>
+    <p:extLst>
+      <p:ext uri="{BB962C8B-B14F-4D97-AF65-F5344CB8AC3E}">
+        <p14:creationId xmlns:p14="http://schemas.microsoft.com/office/powerpoint/2010/main" val="4021582995"/>
+      </p:ext>
+    </p:extLst>
+  </p:cSld>
+  <p:clrMapOvr>
+    <a:masterClrMapping/>
+  </p:clrMapOvr>
+</p:sld>
+</file>
+
+<file path=ppt/slides/slide39.xml><?xml version="1.0" encoding="utf-8"?>
+<p:sld xmlns:a="http://schemas.openxmlformats.org/drawingml/2006/main" xmlns:r="http://schemas.openxmlformats.org/officeDocument/2006/relationships" xmlns:p="http://schemas.openxmlformats.org/presentationml/2006/main">
+  <p:cSld>
+    <p:spTree>
+      <p:nvGrpSpPr>
+        <p:cNvPr id="1" name=""/>
+        <p:cNvGrpSpPr/>
+        <p:nvPr/>
+      </p:nvGrpSpPr>
+      <p:grpSpPr>
+        <a:xfrm>
+          <a:off x="0" y="0"/>
+          <a:ext cx="0" cy="0"/>
+          <a:chOff x="0" y="0"/>
+          <a:chExt cx="0" cy="0"/>
+        </a:xfrm>
+      </p:grpSpPr>
+      <p:sp>
+        <p:nvSpPr>
+          <p:cNvPr id="2" name="Title 1">
+            <a:extLst>
+              <a:ext uri="{FF2B5EF4-FFF2-40B4-BE49-F238E27FC236}">
+                <a16:creationId xmlns:a16="http://schemas.microsoft.com/office/drawing/2014/main" id="{8CEA1663-8D94-7306-8520-D2C08981DD49}"/>
+              </a:ext>
+            </a:extLst>
+          </p:cNvPr>
+          <p:cNvSpPr>
+            <a:spLocks noGrp="1"/>
+          </p:cNvSpPr>
+          <p:nvPr>
+            <p:ph type="title"/>
+          </p:nvPr>
+        </p:nvSpPr>
+        <p:spPr/>
+        <p:txBody>
+          <a:bodyPr/>
+          <a:lstStyle/>
+          <a:p>
+            <a:r>
+              <a:rPr lang="en-US" dirty="0"/>
+              <a:t>Packages</a:t>
+            </a:r>
+          </a:p>
+        </p:txBody>
+      </p:sp>
+      <p:sp>
+        <p:nvSpPr>
+          <p:cNvPr id="3" name="Content Placeholder 2">
+            <a:extLst>
+              <a:ext uri="{FF2B5EF4-FFF2-40B4-BE49-F238E27FC236}">
+                <a16:creationId xmlns:a16="http://schemas.microsoft.com/office/drawing/2014/main" id="{EC980F8E-DBAF-F0C5-2CA6-1F7C1E2CC4AC}"/>
+              </a:ext>
+            </a:extLst>
+          </p:cNvPr>
+          <p:cNvSpPr>
+            <a:spLocks noGrp="1"/>
+          </p:cNvSpPr>
+          <p:nvPr>
+            <p:ph idx="1"/>
+          </p:nvPr>
+        </p:nvSpPr>
+        <p:spPr/>
+        <p:txBody>
+          <a:bodyPr/>
+          <a:lstStyle/>
+          <a:p>
+            <a:r>
+              <a:rPr lang="en-US" dirty="0"/>
+              <a:t>Packages allow us to organize related classes, interfaces, and more into namespaces</a:t>
+            </a:r>
+          </a:p>
+          <a:p>
+            <a:r>
+              <a:rPr lang="en-US" dirty="0"/>
+              <a:t>This helps keep our code organized and prevent naming conflicts </a:t>
+            </a:r>
+          </a:p>
+          <a:p>
+            <a:r>
+              <a:rPr lang="en-US" dirty="0"/>
+              <a:t>We have a default unnamed package, but we should strive to create named packages in fully featured applications</a:t>
+            </a:r>
+          </a:p>
+          <a:p>
+            <a:r>
+              <a:rPr lang="en-US" dirty="0"/>
+              <a:t>Imagine a project with many classes: Student, Teacher, Course, Login, Database, Email, etc.</a:t>
+            </a:r>
+          </a:p>
+          <a:p>
+            <a:pPr lvl="1"/>
+            <a:r>
+              <a:rPr lang="en-US" dirty="0"/>
+              <a:t>With packages we can group these up:</a:t>
+            </a:r>
+          </a:p>
+          <a:p>
+            <a:pPr lvl="2"/>
+            <a:r>
+              <a:rPr lang="en-US" dirty="0"/>
+              <a:t>Models: Student.java, Teacher.java, Course.java</a:t>
+            </a:r>
+          </a:p>
+          <a:p>
+            <a:pPr lvl="2"/>
+            <a:r>
+              <a:rPr lang="en-US" dirty="0"/>
+              <a:t>Database: Database.java</a:t>
+            </a:r>
+          </a:p>
+          <a:p>
+            <a:pPr lvl="2"/>
+            <a:r>
+              <a:rPr lang="en-US" dirty="0"/>
+              <a:t>Etc. </a:t>
+            </a:r>
+          </a:p>
+        </p:txBody>
+      </p:sp>
+    </p:spTree>
+    <p:extLst>
+      <p:ext uri="{BB962C8B-B14F-4D97-AF65-F5344CB8AC3E}">
+        <p14:creationId xmlns:p14="http://schemas.microsoft.com/office/powerpoint/2010/main" val="3707167623"/>
+      </p:ext>
+    </p:extLst>
+  </p:cSld>
+  <p:clrMapOvr>
+    <a:masterClrMapping/>
+  </p:clrMapOvr>
+</p:sld>
+</file>
+
 <file path=ppt/slides/slide4.xml><?xml version="1.0" encoding="utf-8"?>
 <p:sld xmlns:a="http://schemas.openxmlformats.org/drawingml/2006/main" xmlns:r="http://schemas.openxmlformats.org/officeDocument/2006/relationships" xmlns:p="http://schemas.openxmlformats.org/presentationml/2006/main">
   <p:cSld>
@@ -17780,6 +19765,2421 @@
     <p:extLst>
       <p:ext uri="{BB962C8B-B14F-4D97-AF65-F5344CB8AC3E}">
         <p14:creationId xmlns:p14="http://schemas.microsoft.com/office/powerpoint/2010/main" val="4250378817"/>
+      </p:ext>
+    </p:extLst>
+  </p:cSld>
+  <p:clrMapOvr>
+    <a:masterClrMapping/>
+  </p:clrMapOvr>
+</p:sld>
+</file>
+
+<file path=ppt/slides/slide40.xml><?xml version="1.0" encoding="utf-8"?>
+<p:sld xmlns:a="http://schemas.openxmlformats.org/drawingml/2006/main" xmlns:r="http://schemas.openxmlformats.org/officeDocument/2006/relationships" xmlns:p="http://schemas.openxmlformats.org/presentationml/2006/main">
+  <p:cSld>
+    <p:spTree>
+      <p:nvGrpSpPr>
+        <p:cNvPr id="1" name=""/>
+        <p:cNvGrpSpPr/>
+        <p:nvPr/>
+      </p:nvGrpSpPr>
+      <p:grpSpPr>
+        <a:xfrm>
+          <a:off x="0" y="0"/>
+          <a:ext cx="0" cy="0"/>
+          <a:chOff x="0" y="0"/>
+          <a:chExt cx="0" cy="0"/>
+        </a:xfrm>
+      </p:grpSpPr>
+      <p:sp>
+        <p:nvSpPr>
+          <p:cNvPr id="2" name="Title 1">
+            <a:extLst>
+              <a:ext uri="{FF2B5EF4-FFF2-40B4-BE49-F238E27FC236}">
+                <a16:creationId xmlns:a16="http://schemas.microsoft.com/office/drawing/2014/main" id="{685DE2F6-6747-2B84-AE30-5AB870951F25}"/>
+              </a:ext>
+            </a:extLst>
+          </p:cNvPr>
+          <p:cNvSpPr>
+            <a:spLocks noGrp="1"/>
+          </p:cNvSpPr>
+          <p:nvPr>
+            <p:ph type="title"/>
+          </p:nvPr>
+        </p:nvSpPr>
+        <p:spPr/>
+        <p:txBody>
+          <a:bodyPr/>
+          <a:lstStyle/>
+          <a:p>
+            <a:r>
+              <a:rPr lang="en-US" dirty="0"/>
+              <a:t>Packages</a:t>
+            </a:r>
+          </a:p>
+        </p:txBody>
+      </p:sp>
+      <p:sp>
+        <p:nvSpPr>
+          <p:cNvPr id="3" name="Content Placeholder 2">
+            <a:extLst>
+              <a:ext uri="{FF2B5EF4-FFF2-40B4-BE49-F238E27FC236}">
+                <a16:creationId xmlns:a16="http://schemas.microsoft.com/office/drawing/2014/main" id="{05D7315E-E7F1-6C2D-4B93-C243DC6D3333}"/>
+              </a:ext>
+            </a:extLst>
+          </p:cNvPr>
+          <p:cNvSpPr>
+            <a:spLocks noGrp="1"/>
+          </p:cNvSpPr>
+          <p:nvPr>
+            <p:ph idx="1"/>
+          </p:nvPr>
+        </p:nvSpPr>
+        <p:spPr>
+          <a:xfrm>
+            <a:off x="581192" y="2180497"/>
+            <a:ext cx="11029615" cy="2241192"/>
+          </a:xfrm>
+        </p:spPr>
+        <p:txBody>
+          <a:bodyPr>
+            <a:normAutofit lnSpcReduction="10000"/>
+          </a:bodyPr>
+          <a:lstStyle/>
+          <a:p>
+            <a:r>
+              <a:rPr lang="en-US" dirty="0"/>
+              <a:t>The naming convention for packages is typically a reverse domain</a:t>
+            </a:r>
+          </a:p>
+          <a:p>
+            <a:r>
+              <a:rPr lang="en-US" dirty="0"/>
+              <a:t>So if your website is: example.com</a:t>
+            </a:r>
+          </a:p>
+          <a:p>
+            <a:pPr lvl="1"/>
+            <a:r>
+              <a:rPr lang="en-US" dirty="0"/>
+              <a:t>Your package becomes: </a:t>
+            </a:r>
+            <a:r>
+              <a:rPr lang="en-US" dirty="0" err="1"/>
+              <a:t>com.example</a:t>
+            </a:r>
+            <a:endParaRPr lang="en-US" dirty="0"/>
+          </a:p>
+          <a:p>
+            <a:r>
+              <a:rPr lang="en-US" dirty="0"/>
+              <a:t>We use the package keyword declared at the top of the file to declare a files content within a package </a:t>
+            </a:r>
+          </a:p>
+          <a:p>
+            <a:r>
+              <a:rPr lang="en-US" dirty="0"/>
+              <a:t>We use the import keyword to reference items from one package to another</a:t>
+            </a:r>
+          </a:p>
+          <a:p>
+            <a:r>
+              <a:rPr lang="en-US" dirty="0"/>
+              <a:t>You can import multiple classes from a package like so: import </a:t>
+            </a:r>
+            <a:r>
+              <a:rPr lang="en-US" dirty="0" err="1"/>
+              <a:t>pacakgename</a:t>
+            </a:r>
+            <a:r>
+              <a:rPr lang="en-US" dirty="0"/>
+              <a:t>.*;</a:t>
+            </a:r>
+          </a:p>
+        </p:txBody>
+      </p:sp>
+      <p:pic>
+        <p:nvPicPr>
+          <p:cNvPr id="5" name="Picture 4">
+            <a:extLst>
+              <a:ext uri="{FF2B5EF4-FFF2-40B4-BE49-F238E27FC236}">
+                <a16:creationId xmlns:a16="http://schemas.microsoft.com/office/drawing/2014/main" id="{CFD7A5A5-4C98-AE26-F257-6AD45DC3EC38}"/>
+              </a:ext>
+            </a:extLst>
+          </p:cNvPr>
+          <p:cNvPicPr>
+            <a:picLocks noChangeAspect="1"/>
+          </p:cNvPicPr>
+          <p:nvPr/>
+        </p:nvPicPr>
+        <p:blipFill>
+          <a:blip r:embed="rId2"/>
+          <a:stretch>
+            <a:fillRect/>
+          </a:stretch>
+        </p:blipFill>
+        <p:spPr>
+          <a:xfrm>
+            <a:off x="3939436" y="4569429"/>
+            <a:ext cx="2919107" cy="2132120"/>
+          </a:xfrm>
+          <a:prstGeom prst="rect">
+            <a:avLst/>
+          </a:prstGeom>
+        </p:spPr>
+      </p:pic>
+      <p:pic>
+        <p:nvPicPr>
+          <p:cNvPr id="7" name="Picture 6">
+            <a:extLst>
+              <a:ext uri="{FF2B5EF4-FFF2-40B4-BE49-F238E27FC236}">
+                <a16:creationId xmlns:a16="http://schemas.microsoft.com/office/drawing/2014/main" id="{FC775B3D-21BD-AF4C-842B-8D559EA9EAEF}"/>
+              </a:ext>
+            </a:extLst>
+          </p:cNvPr>
+          <p:cNvPicPr>
+            <a:picLocks noChangeAspect="1"/>
+          </p:cNvPicPr>
+          <p:nvPr/>
+        </p:nvPicPr>
+        <p:blipFill>
+          <a:blip r:embed="rId3"/>
+          <a:stretch>
+            <a:fillRect/>
+          </a:stretch>
+        </p:blipFill>
+        <p:spPr>
+          <a:xfrm>
+            <a:off x="7459249" y="4653917"/>
+            <a:ext cx="3512448" cy="1934897"/>
+          </a:xfrm>
+          <a:prstGeom prst="rect">
+            <a:avLst/>
+          </a:prstGeom>
+        </p:spPr>
+      </p:pic>
+      <p:pic>
+        <p:nvPicPr>
+          <p:cNvPr id="11" name="Picture 10">
+            <a:extLst>
+              <a:ext uri="{FF2B5EF4-FFF2-40B4-BE49-F238E27FC236}">
+                <a16:creationId xmlns:a16="http://schemas.microsoft.com/office/drawing/2014/main" id="{1BE279FF-80DE-210C-92BF-1C5E267182FF}"/>
+              </a:ext>
+            </a:extLst>
+          </p:cNvPr>
+          <p:cNvPicPr>
+            <a:picLocks noChangeAspect="1"/>
+          </p:cNvPicPr>
+          <p:nvPr/>
+        </p:nvPicPr>
+        <p:blipFill>
+          <a:blip r:embed="rId4"/>
+          <a:stretch>
+            <a:fillRect/>
+          </a:stretch>
+        </p:blipFill>
+        <p:spPr>
+          <a:xfrm>
+            <a:off x="1220303" y="4705123"/>
+            <a:ext cx="1655056" cy="1934897"/>
+          </a:xfrm>
+          <a:prstGeom prst="rect">
+            <a:avLst/>
+          </a:prstGeom>
+        </p:spPr>
+      </p:pic>
+    </p:spTree>
+    <p:extLst>
+      <p:ext uri="{BB962C8B-B14F-4D97-AF65-F5344CB8AC3E}">
+        <p14:creationId xmlns:p14="http://schemas.microsoft.com/office/powerpoint/2010/main" val="3788210717"/>
+      </p:ext>
+    </p:extLst>
+  </p:cSld>
+  <p:clrMapOvr>
+    <a:masterClrMapping/>
+  </p:clrMapOvr>
+</p:sld>
+</file>
+
+<file path=ppt/slides/slide41.xml><?xml version="1.0" encoding="utf-8"?>
+<p:sld xmlns:a="http://schemas.openxmlformats.org/drawingml/2006/main" xmlns:r="http://schemas.openxmlformats.org/officeDocument/2006/relationships" xmlns:p="http://schemas.openxmlformats.org/presentationml/2006/main">
+  <p:cSld>
+    <p:spTree>
+      <p:nvGrpSpPr>
+        <p:cNvPr id="1" name=""/>
+        <p:cNvGrpSpPr/>
+        <p:nvPr/>
+      </p:nvGrpSpPr>
+      <p:grpSpPr>
+        <a:xfrm>
+          <a:off x="0" y="0"/>
+          <a:ext cx="0" cy="0"/>
+          <a:chOff x="0" y="0"/>
+          <a:chExt cx="0" cy="0"/>
+        </a:xfrm>
+      </p:grpSpPr>
+      <p:sp>
+        <p:nvSpPr>
+          <p:cNvPr id="2" name="Title 1">
+            <a:extLst>
+              <a:ext uri="{FF2B5EF4-FFF2-40B4-BE49-F238E27FC236}">
+                <a16:creationId xmlns:a16="http://schemas.microsoft.com/office/drawing/2014/main" id="{AD89CB01-6B64-025E-5251-6ED9F710284D}"/>
+              </a:ext>
+            </a:extLst>
+          </p:cNvPr>
+          <p:cNvSpPr>
+            <a:spLocks noGrp="1"/>
+          </p:cNvSpPr>
+          <p:nvPr>
+            <p:ph type="title"/>
+          </p:nvPr>
+        </p:nvSpPr>
+        <p:spPr/>
+        <p:txBody>
+          <a:bodyPr/>
+          <a:lstStyle/>
+          <a:p>
+            <a:r>
+              <a:rPr lang="en-US" dirty="0"/>
+              <a:t>Java built-in package examples</a:t>
+            </a:r>
+          </a:p>
+        </p:txBody>
+      </p:sp>
+      <p:graphicFrame>
+        <p:nvGraphicFramePr>
+          <p:cNvPr id="8" name="Table 7">
+            <a:extLst>
+              <a:ext uri="{FF2B5EF4-FFF2-40B4-BE49-F238E27FC236}">
+                <a16:creationId xmlns:a16="http://schemas.microsoft.com/office/drawing/2014/main" id="{0895C822-5C5E-9CF7-BF58-6B91E42B9B83}"/>
+              </a:ext>
+            </a:extLst>
+          </p:cNvPr>
+          <p:cNvGraphicFramePr>
+            <a:graphicFrameLocks noGrp="1"/>
+          </p:cNvGraphicFramePr>
+          <p:nvPr>
+            <p:extLst>
+              <p:ext uri="{D42A27DB-BD31-4B8C-83A1-F6EECF244321}">
+                <p14:modId xmlns:p14="http://schemas.microsoft.com/office/powerpoint/2010/main" val="1602173222"/>
+              </p:ext>
+            </p:extLst>
+          </p:nvPr>
+        </p:nvGraphicFramePr>
+        <p:xfrm>
+          <a:off x="581025" y="2817178"/>
+          <a:ext cx="11029950" cy="2560320"/>
+        </p:xfrm>
+        <a:graphic>
+          <a:graphicData uri="http://schemas.openxmlformats.org/drawingml/2006/table">
+            <a:tbl>
+              <a:tblPr>
+                <a:tableStyleId>{5C22544A-7EE6-4342-B048-85BDC9FD1C3A}</a:tableStyleId>
+              </a:tblPr>
+              <a:tblGrid>
+                <a:gridCol w="5514975">
+                  <a:extLst>
+                    <a:ext uri="{9D8B030D-6E8A-4147-A177-3AD203B41FA5}">
+                      <a16:colId xmlns:a16="http://schemas.microsoft.com/office/drawing/2014/main" val="1122265394"/>
+                    </a:ext>
+                  </a:extLst>
+                </a:gridCol>
+                <a:gridCol w="5514975">
+                  <a:extLst>
+                    <a:ext uri="{9D8B030D-6E8A-4147-A177-3AD203B41FA5}">
+                      <a16:colId xmlns:a16="http://schemas.microsoft.com/office/drawing/2014/main" val="2778799628"/>
+                    </a:ext>
+                  </a:extLst>
+                </a:gridCol>
+              </a:tblGrid>
+              <a:tr h="0">
+                <a:tc>
+                  <a:txBody>
+                    <a:bodyPr/>
+                    <a:lstStyle/>
+                    <a:p>
+                      <a:pPr marL="0" marR="0" algn="l">
+                        <a:buNone/>
+                      </a:pPr>
+                      <a:r>
+                        <a:rPr lang="en-US" b="1" dirty="0">
+                          <a:effectLst/>
+                        </a:rPr>
+                        <a:t>Package</a:t>
+                      </a:r>
+                      <a:endParaRPr lang="en-US" b="1" i="0" dirty="0">
+                        <a:solidFill>
+                          <a:srgbClr val="FFFFFF"/>
+                        </a:solidFill>
+                        <a:effectLst/>
+                        <a:latin typeface="-apple-system-body"/>
+                      </a:endParaRPr>
+                    </a:p>
+                  </a:txBody>
+                  <a:tcPr anchor="ctr"/>
+                </a:tc>
+                <a:tc>
+                  <a:txBody>
+                    <a:bodyPr/>
+                    <a:lstStyle/>
+                    <a:p>
+                      <a:pPr marL="0" marR="0" algn="l">
+                        <a:buNone/>
+                      </a:pPr>
+                      <a:r>
+                        <a:rPr lang="en-US" b="1" dirty="0">
+                          <a:effectLst/>
+                        </a:rPr>
+                        <a:t>Purpose</a:t>
+                      </a:r>
+                      <a:endParaRPr lang="en-US" b="1" i="0" dirty="0">
+                        <a:solidFill>
+                          <a:srgbClr val="FFFFFF"/>
+                        </a:solidFill>
+                        <a:effectLst/>
+                        <a:latin typeface="-apple-system-body"/>
+                      </a:endParaRPr>
+                    </a:p>
+                  </a:txBody>
+                  <a:tcPr anchor="ctr"/>
+                </a:tc>
+                <a:extLst>
+                  <a:ext uri="{0D108BD9-81ED-4DB2-BD59-A6C34878D82A}">
+                    <a16:rowId xmlns:a16="http://schemas.microsoft.com/office/drawing/2014/main" val="4148252541"/>
+                  </a:ext>
+                </a:extLst>
+              </a:tr>
+              <a:tr h="0">
+                <a:tc>
+                  <a:txBody>
+                    <a:bodyPr/>
+                    <a:lstStyle/>
+                    <a:p>
+                      <a:pPr marL="0" marR="0" algn="l">
+                        <a:buNone/>
+                      </a:pPr>
+                      <a:r>
+                        <a:rPr lang="en-US">
+                          <a:effectLst/>
+                        </a:rPr>
+                        <a:t>java.lang</a:t>
+                      </a:r>
+                      <a:endParaRPr lang="en-US" b="0" i="0">
+                        <a:solidFill>
+                          <a:srgbClr val="FFFFFF"/>
+                        </a:solidFill>
+                        <a:effectLst/>
+                        <a:latin typeface="-apple-system-body"/>
+                      </a:endParaRPr>
+                    </a:p>
+                  </a:txBody>
+                  <a:tcPr anchor="ctr"/>
+                </a:tc>
+                <a:tc>
+                  <a:txBody>
+                    <a:bodyPr/>
+                    <a:lstStyle/>
+                    <a:p>
+                      <a:pPr marL="0" marR="0" algn="l">
+                        <a:buNone/>
+                      </a:pPr>
+                      <a:r>
+                        <a:rPr lang="en-US">
+                          <a:effectLst/>
+                        </a:rPr>
+                        <a:t>Core classes (automatically imported)</a:t>
+                      </a:r>
+                      <a:endParaRPr lang="en-US" b="0" i="0">
+                        <a:solidFill>
+                          <a:srgbClr val="FFFFFF"/>
+                        </a:solidFill>
+                        <a:effectLst/>
+                        <a:latin typeface="-apple-system-body"/>
+                      </a:endParaRPr>
+                    </a:p>
+                  </a:txBody>
+                  <a:tcPr anchor="ctr"/>
+                </a:tc>
+                <a:extLst>
+                  <a:ext uri="{0D108BD9-81ED-4DB2-BD59-A6C34878D82A}">
+                    <a16:rowId xmlns:a16="http://schemas.microsoft.com/office/drawing/2014/main" val="1626519399"/>
+                  </a:ext>
+                </a:extLst>
+              </a:tr>
+              <a:tr h="0">
+                <a:tc>
+                  <a:txBody>
+                    <a:bodyPr/>
+                    <a:lstStyle/>
+                    <a:p>
+                      <a:pPr marL="0" marR="0" algn="l">
+                        <a:buNone/>
+                      </a:pPr>
+                      <a:r>
+                        <a:rPr lang="en-US">
+                          <a:effectLst/>
+                        </a:rPr>
+                        <a:t>java.util</a:t>
+                      </a:r>
+                      <a:endParaRPr lang="en-US" b="0" i="0">
+                        <a:solidFill>
+                          <a:srgbClr val="FFFFFF"/>
+                        </a:solidFill>
+                        <a:effectLst/>
+                        <a:latin typeface="-apple-system-body"/>
+                      </a:endParaRPr>
+                    </a:p>
+                  </a:txBody>
+                  <a:tcPr anchor="ctr"/>
+                </a:tc>
+                <a:tc>
+                  <a:txBody>
+                    <a:bodyPr/>
+                    <a:lstStyle/>
+                    <a:p>
+                      <a:pPr marL="0" marR="0" algn="l">
+                        <a:buNone/>
+                      </a:pPr>
+                      <a:r>
+                        <a:rPr lang="en-US">
+                          <a:effectLst/>
+                        </a:rPr>
+                        <a:t>Collections, Scanner, Random</a:t>
+                      </a:r>
+                      <a:endParaRPr lang="en-US" b="0" i="0">
+                        <a:solidFill>
+                          <a:srgbClr val="FFFFFF"/>
+                        </a:solidFill>
+                        <a:effectLst/>
+                        <a:latin typeface="-apple-system-body"/>
+                      </a:endParaRPr>
+                    </a:p>
+                  </a:txBody>
+                  <a:tcPr anchor="ctr"/>
+                </a:tc>
+                <a:extLst>
+                  <a:ext uri="{0D108BD9-81ED-4DB2-BD59-A6C34878D82A}">
+                    <a16:rowId xmlns:a16="http://schemas.microsoft.com/office/drawing/2014/main" val="161853791"/>
+                  </a:ext>
+                </a:extLst>
+              </a:tr>
+              <a:tr h="0">
+                <a:tc>
+                  <a:txBody>
+                    <a:bodyPr/>
+                    <a:lstStyle/>
+                    <a:p>
+                      <a:pPr marL="0" marR="0" algn="l">
+                        <a:buNone/>
+                      </a:pPr>
+                      <a:r>
+                        <a:rPr lang="en-US">
+                          <a:effectLst/>
+                        </a:rPr>
+                        <a:t>java.io</a:t>
+                      </a:r>
+                      <a:endParaRPr lang="en-US" b="0" i="0">
+                        <a:solidFill>
+                          <a:srgbClr val="FFFFFF"/>
+                        </a:solidFill>
+                        <a:effectLst/>
+                        <a:latin typeface="-apple-system-body"/>
+                      </a:endParaRPr>
+                    </a:p>
+                  </a:txBody>
+                  <a:tcPr anchor="ctr"/>
+                </a:tc>
+                <a:tc>
+                  <a:txBody>
+                    <a:bodyPr/>
+                    <a:lstStyle/>
+                    <a:p>
+                      <a:pPr marL="0" marR="0" algn="l">
+                        <a:buNone/>
+                      </a:pPr>
+                      <a:r>
+                        <a:rPr lang="en-US">
+                          <a:effectLst/>
+                        </a:rPr>
+                        <a:t>File input/output</a:t>
+                      </a:r>
+                      <a:endParaRPr lang="en-US" b="0" i="0">
+                        <a:solidFill>
+                          <a:srgbClr val="FFFFFF"/>
+                        </a:solidFill>
+                        <a:effectLst/>
+                        <a:latin typeface="-apple-system-body"/>
+                      </a:endParaRPr>
+                    </a:p>
+                  </a:txBody>
+                  <a:tcPr anchor="ctr"/>
+                </a:tc>
+                <a:extLst>
+                  <a:ext uri="{0D108BD9-81ED-4DB2-BD59-A6C34878D82A}">
+                    <a16:rowId xmlns:a16="http://schemas.microsoft.com/office/drawing/2014/main" val="2093298647"/>
+                  </a:ext>
+                </a:extLst>
+              </a:tr>
+              <a:tr h="0">
+                <a:tc>
+                  <a:txBody>
+                    <a:bodyPr/>
+                    <a:lstStyle/>
+                    <a:p>
+                      <a:pPr marL="0" marR="0" algn="l">
+                        <a:buNone/>
+                      </a:pPr>
+                      <a:r>
+                        <a:rPr lang="en-US">
+                          <a:effectLst/>
+                        </a:rPr>
+                        <a:t>java.nio</a:t>
+                      </a:r>
+                      <a:endParaRPr lang="en-US" b="0" i="0">
+                        <a:solidFill>
+                          <a:srgbClr val="FFFFFF"/>
+                        </a:solidFill>
+                        <a:effectLst/>
+                        <a:latin typeface="-apple-system-body"/>
+                      </a:endParaRPr>
+                    </a:p>
+                  </a:txBody>
+                  <a:tcPr anchor="ctr"/>
+                </a:tc>
+                <a:tc>
+                  <a:txBody>
+                    <a:bodyPr/>
+                    <a:lstStyle/>
+                    <a:p>
+                      <a:pPr marL="0" marR="0" algn="l">
+                        <a:buNone/>
+                      </a:pPr>
+                      <a:r>
+                        <a:rPr lang="en-US">
+                          <a:effectLst/>
+                        </a:rPr>
+                        <a:t>Modern file and network I/O</a:t>
+                      </a:r>
+                      <a:endParaRPr lang="en-US" b="0" i="0">
+                        <a:solidFill>
+                          <a:srgbClr val="FFFFFF"/>
+                        </a:solidFill>
+                        <a:effectLst/>
+                        <a:latin typeface="-apple-system-body"/>
+                      </a:endParaRPr>
+                    </a:p>
+                  </a:txBody>
+                  <a:tcPr anchor="ctr"/>
+                </a:tc>
+                <a:extLst>
+                  <a:ext uri="{0D108BD9-81ED-4DB2-BD59-A6C34878D82A}">
+                    <a16:rowId xmlns:a16="http://schemas.microsoft.com/office/drawing/2014/main" val="262659150"/>
+                  </a:ext>
+                </a:extLst>
+              </a:tr>
+              <a:tr h="0">
+                <a:tc>
+                  <a:txBody>
+                    <a:bodyPr/>
+                    <a:lstStyle/>
+                    <a:p>
+                      <a:pPr marL="0" marR="0" algn="l">
+                        <a:buNone/>
+                      </a:pPr>
+                      <a:r>
+                        <a:rPr lang="en-US">
+                          <a:effectLst/>
+                        </a:rPr>
+                        <a:t>java.time</a:t>
+                      </a:r>
+                      <a:endParaRPr lang="en-US" b="0" i="0">
+                        <a:solidFill>
+                          <a:srgbClr val="FFFFFF"/>
+                        </a:solidFill>
+                        <a:effectLst/>
+                        <a:latin typeface="-apple-system-body"/>
+                      </a:endParaRPr>
+                    </a:p>
+                  </a:txBody>
+                  <a:tcPr anchor="ctr"/>
+                </a:tc>
+                <a:tc>
+                  <a:txBody>
+                    <a:bodyPr/>
+                    <a:lstStyle/>
+                    <a:p>
+                      <a:pPr marL="0" marR="0" algn="l">
+                        <a:buNone/>
+                      </a:pPr>
+                      <a:r>
+                        <a:rPr lang="en-US">
+                          <a:effectLst/>
+                        </a:rPr>
+                        <a:t>Date and time API</a:t>
+                      </a:r>
+                      <a:endParaRPr lang="en-US" b="0" i="0">
+                        <a:solidFill>
+                          <a:srgbClr val="FFFFFF"/>
+                        </a:solidFill>
+                        <a:effectLst/>
+                        <a:latin typeface="-apple-system-body"/>
+                      </a:endParaRPr>
+                    </a:p>
+                  </a:txBody>
+                  <a:tcPr anchor="ctr"/>
+                </a:tc>
+                <a:extLst>
+                  <a:ext uri="{0D108BD9-81ED-4DB2-BD59-A6C34878D82A}">
+                    <a16:rowId xmlns:a16="http://schemas.microsoft.com/office/drawing/2014/main" val="2493177948"/>
+                  </a:ext>
+                </a:extLst>
+              </a:tr>
+              <a:tr h="0">
+                <a:tc>
+                  <a:txBody>
+                    <a:bodyPr/>
+                    <a:lstStyle/>
+                    <a:p>
+                      <a:pPr marL="0" marR="0" algn="l">
+                        <a:buNone/>
+                      </a:pPr>
+                      <a:r>
+                        <a:rPr lang="en-US">
+                          <a:effectLst/>
+                        </a:rPr>
+                        <a:t>java.net</a:t>
+                      </a:r>
+                      <a:endParaRPr lang="en-US" b="0" i="0">
+                        <a:solidFill>
+                          <a:srgbClr val="FFFFFF"/>
+                        </a:solidFill>
+                        <a:effectLst/>
+                        <a:latin typeface="-apple-system-body"/>
+                      </a:endParaRPr>
+                    </a:p>
+                  </a:txBody>
+                  <a:tcPr anchor="ctr"/>
+                </a:tc>
+                <a:tc>
+                  <a:txBody>
+                    <a:bodyPr/>
+                    <a:lstStyle/>
+                    <a:p>
+                      <a:pPr marL="0" marR="0" algn="l">
+                        <a:buNone/>
+                      </a:pPr>
+                      <a:r>
+                        <a:rPr lang="en-US" dirty="0">
+                          <a:effectLst/>
+                        </a:rPr>
+                        <a:t>Networking</a:t>
+                      </a:r>
+                      <a:endParaRPr lang="en-US" b="0" i="0" dirty="0">
+                        <a:solidFill>
+                          <a:srgbClr val="FFFFFF"/>
+                        </a:solidFill>
+                        <a:effectLst/>
+                        <a:latin typeface="-apple-system-body"/>
+                      </a:endParaRPr>
+                    </a:p>
+                  </a:txBody>
+                  <a:tcPr anchor="ctr"/>
+                </a:tc>
+                <a:extLst>
+                  <a:ext uri="{0D108BD9-81ED-4DB2-BD59-A6C34878D82A}">
+                    <a16:rowId xmlns:a16="http://schemas.microsoft.com/office/drawing/2014/main" val="1522358343"/>
+                  </a:ext>
+                </a:extLst>
+              </a:tr>
+            </a:tbl>
+          </a:graphicData>
+        </a:graphic>
+      </p:graphicFrame>
+    </p:spTree>
+    <p:extLst>
+      <p:ext uri="{BB962C8B-B14F-4D97-AF65-F5344CB8AC3E}">
+        <p14:creationId xmlns:p14="http://schemas.microsoft.com/office/powerpoint/2010/main" val="2418089611"/>
+      </p:ext>
+    </p:extLst>
+  </p:cSld>
+  <p:clrMapOvr>
+    <a:masterClrMapping/>
+  </p:clrMapOvr>
+</p:sld>
+</file>
+
+<file path=ppt/slides/slide42.xml><?xml version="1.0" encoding="utf-8"?>
+<p:sld xmlns:a="http://schemas.openxmlformats.org/drawingml/2006/main" xmlns:r="http://schemas.openxmlformats.org/officeDocument/2006/relationships" xmlns:p="http://schemas.openxmlformats.org/presentationml/2006/main">
+  <p:cSld>
+    <p:spTree>
+      <p:nvGrpSpPr>
+        <p:cNvPr id="1" name=""/>
+        <p:cNvGrpSpPr/>
+        <p:nvPr/>
+      </p:nvGrpSpPr>
+      <p:grpSpPr>
+        <a:xfrm>
+          <a:off x="0" y="0"/>
+          <a:ext cx="0" cy="0"/>
+          <a:chOff x="0" y="0"/>
+          <a:chExt cx="0" cy="0"/>
+        </a:xfrm>
+      </p:grpSpPr>
+      <p:sp>
+        <p:nvSpPr>
+          <p:cNvPr id="2" name="Title 1">
+            <a:extLst>
+              <a:ext uri="{FF2B5EF4-FFF2-40B4-BE49-F238E27FC236}">
+                <a16:creationId xmlns:a16="http://schemas.microsoft.com/office/drawing/2014/main" id="{31EEEB11-01BF-95AC-AE7D-E0FA09A0D7A9}"/>
+              </a:ext>
+            </a:extLst>
+          </p:cNvPr>
+          <p:cNvSpPr>
+            <a:spLocks noGrp="1"/>
+          </p:cNvSpPr>
+          <p:nvPr>
+            <p:ph type="title"/>
+          </p:nvPr>
+        </p:nvSpPr>
+        <p:spPr/>
+        <p:txBody>
+          <a:bodyPr/>
+          <a:lstStyle/>
+          <a:p>
+            <a:r>
+              <a:rPr lang="en-US" dirty="0"/>
+              <a:t>Access Modifiers</a:t>
+            </a:r>
+          </a:p>
+        </p:txBody>
+      </p:sp>
+      <p:sp>
+        <p:nvSpPr>
+          <p:cNvPr id="3" name="Content Placeholder 2">
+            <a:extLst>
+              <a:ext uri="{FF2B5EF4-FFF2-40B4-BE49-F238E27FC236}">
+                <a16:creationId xmlns:a16="http://schemas.microsoft.com/office/drawing/2014/main" id="{F145DE58-1754-EBA0-DECA-13CB2282AFB2}"/>
+              </a:ext>
+            </a:extLst>
+          </p:cNvPr>
+          <p:cNvSpPr>
+            <a:spLocks noGrp="1"/>
+          </p:cNvSpPr>
+          <p:nvPr>
+            <p:ph idx="1"/>
+          </p:nvPr>
+        </p:nvSpPr>
+        <p:spPr/>
+        <p:txBody>
+          <a:bodyPr/>
+          <a:lstStyle/>
+          <a:p>
+            <a:pPr lvl="0"/>
+            <a:r>
+              <a:rPr lang="en-US" dirty="0">
+                <a:solidFill>
+                  <a:schemeClr val="accent2"/>
+                </a:solidFill>
+              </a:rPr>
+              <a:t>public</a:t>
+            </a:r>
+            <a:r>
+              <a:rPr lang="en-US" dirty="0"/>
+              <a:t>: Members with public modifiers can be accessed by any class. Public methods, variables, or classes have the widest scope.</a:t>
+            </a:r>
+          </a:p>
+          <a:p>
+            <a:pPr lvl="0"/>
+            <a:r>
+              <a:rPr lang="en-US" dirty="0">
+                <a:solidFill>
+                  <a:schemeClr val="accent2"/>
+                </a:solidFill>
+              </a:rPr>
+              <a:t>protected</a:t>
+            </a:r>
+            <a:r>
+              <a:rPr lang="en-US" dirty="0"/>
+              <a:t>: The protected modifier is used within the same package. It can be accessed outside the package but only through inheritance.</a:t>
+            </a:r>
+          </a:p>
+          <a:p>
+            <a:pPr lvl="0"/>
+            <a:r>
+              <a:rPr lang="en-US" dirty="0">
+                <a:solidFill>
+                  <a:schemeClr val="accent2"/>
+                </a:solidFill>
+              </a:rPr>
+              <a:t>default</a:t>
+            </a:r>
+            <a:r>
+              <a:rPr lang="en-US" dirty="0"/>
+              <a:t>: When we do not mention any access modifier, it is treated as default. It is accessible only within the same package.</a:t>
+            </a:r>
+          </a:p>
+          <a:p>
+            <a:pPr lvl="0"/>
+            <a:r>
+              <a:rPr lang="en-US" dirty="0">
+                <a:solidFill>
+                  <a:schemeClr val="accent2"/>
+                </a:solidFill>
+              </a:rPr>
+              <a:t>private</a:t>
+            </a:r>
+            <a:r>
+              <a:rPr lang="en-US" dirty="0"/>
+              <a:t>: Private methods, variables, and constructors are not accessible to any other class. It is the most restrictive access modifier. A class cannot be private unless it is a nested class.</a:t>
+            </a:r>
+          </a:p>
+        </p:txBody>
+      </p:sp>
+    </p:spTree>
+    <p:extLst>
+      <p:ext uri="{BB962C8B-B14F-4D97-AF65-F5344CB8AC3E}">
+        <p14:creationId xmlns:p14="http://schemas.microsoft.com/office/powerpoint/2010/main" val="3154389773"/>
+      </p:ext>
+    </p:extLst>
+  </p:cSld>
+  <p:clrMapOvr>
+    <a:masterClrMapping/>
+  </p:clrMapOvr>
+</p:sld>
+</file>
+
+<file path=ppt/slides/slide43.xml><?xml version="1.0" encoding="utf-8"?>
+<p:sld xmlns:a="http://schemas.openxmlformats.org/drawingml/2006/main" xmlns:r="http://schemas.openxmlformats.org/officeDocument/2006/relationships" xmlns:p="http://schemas.openxmlformats.org/presentationml/2006/main">
+  <p:cSld>
+    <p:spTree>
+      <p:nvGrpSpPr>
+        <p:cNvPr id="1" name=""/>
+        <p:cNvGrpSpPr/>
+        <p:nvPr/>
+      </p:nvGrpSpPr>
+      <p:grpSpPr>
+        <a:xfrm>
+          <a:off x="0" y="0"/>
+          <a:ext cx="0" cy="0"/>
+          <a:chOff x="0" y="0"/>
+          <a:chExt cx="0" cy="0"/>
+        </a:xfrm>
+      </p:grpSpPr>
+      <p:sp>
+        <p:nvSpPr>
+          <p:cNvPr id="2" name="Title 1">
+            <a:extLst>
+              <a:ext uri="{FF2B5EF4-FFF2-40B4-BE49-F238E27FC236}">
+                <a16:creationId xmlns:a16="http://schemas.microsoft.com/office/drawing/2014/main" id="{637B3352-26DE-9831-9215-0803977E9B4A}"/>
+              </a:ext>
+            </a:extLst>
+          </p:cNvPr>
+          <p:cNvSpPr>
+            <a:spLocks noGrp="1"/>
+          </p:cNvSpPr>
+          <p:nvPr>
+            <p:ph type="title"/>
+          </p:nvPr>
+        </p:nvSpPr>
+        <p:spPr/>
+        <p:txBody>
+          <a:bodyPr/>
+          <a:lstStyle/>
+          <a:p>
+            <a:r>
+              <a:rPr lang="en-US" dirty="0"/>
+              <a:t>The static keyword</a:t>
+            </a:r>
+          </a:p>
+        </p:txBody>
+      </p:sp>
+      <p:sp>
+        <p:nvSpPr>
+          <p:cNvPr id="3" name="Content Placeholder 2">
+            <a:extLst>
+              <a:ext uri="{FF2B5EF4-FFF2-40B4-BE49-F238E27FC236}">
+                <a16:creationId xmlns:a16="http://schemas.microsoft.com/office/drawing/2014/main" id="{97131DFA-BD49-186B-05D1-C6F26B58A745}"/>
+              </a:ext>
+            </a:extLst>
+          </p:cNvPr>
+          <p:cNvSpPr>
+            <a:spLocks noGrp="1"/>
+          </p:cNvSpPr>
+          <p:nvPr>
+            <p:ph idx="1"/>
+          </p:nvPr>
+        </p:nvSpPr>
+        <p:spPr>
+          <a:xfrm>
+            <a:off x="581192" y="2180497"/>
+            <a:ext cx="11029615" cy="1464578"/>
+          </a:xfrm>
+        </p:spPr>
+        <p:txBody>
+          <a:bodyPr/>
+          <a:lstStyle/>
+          <a:p>
+            <a:r>
+              <a:rPr lang="en-US" dirty="0"/>
+              <a:t>In Java, a static member is a member of a class that isn’t associated with an instance of a class. Instead, the member belongs to the class itself. As a result, you can access the static member without first creating a class instance.</a:t>
+            </a:r>
+          </a:p>
+          <a:p>
+            <a:r>
+              <a:rPr lang="en-US" dirty="0"/>
+              <a:t>The Static keyword may be used with code blocks, variables, methods, &amp; classes</a:t>
+            </a:r>
+          </a:p>
+        </p:txBody>
+      </p:sp>
+      <p:pic>
+        <p:nvPicPr>
+          <p:cNvPr id="5" name="Picture 4">
+            <a:extLst>
+              <a:ext uri="{FF2B5EF4-FFF2-40B4-BE49-F238E27FC236}">
+                <a16:creationId xmlns:a16="http://schemas.microsoft.com/office/drawing/2014/main" id="{09ACB8E1-5887-ACF1-6998-51CA9F505387}"/>
+              </a:ext>
+            </a:extLst>
+          </p:cNvPr>
+          <p:cNvPicPr>
+            <a:picLocks noChangeAspect="1"/>
+          </p:cNvPicPr>
+          <p:nvPr/>
+        </p:nvPicPr>
+        <p:blipFill>
+          <a:blip r:embed="rId2"/>
+          <a:stretch>
+            <a:fillRect/>
+          </a:stretch>
+        </p:blipFill>
+        <p:spPr>
+          <a:xfrm>
+            <a:off x="1486167" y="4232744"/>
+            <a:ext cx="4279569" cy="1687019"/>
+          </a:xfrm>
+          <a:prstGeom prst="rect">
+            <a:avLst/>
+          </a:prstGeom>
+        </p:spPr>
+      </p:pic>
+      <p:pic>
+        <p:nvPicPr>
+          <p:cNvPr id="7" name="Picture 6">
+            <a:extLst>
+              <a:ext uri="{FF2B5EF4-FFF2-40B4-BE49-F238E27FC236}">
+                <a16:creationId xmlns:a16="http://schemas.microsoft.com/office/drawing/2014/main" id="{6EB8CA63-D4F5-8889-9173-1E8048123314}"/>
+              </a:ext>
+            </a:extLst>
+          </p:cNvPr>
+          <p:cNvPicPr>
+            <a:picLocks noChangeAspect="1"/>
+          </p:cNvPicPr>
+          <p:nvPr/>
+        </p:nvPicPr>
+        <p:blipFill>
+          <a:blip r:embed="rId3"/>
+          <a:stretch>
+            <a:fillRect/>
+          </a:stretch>
+        </p:blipFill>
+        <p:spPr>
+          <a:xfrm>
+            <a:off x="7172762" y="4491431"/>
+            <a:ext cx="3175928" cy="2316768"/>
+          </a:xfrm>
+          <a:prstGeom prst="rect">
+            <a:avLst/>
+          </a:prstGeom>
+        </p:spPr>
+      </p:pic>
+      <p:sp>
+        <p:nvSpPr>
+          <p:cNvPr id="8" name="TextBox 7">
+            <a:extLst>
+              <a:ext uri="{FF2B5EF4-FFF2-40B4-BE49-F238E27FC236}">
+                <a16:creationId xmlns:a16="http://schemas.microsoft.com/office/drawing/2014/main" id="{4B696A8F-CE39-2A1A-BB50-952C4DBB0258}"/>
+              </a:ext>
+            </a:extLst>
+          </p:cNvPr>
+          <p:cNvSpPr txBox="1"/>
+          <p:nvPr/>
+        </p:nvSpPr>
+        <p:spPr>
+          <a:xfrm>
+            <a:off x="7073887" y="3740284"/>
+            <a:ext cx="3373678" cy="738664"/>
+          </a:xfrm>
+          <a:prstGeom prst="rect">
+            <a:avLst/>
+          </a:prstGeom>
+          <a:noFill/>
+        </p:spPr>
+        <p:txBody>
+          <a:bodyPr wrap="square" rtlCol="0">
+            <a:spAutoFit/>
+          </a:bodyPr>
+          <a:lstStyle/>
+          <a:p>
+            <a:r>
+              <a:rPr lang="en-US" sz="1400" dirty="0"/>
+              <a:t>Notice we no longer need to use the new keyword to instantiate a Calculator object, we instead call the class method directly: </a:t>
+            </a:r>
+          </a:p>
+        </p:txBody>
+      </p:sp>
+    </p:spTree>
+    <p:extLst>
+      <p:ext uri="{BB962C8B-B14F-4D97-AF65-F5344CB8AC3E}">
+        <p14:creationId xmlns:p14="http://schemas.microsoft.com/office/powerpoint/2010/main" val="2949371615"/>
+      </p:ext>
+    </p:extLst>
+  </p:cSld>
+  <p:clrMapOvr>
+    <a:masterClrMapping/>
+  </p:clrMapOvr>
+</p:sld>
+</file>
+
+<file path=ppt/slides/slide44.xml><?xml version="1.0" encoding="utf-8"?>
+<p:sld xmlns:a="http://schemas.openxmlformats.org/drawingml/2006/main" xmlns:r="http://schemas.openxmlformats.org/officeDocument/2006/relationships" xmlns:p="http://schemas.openxmlformats.org/presentationml/2006/main">
+  <p:cSld>
+    <p:spTree>
+      <p:nvGrpSpPr>
+        <p:cNvPr id="1" name=""/>
+        <p:cNvGrpSpPr/>
+        <p:nvPr/>
+      </p:nvGrpSpPr>
+      <p:grpSpPr>
+        <a:xfrm>
+          <a:off x="0" y="0"/>
+          <a:ext cx="0" cy="0"/>
+          <a:chOff x="0" y="0"/>
+          <a:chExt cx="0" cy="0"/>
+        </a:xfrm>
+      </p:grpSpPr>
+      <p:sp>
+        <p:nvSpPr>
+          <p:cNvPr id="2" name="Title 1">
+            <a:extLst>
+              <a:ext uri="{FF2B5EF4-FFF2-40B4-BE49-F238E27FC236}">
+                <a16:creationId xmlns:a16="http://schemas.microsoft.com/office/drawing/2014/main" id="{63626951-A7B3-A649-D5E3-A56F2BAD2BD4}"/>
+              </a:ext>
+            </a:extLst>
+          </p:cNvPr>
+          <p:cNvSpPr>
+            <a:spLocks noGrp="1"/>
+          </p:cNvSpPr>
+          <p:nvPr>
+            <p:ph type="title"/>
+          </p:nvPr>
+        </p:nvSpPr>
+        <p:spPr/>
+        <p:txBody>
+          <a:bodyPr/>
+          <a:lstStyle/>
+          <a:p>
+            <a:r>
+              <a:rPr lang="en-US" dirty="0"/>
+              <a:t>Taking user input - scanner</a:t>
+            </a:r>
+          </a:p>
+        </p:txBody>
+      </p:sp>
+      <p:pic>
+        <p:nvPicPr>
+          <p:cNvPr id="5" name="Picture 4">
+            <a:extLst>
+              <a:ext uri="{FF2B5EF4-FFF2-40B4-BE49-F238E27FC236}">
+                <a16:creationId xmlns:a16="http://schemas.microsoft.com/office/drawing/2014/main" id="{C4A049A5-8BFB-6E08-9BA7-1DE5E6AC1170}"/>
+              </a:ext>
+            </a:extLst>
+          </p:cNvPr>
+          <p:cNvPicPr>
+            <a:picLocks noChangeAspect="1"/>
+          </p:cNvPicPr>
+          <p:nvPr/>
+        </p:nvPicPr>
+        <p:blipFill>
+          <a:blip r:embed="rId2"/>
+          <a:stretch>
+            <a:fillRect/>
+          </a:stretch>
+        </p:blipFill>
+        <p:spPr>
+          <a:xfrm>
+            <a:off x="1453928" y="2110636"/>
+            <a:ext cx="3779922" cy="4458871"/>
+          </a:xfrm>
+          <a:prstGeom prst="rect">
+            <a:avLst/>
+          </a:prstGeom>
+        </p:spPr>
+      </p:pic>
+      <p:pic>
+        <p:nvPicPr>
+          <p:cNvPr id="7" name="Picture 6">
+            <a:extLst>
+              <a:ext uri="{FF2B5EF4-FFF2-40B4-BE49-F238E27FC236}">
+                <a16:creationId xmlns:a16="http://schemas.microsoft.com/office/drawing/2014/main" id="{A704020E-44F2-AF36-8FC6-5076BAFD2C6E}"/>
+              </a:ext>
+            </a:extLst>
+          </p:cNvPr>
+          <p:cNvPicPr>
+            <a:picLocks noChangeAspect="1"/>
+          </p:cNvPicPr>
+          <p:nvPr/>
+        </p:nvPicPr>
+        <p:blipFill>
+          <a:blip r:embed="rId3"/>
+          <a:stretch>
+            <a:fillRect/>
+          </a:stretch>
+        </p:blipFill>
+        <p:spPr>
+          <a:xfrm>
+            <a:off x="6819163" y="3429000"/>
+            <a:ext cx="2514951" cy="1476581"/>
+          </a:xfrm>
+          <a:prstGeom prst="rect">
+            <a:avLst/>
+          </a:prstGeom>
+        </p:spPr>
+      </p:pic>
+    </p:spTree>
+    <p:extLst>
+      <p:ext uri="{BB962C8B-B14F-4D97-AF65-F5344CB8AC3E}">
+        <p14:creationId xmlns:p14="http://schemas.microsoft.com/office/powerpoint/2010/main" val="190024165"/>
+      </p:ext>
+    </p:extLst>
+  </p:cSld>
+  <p:clrMapOvr>
+    <a:masterClrMapping/>
+  </p:clrMapOvr>
+</p:sld>
+</file>
+
+<file path=ppt/slides/slide45.xml><?xml version="1.0" encoding="utf-8"?>
+<p:sld xmlns:a="http://schemas.openxmlformats.org/drawingml/2006/main" xmlns:r="http://schemas.openxmlformats.org/officeDocument/2006/relationships" xmlns:p="http://schemas.openxmlformats.org/presentationml/2006/main">
+  <p:cSld>
+    <p:spTree>
+      <p:nvGrpSpPr>
+        <p:cNvPr id="1" name=""/>
+        <p:cNvGrpSpPr/>
+        <p:nvPr/>
+      </p:nvGrpSpPr>
+      <p:grpSpPr>
+        <a:xfrm>
+          <a:off x="0" y="0"/>
+          <a:ext cx="0" cy="0"/>
+          <a:chOff x="0" y="0"/>
+          <a:chExt cx="0" cy="0"/>
+        </a:xfrm>
+      </p:grpSpPr>
+      <p:sp>
+        <p:nvSpPr>
+          <p:cNvPr id="2" name="Title 1">
+            <a:extLst>
+              <a:ext uri="{FF2B5EF4-FFF2-40B4-BE49-F238E27FC236}">
+                <a16:creationId xmlns:a16="http://schemas.microsoft.com/office/drawing/2014/main" id="{2A1FDDE2-F518-7C30-1018-699007972176}"/>
+              </a:ext>
+            </a:extLst>
+          </p:cNvPr>
+          <p:cNvSpPr>
+            <a:spLocks noGrp="1"/>
+          </p:cNvSpPr>
+          <p:nvPr>
+            <p:ph type="title"/>
+          </p:nvPr>
+        </p:nvSpPr>
+        <p:spPr/>
+        <p:txBody>
+          <a:bodyPr/>
+          <a:lstStyle/>
+          <a:p>
+            <a:r>
+              <a:rPr lang="en-US" dirty="0"/>
+              <a:t>Common scanner methods</a:t>
+            </a:r>
+          </a:p>
+        </p:txBody>
+      </p:sp>
+      <p:graphicFrame>
+        <p:nvGraphicFramePr>
+          <p:cNvPr id="4" name="Table 3">
+            <a:extLst>
+              <a:ext uri="{FF2B5EF4-FFF2-40B4-BE49-F238E27FC236}">
+                <a16:creationId xmlns:a16="http://schemas.microsoft.com/office/drawing/2014/main" id="{F3E203F9-1733-1C84-915A-4714F8965DC7}"/>
+              </a:ext>
+            </a:extLst>
+          </p:cNvPr>
+          <p:cNvGraphicFramePr>
+            <a:graphicFrameLocks noGrp="1"/>
+          </p:cNvGraphicFramePr>
+          <p:nvPr>
+            <p:extLst>
+              <p:ext uri="{D42A27DB-BD31-4B8C-83A1-F6EECF244321}">
+                <p14:modId xmlns:p14="http://schemas.microsoft.com/office/powerpoint/2010/main" val="3654019408"/>
+              </p:ext>
+            </p:extLst>
+          </p:nvPr>
+        </p:nvGraphicFramePr>
+        <p:xfrm>
+          <a:off x="581025" y="2817178"/>
+          <a:ext cx="11029950" cy="2560320"/>
+        </p:xfrm>
+        <a:graphic>
+          <a:graphicData uri="http://schemas.openxmlformats.org/drawingml/2006/table">
+            <a:tbl>
+              <a:tblPr>
+                <a:tableStyleId>{5C22544A-7EE6-4342-B048-85BDC9FD1C3A}</a:tableStyleId>
+              </a:tblPr>
+              <a:tblGrid>
+                <a:gridCol w="5514975">
+                  <a:extLst>
+                    <a:ext uri="{9D8B030D-6E8A-4147-A177-3AD203B41FA5}">
+                      <a16:colId xmlns:a16="http://schemas.microsoft.com/office/drawing/2014/main" val="1510903267"/>
+                    </a:ext>
+                  </a:extLst>
+                </a:gridCol>
+                <a:gridCol w="5514975">
+                  <a:extLst>
+                    <a:ext uri="{9D8B030D-6E8A-4147-A177-3AD203B41FA5}">
+                      <a16:colId xmlns:a16="http://schemas.microsoft.com/office/drawing/2014/main" val="412265136"/>
+                    </a:ext>
+                  </a:extLst>
+                </a:gridCol>
+              </a:tblGrid>
+              <a:tr h="0">
+                <a:tc>
+                  <a:txBody>
+                    <a:bodyPr/>
+                    <a:lstStyle/>
+                    <a:p>
+                      <a:pPr marL="0" marR="0" algn="l">
+                        <a:buNone/>
+                      </a:pPr>
+                      <a:r>
+                        <a:rPr lang="en-US" b="1" dirty="0">
+                          <a:effectLst/>
+                        </a:rPr>
+                        <a:t>Method</a:t>
+                      </a:r>
+                      <a:endParaRPr lang="en-US" b="1" i="0" dirty="0">
+                        <a:solidFill>
+                          <a:srgbClr val="FFFFFF"/>
+                        </a:solidFill>
+                        <a:effectLst/>
+                        <a:latin typeface="-apple-system-body"/>
+                      </a:endParaRPr>
+                    </a:p>
+                  </a:txBody>
+                  <a:tcPr anchor="ctr"/>
+                </a:tc>
+                <a:tc>
+                  <a:txBody>
+                    <a:bodyPr/>
+                    <a:lstStyle/>
+                    <a:p>
+                      <a:pPr marL="0" marR="0" algn="l">
+                        <a:buNone/>
+                      </a:pPr>
+                      <a:r>
+                        <a:rPr lang="en-US" b="1" dirty="0">
+                          <a:effectLst/>
+                        </a:rPr>
+                        <a:t>Takes input as</a:t>
+                      </a:r>
+                      <a:endParaRPr lang="en-US" b="1" i="0" dirty="0">
+                        <a:solidFill>
+                          <a:srgbClr val="FFFFFF"/>
+                        </a:solidFill>
+                        <a:effectLst/>
+                        <a:latin typeface="-apple-system-body"/>
+                      </a:endParaRPr>
+                    </a:p>
+                  </a:txBody>
+                  <a:tcPr anchor="ctr"/>
+                </a:tc>
+                <a:extLst>
+                  <a:ext uri="{0D108BD9-81ED-4DB2-BD59-A6C34878D82A}">
+                    <a16:rowId xmlns:a16="http://schemas.microsoft.com/office/drawing/2014/main" val="1521617134"/>
+                  </a:ext>
+                </a:extLst>
+              </a:tr>
+              <a:tr h="0">
+                <a:tc>
+                  <a:txBody>
+                    <a:bodyPr/>
+                    <a:lstStyle/>
+                    <a:p>
+                      <a:pPr marL="0" marR="0" algn="l">
+                        <a:buNone/>
+                      </a:pPr>
+                      <a:r>
+                        <a:rPr lang="en-US">
+                          <a:effectLst/>
+                        </a:rPr>
+                        <a:t>nextInt()</a:t>
+                      </a:r>
+                      <a:endParaRPr lang="en-US" b="0" i="0">
+                        <a:solidFill>
+                          <a:srgbClr val="FFFFFF"/>
+                        </a:solidFill>
+                        <a:effectLst/>
+                        <a:latin typeface="-apple-system-body"/>
+                      </a:endParaRPr>
+                    </a:p>
+                  </a:txBody>
+                  <a:tcPr anchor="ctr"/>
+                </a:tc>
+                <a:tc>
+                  <a:txBody>
+                    <a:bodyPr/>
+                    <a:lstStyle/>
+                    <a:p>
+                      <a:pPr marL="0" marR="0" algn="l">
+                        <a:buNone/>
+                      </a:pPr>
+                      <a:r>
+                        <a:rPr lang="en-US">
+                          <a:effectLst/>
+                        </a:rPr>
+                        <a:t>int</a:t>
+                      </a:r>
+                      <a:endParaRPr lang="en-US" b="0" i="0">
+                        <a:solidFill>
+                          <a:srgbClr val="FFFFFF"/>
+                        </a:solidFill>
+                        <a:effectLst/>
+                        <a:latin typeface="-apple-system-body"/>
+                      </a:endParaRPr>
+                    </a:p>
+                  </a:txBody>
+                  <a:tcPr anchor="ctr"/>
+                </a:tc>
+                <a:extLst>
+                  <a:ext uri="{0D108BD9-81ED-4DB2-BD59-A6C34878D82A}">
+                    <a16:rowId xmlns:a16="http://schemas.microsoft.com/office/drawing/2014/main" val="1264384220"/>
+                  </a:ext>
+                </a:extLst>
+              </a:tr>
+              <a:tr h="0">
+                <a:tc>
+                  <a:txBody>
+                    <a:bodyPr/>
+                    <a:lstStyle/>
+                    <a:p>
+                      <a:pPr marL="0" marR="0" algn="l">
+                        <a:buNone/>
+                      </a:pPr>
+                      <a:r>
+                        <a:rPr lang="en-US">
+                          <a:effectLst/>
+                        </a:rPr>
+                        <a:t>nextDouble()</a:t>
+                      </a:r>
+                      <a:endParaRPr lang="en-US" b="0" i="0">
+                        <a:solidFill>
+                          <a:srgbClr val="FFFFFF"/>
+                        </a:solidFill>
+                        <a:effectLst/>
+                        <a:latin typeface="-apple-system-body"/>
+                      </a:endParaRPr>
+                    </a:p>
+                  </a:txBody>
+                  <a:tcPr anchor="ctr"/>
+                </a:tc>
+                <a:tc>
+                  <a:txBody>
+                    <a:bodyPr/>
+                    <a:lstStyle/>
+                    <a:p>
+                      <a:pPr marL="0" marR="0" algn="l">
+                        <a:buNone/>
+                      </a:pPr>
+                      <a:r>
+                        <a:rPr lang="en-US">
+                          <a:effectLst/>
+                        </a:rPr>
+                        <a:t>double</a:t>
+                      </a:r>
+                      <a:endParaRPr lang="en-US" b="0" i="0">
+                        <a:solidFill>
+                          <a:srgbClr val="FFFFFF"/>
+                        </a:solidFill>
+                        <a:effectLst/>
+                        <a:latin typeface="-apple-system-body"/>
+                      </a:endParaRPr>
+                    </a:p>
+                  </a:txBody>
+                  <a:tcPr anchor="ctr"/>
+                </a:tc>
+                <a:extLst>
+                  <a:ext uri="{0D108BD9-81ED-4DB2-BD59-A6C34878D82A}">
+                    <a16:rowId xmlns:a16="http://schemas.microsoft.com/office/drawing/2014/main" val="1533480384"/>
+                  </a:ext>
+                </a:extLst>
+              </a:tr>
+              <a:tr h="0">
+                <a:tc>
+                  <a:txBody>
+                    <a:bodyPr/>
+                    <a:lstStyle/>
+                    <a:p>
+                      <a:pPr marL="0" marR="0" algn="l">
+                        <a:buNone/>
+                      </a:pPr>
+                      <a:r>
+                        <a:rPr lang="en-US">
+                          <a:effectLst/>
+                        </a:rPr>
+                        <a:t>nextFloat()</a:t>
+                      </a:r>
+                      <a:endParaRPr lang="en-US" b="0" i="0">
+                        <a:solidFill>
+                          <a:srgbClr val="FFFFFF"/>
+                        </a:solidFill>
+                        <a:effectLst/>
+                        <a:latin typeface="-apple-system-body"/>
+                      </a:endParaRPr>
+                    </a:p>
+                  </a:txBody>
+                  <a:tcPr anchor="ctr"/>
+                </a:tc>
+                <a:tc>
+                  <a:txBody>
+                    <a:bodyPr/>
+                    <a:lstStyle/>
+                    <a:p>
+                      <a:pPr marL="0" marR="0" algn="l">
+                        <a:buNone/>
+                      </a:pPr>
+                      <a:r>
+                        <a:rPr lang="en-US">
+                          <a:effectLst/>
+                        </a:rPr>
+                        <a:t>float</a:t>
+                      </a:r>
+                      <a:endParaRPr lang="en-US" b="0" i="0">
+                        <a:solidFill>
+                          <a:srgbClr val="FFFFFF"/>
+                        </a:solidFill>
+                        <a:effectLst/>
+                        <a:latin typeface="-apple-system-body"/>
+                      </a:endParaRPr>
+                    </a:p>
+                  </a:txBody>
+                  <a:tcPr anchor="ctr"/>
+                </a:tc>
+                <a:extLst>
+                  <a:ext uri="{0D108BD9-81ED-4DB2-BD59-A6C34878D82A}">
+                    <a16:rowId xmlns:a16="http://schemas.microsoft.com/office/drawing/2014/main" val="1775353747"/>
+                  </a:ext>
+                </a:extLst>
+              </a:tr>
+              <a:tr h="0">
+                <a:tc>
+                  <a:txBody>
+                    <a:bodyPr/>
+                    <a:lstStyle/>
+                    <a:p>
+                      <a:pPr marL="0" marR="0" algn="l">
+                        <a:buNone/>
+                      </a:pPr>
+                      <a:r>
+                        <a:rPr lang="en-US">
+                          <a:effectLst/>
+                        </a:rPr>
+                        <a:t>nextBoolean()</a:t>
+                      </a:r>
+                      <a:endParaRPr lang="en-US" b="0" i="0">
+                        <a:solidFill>
+                          <a:srgbClr val="FFFFFF"/>
+                        </a:solidFill>
+                        <a:effectLst/>
+                        <a:latin typeface="-apple-system-body"/>
+                      </a:endParaRPr>
+                    </a:p>
+                  </a:txBody>
+                  <a:tcPr anchor="ctr"/>
+                </a:tc>
+                <a:tc>
+                  <a:txBody>
+                    <a:bodyPr/>
+                    <a:lstStyle/>
+                    <a:p>
+                      <a:pPr marL="0" marR="0" algn="l">
+                        <a:buNone/>
+                      </a:pPr>
+                      <a:r>
+                        <a:rPr lang="en-US">
+                          <a:effectLst/>
+                        </a:rPr>
+                        <a:t>boolean</a:t>
+                      </a:r>
+                      <a:endParaRPr lang="en-US" b="0" i="0">
+                        <a:solidFill>
+                          <a:srgbClr val="FFFFFF"/>
+                        </a:solidFill>
+                        <a:effectLst/>
+                        <a:latin typeface="-apple-system-body"/>
+                      </a:endParaRPr>
+                    </a:p>
+                  </a:txBody>
+                  <a:tcPr anchor="ctr"/>
+                </a:tc>
+                <a:extLst>
+                  <a:ext uri="{0D108BD9-81ED-4DB2-BD59-A6C34878D82A}">
+                    <a16:rowId xmlns:a16="http://schemas.microsoft.com/office/drawing/2014/main" val="3616244469"/>
+                  </a:ext>
+                </a:extLst>
+              </a:tr>
+              <a:tr h="0">
+                <a:tc>
+                  <a:txBody>
+                    <a:bodyPr/>
+                    <a:lstStyle/>
+                    <a:p>
+                      <a:pPr marL="0" marR="0" algn="l">
+                        <a:buNone/>
+                      </a:pPr>
+                      <a:r>
+                        <a:rPr lang="en-US">
+                          <a:effectLst/>
+                        </a:rPr>
+                        <a:t>next()</a:t>
+                      </a:r>
+                      <a:endParaRPr lang="en-US" b="0" i="0">
+                        <a:solidFill>
+                          <a:srgbClr val="FFFFFF"/>
+                        </a:solidFill>
+                        <a:effectLst/>
+                        <a:latin typeface="-apple-system-body"/>
+                      </a:endParaRPr>
+                    </a:p>
+                  </a:txBody>
+                  <a:tcPr anchor="ctr"/>
+                </a:tc>
+                <a:tc>
+                  <a:txBody>
+                    <a:bodyPr/>
+                    <a:lstStyle/>
+                    <a:p>
+                      <a:pPr marL="0" marR="0" algn="l">
+                        <a:buNone/>
+                      </a:pPr>
+                      <a:r>
+                        <a:rPr lang="en-US">
+                          <a:effectLst/>
+                        </a:rPr>
+                        <a:t>One word (String)</a:t>
+                      </a:r>
+                      <a:endParaRPr lang="en-US" b="0" i="0">
+                        <a:solidFill>
+                          <a:srgbClr val="FFFFFF"/>
+                        </a:solidFill>
+                        <a:effectLst/>
+                        <a:latin typeface="-apple-system-body"/>
+                      </a:endParaRPr>
+                    </a:p>
+                  </a:txBody>
+                  <a:tcPr anchor="ctr"/>
+                </a:tc>
+                <a:extLst>
+                  <a:ext uri="{0D108BD9-81ED-4DB2-BD59-A6C34878D82A}">
+                    <a16:rowId xmlns:a16="http://schemas.microsoft.com/office/drawing/2014/main" val="2156834319"/>
+                  </a:ext>
+                </a:extLst>
+              </a:tr>
+              <a:tr h="0">
+                <a:tc>
+                  <a:txBody>
+                    <a:bodyPr/>
+                    <a:lstStyle/>
+                    <a:p>
+                      <a:pPr marL="0" marR="0" algn="l">
+                        <a:buNone/>
+                      </a:pPr>
+                      <a:r>
+                        <a:rPr lang="en-US">
+                          <a:effectLst/>
+                        </a:rPr>
+                        <a:t>nextLine()</a:t>
+                      </a:r>
+                      <a:endParaRPr lang="en-US" b="0" i="0">
+                        <a:solidFill>
+                          <a:srgbClr val="FFFFFF"/>
+                        </a:solidFill>
+                        <a:effectLst/>
+                        <a:latin typeface="-apple-system-body"/>
+                      </a:endParaRPr>
+                    </a:p>
+                  </a:txBody>
+                  <a:tcPr anchor="ctr"/>
+                </a:tc>
+                <a:tc>
+                  <a:txBody>
+                    <a:bodyPr/>
+                    <a:lstStyle/>
+                    <a:p>
+                      <a:pPr marL="0" marR="0" algn="l">
+                        <a:buNone/>
+                      </a:pPr>
+                      <a:r>
+                        <a:rPr lang="en-US" dirty="0">
+                          <a:effectLst/>
+                        </a:rPr>
+                        <a:t>Entire line (String)</a:t>
+                      </a:r>
+                      <a:endParaRPr lang="en-US" b="0" i="0" dirty="0">
+                        <a:solidFill>
+                          <a:srgbClr val="FFFFFF"/>
+                        </a:solidFill>
+                        <a:effectLst/>
+                        <a:latin typeface="-apple-system-body"/>
+                      </a:endParaRPr>
+                    </a:p>
+                  </a:txBody>
+                  <a:tcPr anchor="ctr"/>
+                </a:tc>
+                <a:extLst>
+                  <a:ext uri="{0D108BD9-81ED-4DB2-BD59-A6C34878D82A}">
+                    <a16:rowId xmlns:a16="http://schemas.microsoft.com/office/drawing/2014/main" val="754037280"/>
+                  </a:ext>
+                </a:extLst>
+              </a:tr>
+            </a:tbl>
+          </a:graphicData>
+        </a:graphic>
+      </p:graphicFrame>
+    </p:spTree>
+    <p:extLst>
+      <p:ext uri="{BB962C8B-B14F-4D97-AF65-F5344CB8AC3E}">
+        <p14:creationId xmlns:p14="http://schemas.microsoft.com/office/powerpoint/2010/main" val="2697815393"/>
+      </p:ext>
+    </p:extLst>
+  </p:cSld>
+  <p:clrMapOvr>
+    <a:masterClrMapping/>
+  </p:clrMapOvr>
+</p:sld>
+</file>
+
+<file path=ppt/slides/slide46.xml><?xml version="1.0" encoding="utf-8"?>
+<p:sld xmlns:a="http://schemas.openxmlformats.org/drawingml/2006/main" xmlns:r="http://schemas.openxmlformats.org/officeDocument/2006/relationships" xmlns:p="http://schemas.openxmlformats.org/presentationml/2006/main">
+  <p:cSld>
+    <p:spTree>
+      <p:nvGrpSpPr>
+        <p:cNvPr id="1" name="">
+          <a:extLst>
+            <a:ext uri="{FF2B5EF4-FFF2-40B4-BE49-F238E27FC236}">
+              <a16:creationId xmlns:a16="http://schemas.microsoft.com/office/drawing/2014/main" id="{382240A4-AB3F-9AFA-A403-CF863867A056}"/>
+            </a:ext>
+          </a:extLst>
+        </p:cNvPr>
+        <p:cNvGrpSpPr/>
+        <p:nvPr/>
+      </p:nvGrpSpPr>
+      <p:grpSpPr>
+        <a:xfrm>
+          <a:off x="0" y="0"/>
+          <a:ext cx="0" cy="0"/>
+          <a:chOff x="0" y="0"/>
+          <a:chExt cx="0" cy="0"/>
+        </a:xfrm>
+      </p:grpSpPr>
+      <p:sp>
+        <p:nvSpPr>
+          <p:cNvPr id="2" name="Title 1">
+            <a:extLst>
+              <a:ext uri="{FF2B5EF4-FFF2-40B4-BE49-F238E27FC236}">
+                <a16:creationId xmlns:a16="http://schemas.microsoft.com/office/drawing/2014/main" id="{A326BCA4-81D5-B411-5356-7FE280DAFA31}"/>
+              </a:ext>
+            </a:extLst>
+          </p:cNvPr>
+          <p:cNvSpPr>
+            <a:spLocks noGrp="1"/>
+          </p:cNvSpPr>
+          <p:nvPr>
+            <p:ph type="title"/>
+          </p:nvPr>
+        </p:nvSpPr>
+        <p:spPr/>
+        <p:txBody>
+          <a:bodyPr/>
+          <a:lstStyle/>
+          <a:p>
+            <a:r>
+              <a:rPr lang="en-US" dirty="0"/>
+              <a:t>Challenge – Calculate 5 test scores</a:t>
+            </a:r>
+          </a:p>
+        </p:txBody>
+      </p:sp>
+      <p:sp>
+        <p:nvSpPr>
+          <p:cNvPr id="6" name="TextBox 5">
+            <a:extLst>
+              <a:ext uri="{FF2B5EF4-FFF2-40B4-BE49-F238E27FC236}">
+                <a16:creationId xmlns:a16="http://schemas.microsoft.com/office/drawing/2014/main" id="{ED197CB1-77F6-CFCE-040C-4E4430D483F7}"/>
+              </a:ext>
+            </a:extLst>
+          </p:cNvPr>
+          <p:cNvSpPr txBox="1"/>
+          <p:nvPr/>
+        </p:nvSpPr>
+        <p:spPr>
+          <a:xfrm>
+            <a:off x="1228165" y="2402747"/>
+            <a:ext cx="2106667" cy="369332"/>
+          </a:xfrm>
+          <a:prstGeom prst="rect">
+            <a:avLst/>
+          </a:prstGeom>
+          <a:noFill/>
+        </p:spPr>
+        <p:txBody>
+          <a:bodyPr wrap="none" rtlCol="0">
+            <a:spAutoFit/>
+          </a:bodyPr>
+          <a:lstStyle/>
+          <a:p>
+            <a:r>
+              <a:rPr lang="en-US" b="1" dirty="0"/>
+              <a:t>Expected Output:</a:t>
+            </a:r>
+          </a:p>
+        </p:txBody>
+      </p:sp>
+      <p:sp>
+        <p:nvSpPr>
+          <p:cNvPr id="7" name="TextBox 6">
+            <a:extLst>
+              <a:ext uri="{FF2B5EF4-FFF2-40B4-BE49-F238E27FC236}">
+                <a16:creationId xmlns:a16="http://schemas.microsoft.com/office/drawing/2014/main" id="{E0D848BE-A0E5-713F-98D2-55413A5BAC26}"/>
+              </a:ext>
+            </a:extLst>
+          </p:cNvPr>
+          <p:cNvSpPr txBox="1"/>
+          <p:nvPr/>
+        </p:nvSpPr>
+        <p:spPr>
+          <a:xfrm>
+            <a:off x="6582427" y="2402747"/>
+            <a:ext cx="5028381" cy="369332"/>
+          </a:xfrm>
+          <a:prstGeom prst="rect">
+            <a:avLst/>
+          </a:prstGeom>
+          <a:noFill/>
+        </p:spPr>
+        <p:txBody>
+          <a:bodyPr wrap="square" rtlCol="0">
+            <a:spAutoFit/>
+          </a:bodyPr>
+          <a:lstStyle/>
+          <a:p>
+            <a:r>
+              <a:rPr lang="en-US" b="1" dirty="0"/>
+              <a:t>Scenario:  			   </a:t>
+            </a:r>
+          </a:p>
+        </p:txBody>
+      </p:sp>
+      <p:sp>
+        <p:nvSpPr>
+          <p:cNvPr id="4" name="TextBox 3">
+            <a:extLst>
+              <a:ext uri="{FF2B5EF4-FFF2-40B4-BE49-F238E27FC236}">
+                <a16:creationId xmlns:a16="http://schemas.microsoft.com/office/drawing/2014/main" id="{1EBA4787-F6B8-0E25-54F5-B02FFD1E3D98}"/>
+              </a:ext>
+            </a:extLst>
+          </p:cNvPr>
+          <p:cNvSpPr txBox="1"/>
+          <p:nvPr/>
+        </p:nvSpPr>
+        <p:spPr>
+          <a:xfrm>
+            <a:off x="5835563" y="2869502"/>
+            <a:ext cx="6097044" cy="1600438"/>
+          </a:xfrm>
+          <a:prstGeom prst="rect">
+            <a:avLst/>
+          </a:prstGeom>
+          <a:noFill/>
+        </p:spPr>
+        <p:txBody>
+          <a:bodyPr wrap="square">
+            <a:spAutoFit/>
+          </a:bodyPr>
+          <a:lstStyle/>
+          <a:p>
+            <a:pPr marL="0" marR="0" indent="0" algn="l">
+              <a:buNone/>
+            </a:pPr>
+            <a:r>
+              <a:rPr lang="en-US" sz="1400" b="0" i="0" dirty="0">
+                <a:effectLst/>
+                <a:latin typeface="+mn-lt"/>
+              </a:rPr>
+              <a:t>Ask for 5 test scores and calculate:</a:t>
+            </a:r>
+          </a:p>
+          <a:p>
+            <a:pPr marL="285750" marR="0" indent="-285750" algn="l">
+              <a:buFontTx/>
+              <a:buChar char="-"/>
+            </a:pPr>
+            <a:r>
+              <a:rPr lang="en-US" sz="1400" dirty="0"/>
+              <a:t>Total</a:t>
+            </a:r>
+          </a:p>
+          <a:p>
+            <a:pPr marL="285750" marR="0" indent="-285750" algn="l">
+              <a:buFontTx/>
+              <a:buChar char="-"/>
+            </a:pPr>
+            <a:r>
+              <a:rPr lang="en-US" sz="1400" dirty="0"/>
+              <a:t>Average</a:t>
+            </a:r>
+          </a:p>
+          <a:p>
+            <a:pPr marL="285750" marR="0" indent="-285750" algn="l">
+              <a:buFontTx/>
+              <a:buChar char="-"/>
+            </a:pPr>
+            <a:r>
+              <a:rPr lang="en-US" sz="1400" dirty="0"/>
+              <a:t>Highest Score</a:t>
+            </a:r>
+          </a:p>
+          <a:p>
+            <a:pPr marL="285750" marR="0" indent="-285750" algn="l">
+              <a:buFontTx/>
+              <a:buChar char="-"/>
+            </a:pPr>
+            <a:r>
+              <a:rPr lang="en-US" sz="1400" dirty="0"/>
+              <a:t>Lowest Score</a:t>
+            </a:r>
+          </a:p>
+          <a:p>
+            <a:pPr marL="285750" marR="0" indent="-285750" algn="l">
+              <a:buFontTx/>
+              <a:buChar char="-"/>
+            </a:pPr>
+            <a:endParaRPr lang="en-US" sz="1400" dirty="0"/>
+          </a:p>
+          <a:p>
+            <a:pPr marR="0" algn="l"/>
+            <a:r>
+              <a:rPr lang="en-US" sz="1400" dirty="0"/>
+              <a:t>Then assign a letter grade.</a:t>
+            </a:r>
+          </a:p>
+        </p:txBody>
+      </p:sp>
+      <p:sp>
+        <p:nvSpPr>
+          <p:cNvPr id="9" name="TextBox 8">
+            <a:extLst>
+              <a:ext uri="{FF2B5EF4-FFF2-40B4-BE49-F238E27FC236}">
+                <a16:creationId xmlns:a16="http://schemas.microsoft.com/office/drawing/2014/main" id="{818DB700-4C3C-007C-7923-932250BF4187}"/>
+              </a:ext>
+            </a:extLst>
+          </p:cNvPr>
+          <p:cNvSpPr txBox="1"/>
+          <p:nvPr/>
+        </p:nvSpPr>
+        <p:spPr>
+          <a:xfrm>
+            <a:off x="1228165" y="2869502"/>
+            <a:ext cx="3771900" cy="2862322"/>
+          </a:xfrm>
+          <a:prstGeom prst="rect">
+            <a:avLst/>
+          </a:prstGeom>
+          <a:noFill/>
+        </p:spPr>
+        <p:txBody>
+          <a:bodyPr wrap="square">
+            <a:spAutoFit/>
+          </a:bodyPr>
+          <a:lstStyle/>
+          <a:p>
+            <a:pPr lvl="0"/>
+            <a:r>
+              <a:rPr lang="en-US" sz="1200" b="0" i="0" dirty="0">
+                <a:effectLst/>
+                <a:latin typeface="SFMono-Regular"/>
+              </a:rPr>
+              <a:t>If the 5 test scores entered are: 100, 90, 60, </a:t>
+            </a:r>
+            <a:r>
+              <a:rPr lang="en-US" sz="1200" dirty="0">
+                <a:latin typeface="SFMono-Regular"/>
+              </a:rPr>
+              <a:t>75, 20</a:t>
+            </a:r>
+          </a:p>
+          <a:p>
+            <a:pPr lvl="0"/>
+            <a:endParaRPr lang="en-US" sz="1200" b="0" i="0" dirty="0">
+              <a:effectLst/>
+              <a:latin typeface="SFMono-Regular"/>
+            </a:endParaRPr>
+          </a:p>
+          <a:p>
+            <a:pPr lvl="0"/>
+            <a:r>
+              <a:rPr lang="en-US" sz="1200" dirty="0">
+                <a:latin typeface="SFMono-Regular"/>
+              </a:rPr>
+              <a:t>Then:</a:t>
+            </a:r>
+          </a:p>
+          <a:p>
+            <a:pPr lvl="0"/>
+            <a:endParaRPr lang="en-US" sz="1200" b="0" i="0" dirty="0">
+              <a:effectLst/>
+              <a:latin typeface="SFMono-Regular"/>
+            </a:endParaRPr>
+          </a:p>
+          <a:p>
+            <a:pPr lvl="0"/>
+            <a:r>
+              <a:rPr lang="en-US" sz="1200" dirty="0">
+                <a:latin typeface="SFMono-Regular"/>
+              </a:rPr>
+              <a:t>Total: 345</a:t>
+            </a:r>
+          </a:p>
+          <a:p>
+            <a:pPr lvl="0"/>
+            <a:r>
+              <a:rPr lang="en-US" sz="1200" b="0" i="0" dirty="0">
+                <a:effectLst/>
+                <a:latin typeface="SFMono-Regular"/>
+              </a:rPr>
+              <a:t>Average: 69</a:t>
+            </a:r>
+          </a:p>
+          <a:p>
+            <a:pPr lvl="0"/>
+            <a:r>
+              <a:rPr lang="en-US" sz="1200" dirty="0">
+                <a:latin typeface="SFMono-Regular"/>
+              </a:rPr>
+              <a:t>Highest: 100</a:t>
+            </a:r>
+          </a:p>
+          <a:p>
+            <a:pPr lvl="0"/>
+            <a:r>
+              <a:rPr lang="en-US" sz="1200" b="0" i="0" dirty="0">
+                <a:effectLst/>
+                <a:latin typeface="SFMono-Regular"/>
+              </a:rPr>
+              <a:t>Lowest: </a:t>
+            </a:r>
+            <a:r>
+              <a:rPr lang="en-US" sz="1200" dirty="0">
+                <a:latin typeface="SFMono-Regular"/>
+              </a:rPr>
+              <a:t>20</a:t>
+            </a:r>
+          </a:p>
+          <a:p>
+            <a:pPr lvl="0"/>
+            <a:endParaRPr lang="en-US" sz="1200" b="0" i="0" dirty="0">
+              <a:effectLst/>
+              <a:latin typeface="SFMono-Regular"/>
+            </a:endParaRPr>
+          </a:p>
+          <a:p>
+            <a:pPr lvl="0"/>
+            <a:r>
+              <a:rPr lang="en-US" sz="1200" dirty="0">
+                <a:latin typeface="SFMono-Regular"/>
+              </a:rPr>
+              <a:t>Your values were:</a:t>
+            </a:r>
+          </a:p>
+          <a:p>
+            <a:pPr lvl="0"/>
+            <a:r>
+              <a:rPr lang="en-US" sz="1200" b="0" i="0" dirty="0">
+                <a:effectLst/>
+                <a:latin typeface="SFMono-Regular"/>
+              </a:rPr>
+              <a:t>100 – A</a:t>
+            </a:r>
+          </a:p>
+          <a:p>
+            <a:pPr lvl="0"/>
+            <a:r>
+              <a:rPr lang="en-US" sz="1200" dirty="0">
+                <a:latin typeface="SFMono-Regular"/>
+              </a:rPr>
+              <a:t>90 – A</a:t>
+            </a:r>
+          </a:p>
+          <a:p>
+            <a:pPr lvl="0"/>
+            <a:r>
+              <a:rPr lang="en-US" sz="1200" b="0" i="0" dirty="0">
+                <a:effectLst/>
+                <a:latin typeface="SFMono-Regular"/>
+              </a:rPr>
+              <a:t>60 – D</a:t>
+            </a:r>
+          </a:p>
+          <a:p>
+            <a:pPr lvl="0"/>
+            <a:r>
+              <a:rPr lang="en-US" sz="1200" dirty="0">
+                <a:latin typeface="SFMono-Regular"/>
+              </a:rPr>
+              <a:t>75 – C</a:t>
+            </a:r>
+          </a:p>
+          <a:p>
+            <a:pPr lvl="0"/>
+            <a:r>
+              <a:rPr lang="en-US" sz="1200" b="0" i="0" dirty="0">
+                <a:effectLst/>
+                <a:latin typeface="SFMono-Regular"/>
+              </a:rPr>
+              <a:t>20 - F</a:t>
+            </a:r>
+          </a:p>
+        </p:txBody>
+      </p:sp>
+    </p:spTree>
+    <p:extLst>
+      <p:ext uri="{BB962C8B-B14F-4D97-AF65-F5344CB8AC3E}">
+        <p14:creationId xmlns:p14="http://schemas.microsoft.com/office/powerpoint/2010/main" val="1201396966"/>
+      </p:ext>
+    </p:extLst>
+  </p:cSld>
+  <p:clrMapOvr>
+    <a:masterClrMapping/>
+  </p:clrMapOvr>
+</p:sld>
+</file>
+
+<file path=ppt/slides/slide47.xml><?xml version="1.0" encoding="utf-8"?>
+<p:sld xmlns:a="http://schemas.openxmlformats.org/drawingml/2006/main" xmlns:r="http://schemas.openxmlformats.org/officeDocument/2006/relationships" xmlns:p="http://schemas.openxmlformats.org/presentationml/2006/main">
+  <p:cSld>
+    <p:spTree>
+      <p:nvGrpSpPr>
+        <p:cNvPr id="1" name="">
+          <a:extLst>
+            <a:ext uri="{FF2B5EF4-FFF2-40B4-BE49-F238E27FC236}">
+              <a16:creationId xmlns:a16="http://schemas.microsoft.com/office/drawing/2014/main" id="{67C46D36-1AE1-C38D-4795-72048643346D}"/>
+            </a:ext>
+          </a:extLst>
+        </p:cNvPr>
+        <p:cNvGrpSpPr/>
+        <p:nvPr/>
+      </p:nvGrpSpPr>
+      <p:grpSpPr>
+        <a:xfrm>
+          <a:off x="0" y="0"/>
+          <a:ext cx="0" cy="0"/>
+          <a:chOff x="0" y="0"/>
+          <a:chExt cx="0" cy="0"/>
+        </a:xfrm>
+      </p:grpSpPr>
+      <p:sp>
+        <p:nvSpPr>
+          <p:cNvPr id="2" name="Title 1">
+            <a:extLst>
+              <a:ext uri="{FF2B5EF4-FFF2-40B4-BE49-F238E27FC236}">
+                <a16:creationId xmlns:a16="http://schemas.microsoft.com/office/drawing/2014/main" id="{EE2C0658-E93F-1A60-7AC9-F3C42E70B2AC}"/>
+              </a:ext>
+            </a:extLst>
+          </p:cNvPr>
+          <p:cNvSpPr>
+            <a:spLocks noGrp="1"/>
+          </p:cNvSpPr>
+          <p:nvPr>
+            <p:ph type="title"/>
+          </p:nvPr>
+        </p:nvSpPr>
+        <p:spPr/>
+        <p:txBody>
+          <a:bodyPr/>
+          <a:lstStyle/>
+          <a:p>
+            <a:r>
+              <a:rPr lang="en-US" dirty="0"/>
+              <a:t>Challenge – REPL</a:t>
+            </a:r>
+          </a:p>
+        </p:txBody>
+      </p:sp>
+      <p:sp>
+        <p:nvSpPr>
+          <p:cNvPr id="6" name="TextBox 5">
+            <a:extLst>
+              <a:ext uri="{FF2B5EF4-FFF2-40B4-BE49-F238E27FC236}">
+                <a16:creationId xmlns:a16="http://schemas.microsoft.com/office/drawing/2014/main" id="{AC3A3E7C-D24C-2E9D-CE75-B66EA83BBCEF}"/>
+              </a:ext>
+            </a:extLst>
+          </p:cNvPr>
+          <p:cNvSpPr txBox="1"/>
+          <p:nvPr/>
+        </p:nvSpPr>
+        <p:spPr>
+          <a:xfrm>
+            <a:off x="1228165" y="2402747"/>
+            <a:ext cx="2106667" cy="369332"/>
+          </a:xfrm>
+          <a:prstGeom prst="rect">
+            <a:avLst/>
+          </a:prstGeom>
+          <a:noFill/>
+        </p:spPr>
+        <p:txBody>
+          <a:bodyPr wrap="none" rtlCol="0">
+            <a:spAutoFit/>
+          </a:bodyPr>
+          <a:lstStyle/>
+          <a:p>
+            <a:r>
+              <a:rPr lang="en-US" b="1" dirty="0"/>
+              <a:t>Expected Output:</a:t>
+            </a:r>
+          </a:p>
+        </p:txBody>
+      </p:sp>
+      <p:sp>
+        <p:nvSpPr>
+          <p:cNvPr id="7" name="TextBox 6">
+            <a:extLst>
+              <a:ext uri="{FF2B5EF4-FFF2-40B4-BE49-F238E27FC236}">
+                <a16:creationId xmlns:a16="http://schemas.microsoft.com/office/drawing/2014/main" id="{69879935-EB56-1E40-CBAE-E9170A916DA2}"/>
+              </a:ext>
+            </a:extLst>
+          </p:cNvPr>
+          <p:cNvSpPr txBox="1"/>
+          <p:nvPr/>
+        </p:nvSpPr>
+        <p:spPr>
+          <a:xfrm>
+            <a:off x="6582427" y="2402747"/>
+            <a:ext cx="5028381" cy="369332"/>
+          </a:xfrm>
+          <a:prstGeom prst="rect">
+            <a:avLst/>
+          </a:prstGeom>
+          <a:noFill/>
+        </p:spPr>
+        <p:txBody>
+          <a:bodyPr wrap="square" rtlCol="0">
+            <a:spAutoFit/>
+          </a:bodyPr>
+          <a:lstStyle/>
+          <a:p>
+            <a:r>
+              <a:rPr lang="en-US" b="1" dirty="0"/>
+              <a:t>Scenario:  			   </a:t>
+            </a:r>
+          </a:p>
+        </p:txBody>
+      </p:sp>
+      <p:sp>
+        <p:nvSpPr>
+          <p:cNvPr id="4" name="TextBox 3">
+            <a:extLst>
+              <a:ext uri="{FF2B5EF4-FFF2-40B4-BE49-F238E27FC236}">
+                <a16:creationId xmlns:a16="http://schemas.microsoft.com/office/drawing/2014/main" id="{716C6398-445B-B2D3-B68E-24712AF93EB6}"/>
+              </a:ext>
+            </a:extLst>
+          </p:cNvPr>
+          <p:cNvSpPr txBox="1"/>
+          <p:nvPr/>
+        </p:nvSpPr>
+        <p:spPr>
+          <a:xfrm>
+            <a:off x="5835563" y="2869502"/>
+            <a:ext cx="6097044" cy="1815882"/>
+          </a:xfrm>
+          <a:prstGeom prst="rect">
+            <a:avLst/>
+          </a:prstGeom>
+          <a:noFill/>
+        </p:spPr>
+        <p:txBody>
+          <a:bodyPr wrap="square">
+            <a:spAutoFit/>
+          </a:bodyPr>
+          <a:lstStyle/>
+          <a:p>
+            <a:pPr marL="0" marR="0" indent="0" algn="l">
+              <a:buNone/>
+            </a:pPr>
+            <a:r>
+              <a:rPr lang="en-US" sz="1400" b="0" i="0" dirty="0">
+                <a:effectLst/>
+                <a:latin typeface="+mn-lt"/>
+              </a:rPr>
+              <a:t>Create a small REPL application where a user can:</a:t>
+            </a:r>
+          </a:p>
+          <a:p>
+            <a:pPr marL="285750" marR="0" indent="-285750" algn="l">
+              <a:buFontTx/>
+              <a:buChar char="-"/>
+            </a:pPr>
+            <a:r>
+              <a:rPr lang="en-US" sz="1400" dirty="0"/>
+              <a:t>Check account balance (start at 0)</a:t>
+            </a:r>
+          </a:p>
+          <a:p>
+            <a:pPr marL="285750" marR="0" indent="-285750" algn="l">
+              <a:buFontTx/>
+              <a:buChar char="-"/>
+            </a:pPr>
+            <a:r>
+              <a:rPr lang="en-US" sz="1400" b="0" i="0" dirty="0">
+                <a:effectLst/>
+                <a:latin typeface="+mn-lt"/>
+              </a:rPr>
+              <a:t>Deposit into their account</a:t>
+            </a:r>
+          </a:p>
+          <a:p>
+            <a:pPr marL="285750" marR="0" indent="-285750" algn="l">
+              <a:buFontTx/>
+              <a:buChar char="-"/>
+            </a:pPr>
+            <a:r>
+              <a:rPr lang="en-US" sz="1400" dirty="0"/>
+              <a:t>Withdraw from their account</a:t>
+            </a:r>
+          </a:p>
+          <a:p>
+            <a:pPr marL="285750" marR="0" indent="-285750" algn="l">
+              <a:buFontTx/>
+              <a:buChar char="-"/>
+            </a:pPr>
+            <a:r>
+              <a:rPr lang="en-US" sz="1400" b="0" i="0" dirty="0">
+                <a:effectLst/>
+                <a:latin typeface="+mn-lt"/>
+              </a:rPr>
+              <a:t>Exit</a:t>
+            </a:r>
+          </a:p>
+          <a:p>
+            <a:pPr marL="285750" marR="0" indent="-285750" algn="l">
+              <a:buFontTx/>
+              <a:buChar char="-"/>
+            </a:pPr>
+            <a:endParaRPr lang="en-US" sz="1400" dirty="0"/>
+          </a:p>
+          <a:p>
+            <a:pPr marR="0" algn="l"/>
+            <a:r>
+              <a:rPr lang="en-US" sz="1400" dirty="0"/>
+              <a:t>You don’t need actual account functionality or to keep anything in persistence, just the basic commands</a:t>
+            </a:r>
+          </a:p>
+        </p:txBody>
+      </p:sp>
+      <p:sp>
+        <p:nvSpPr>
+          <p:cNvPr id="9" name="TextBox 8">
+            <a:extLst>
+              <a:ext uri="{FF2B5EF4-FFF2-40B4-BE49-F238E27FC236}">
+                <a16:creationId xmlns:a16="http://schemas.microsoft.com/office/drawing/2014/main" id="{4672F8F6-4F9F-03C9-1892-86B1937FF298}"/>
+              </a:ext>
+            </a:extLst>
+          </p:cNvPr>
+          <p:cNvSpPr txBox="1"/>
+          <p:nvPr/>
+        </p:nvSpPr>
+        <p:spPr>
+          <a:xfrm>
+            <a:off x="1228165" y="2869502"/>
+            <a:ext cx="3771900" cy="1892826"/>
+          </a:xfrm>
+          <a:prstGeom prst="rect">
+            <a:avLst/>
+          </a:prstGeom>
+          <a:noFill/>
+        </p:spPr>
+        <p:txBody>
+          <a:bodyPr wrap="square">
+            <a:spAutoFit/>
+          </a:bodyPr>
+          <a:lstStyle/>
+          <a:p>
+            <a:pPr marL="342900" lvl="0" indent="-342900">
+              <a:buAutoNum type="arabicPeriod"/>
+            </a:pPr>
+            <a:r>
+              <a:rPr lang="en-US" dirty="0"/>
+              <a:t>Check Balance </a:t>
+            </a:r>
+          </a:p>
+          <a:p>
+            <a:pPr marL="342900" lvl="0" indent="-342900">
+              <a:buAutoNum type="arabicPeriod"/>
+            </a:pPr>
+            <a:r>
+              <a:rPr lang="en-US" dirty="0"/>
+              <a:t>Deposit </a:t>
+            </a:r>
+          </a:p>
+          <a:p>
+            <a:pPr marL="342900" lvl="0" indent="-342900">
+              <a:buAutoNum type="arabicPeriod"/>
+            </a:pPr>
+            <a:r>
+              <a:rPr lang="en-US" dirty="0"/>
+              <a:t>Withdraw </a:t>
+            </a:r>
+          </a:p>
+          <a:p>
+            <a:pPr marL="342900" lvl="0" indent="-342900">
+              <a:buAutoNum type="arabicPeriod"/>
+            </a:pPr>
+            <a:r>
+              <a:rPr lang="en-US" dirty="0"/>
+              <a:t>Exit</a:t>
+            </a:r>
+          </a:p>
+          <a:p>
+            <a:pPr marL="342900" lvl="0" indent="-342900">
+              <a:buAutoNum type="arabicPeriod"/>
+            </a:pPr>
+            <a:endParaRPr lang="en-US" sz="900" b="0" i="0" dirty="0">
+              <a:effectLst/>
+              <a:latin typeface="SFMono-Regular"/>
+            </a:endParaRPr>
+          </a:p>
+          <a:p>
+            <a:pPr lvl="0"/>
+            <a:r>
+              <a:rPr lang="en-US" sz="1200" b="0" i="0" dirty="0">
+                <a:effectLst/>
+                <a:latin typeface="SFMono-Regular"/>
+              </a:rPr>
+              <a:t>The user can then select a command and be given instructions for entering the data. The program doesn’t terminate until they select ‘4’ at the start of the loop</a:t>
+            </a:r>
+          </a:p>
+        </p:txBody>
+      </p:sp>
+    </p:spTree>
+    <p:extLst>
+      <p:ext uri="{BB962C8B-B14F-4D97-AF65-F5344CB8AC3E}">
+        <p14:creationId xmlns:p14="http://schemas.microsoft.com/office/powerpoint/2010/main" val="4045397067"/>
       </p:ext>
     </p:extLst>
   </p:cSld>

--- a/Week_2/Core_Java.pptx
+++ b/Week_2/Core_Java.pptx
@@ -52,6 +52,27 @@
     <p:sldId id="305" r:id="rId46"/>
     <p:sldId id="306" r:id="rId47"/>
     <p:sldId id="307" r:id="rId48"/>
+    <p:sldId id="308" r:id="rId49"/>
+    <p:sldId id="309" r:id="rId50"/>
+    <p:sldId id="310" r:id="rId51"/>
+    <p:sldId id="311" r:id="rId52"/>
+    <p:sldId id="313" r:id="rId53"/>
+    <p:sldId id="314" r:id="rId54"/>
+    <p:sldId id="315" r:id="rId55"/>
+    <p:sldId id="316" r:id="rId56"/>
+    <p:sldId id="317" r:id="rId57"/>
+    <p:sldId id="318" r:id="rId58"/>
+    <p:sldId id="327" r:id="rId59"/>
+    <p:sldId id="319" r:id="rId60"/>
+    <p:sldId id="320" r:id="rId61"/>
+    <p:sldId id="321" r:id="rId62"/>
+    <p:sldId id="322" r:id="rId63"/>
+    <p:sldId id="323" r:id="rId64"/>
+    <p:sldId id="325" r:id="rId65"/>
+    <p:sldId id="326" r:id="rId66"/>
+    <p:sldId id="324" r:id="rId67"/>
+    <p:sldId id="329" r:id="rId68"/>
+    <p:sldId id="328" r:id="rId69"/>
   </p:sldIdLst>
   <p:sldSz cx="12192000" cy="6858000"/>
   <p:notesSz cx="6858000" cy="9144000"/>
@@ -22006,7 +22027,7 @@
         <p:spPr>
           <a:xfrm>
             <a:off x="5835563" y="2869502"/>
-            <a:ext cx="6097044" cy="1815882"/>
+            <a:ext cx="6097044" cy="2462213"/>
           </a:xfrm>
           <a:prstGeom prst="rect">
             <a:avLst/>
@@ -22088,6 +22109,17 @@
             <a:r>
               <a:rPr lang="en-US" sz="1400" dirty="0"/>
               <a:t>You don’t need actual account functionality or to keep anything in persistence, just the basic commands</a:t>
+            </a:r>
+          </a:p>
+          <a:p>
+            <a:pPr marR="0" algn="l"/>
+            <a:endParaRPr lang="en-US" sz="1400" dirty="0"/>
+          </a:p>
+          <a:p>
+            <a:pPr marR="0" algn="l"/>
+            <a:r>
+              <a:rPr lang="en-US" sz="1400" dirty="0"/>
+              <a:t>Do not allow negative account balances. Block withdraws that would put the account balance under $0.</a:t>
             </a:r>
           </a:p>
         </p:txBody>
@@ -22180,6 +22212,316 @@
     <p:extLst>
       <p:ext uri="{BB962C8B-B14F-4D97-AF65-F5344CB8AC3E}">
         <p14:creationId xmlns:p14="http://schemas.microsoft.com/office/powerpoint/2010/main" val="4045397067"/>
+      </p:ext>
+    </p:extLst>
+  </p:cSld>
+  <p:clrMapOvr>
+    <a:masterClrMapping/>
+  </p:clrMapOvr>
+</p:sld>
+</file>
+
+<file path=ppt/slides/slide48.xml><?xml version="1.0" encoding="utf-8"?>
+<p:sld xmlns:a="http://schemas.openxmlformats.org/drawingml/2006/main" xmlns:r="http://schemas.openxmlformats.org/officeDocument/2006/relationships" xmlns:p="http://schemas.openxmlformats.org/presentationml/2006/main">
+  <p:cSld>
+    <p:spTree>
+      <p:nvGrpSpPr>
+        <p:cNvPr id="1" name=""/>
+        <p:cNvGrpSpPr/>
+        <p:nvPr/>
+      </p:nvGrpSpPr>
+      <p:grpSpPr>
+        <a:xfrm>
+          <a:off x="0" y="0"/>
+          <a:ext cx="0" cy="0"/>
+          <a:chOff x="0" y="0"/>
+          <a:chExt cx="0" cy="0"/>
+        </a:xfrm>
+      </p:grpSpPr>
+      <p:sp>
+        <p:nvSpPr>
+          <p:cNvPr id="2" name="Title 1">
+            <a:extLst>
+              <a:ext uri="{FF2B5EF4-FFF2-40B4-BE49-F238E27FC236}">
+                <a16:creationId xmlns:a16="http://schemas.microsoft.com/office/drawing/2014/main" id="{3F64D8DB-BF8E-D7B9-5048-06C58C2874B7}"/>
+              </a:ext>
+            </a:extLst>
+          </p:cNvPr>
+          <p:cNvSpPr>
+            <a:spLocks noGrp="1"/>
+          </p:cNvSpPr>
+          <p:nvPr>
+            <p:ph type="title"/>
+          </p:nvPr>
+        </p:nvSpPr>
+        <p:spPr/>
+        <p:txBody>
+          <a:bodyPr/>
+          <a:lstStyle/>
+          <a:p>
+            <a:r>
+              <a:rPr lang="en-US" dirty="0"/>
+              <a:t>Encapsulation</a:t>
+            </a:r>
+          </a:p>
+        </p:txBody>
+      </p:sp>
+      <p:sp>
+        <p:nvSpPr>
+          <p:cNvPr id="3" name="Content Placeholder 2">
+            <a:extLst>
+              <a:ext uri="{FF2B5EF4-FFF2-40B4-BE49-F238E27FC236}">
+                <a16:creationId xmlns:a16="http://schemas.microsoft.com/office/drawing/2014/main" id="{6DFDA7B0-0A9C-0C7B-03E8-339515F8EB26}"/>
+              </a:ext>
+            </a:extLst>
+          </p:cNvPr>
+          <p:cNvSpPr>
+            <a:spLocks noGrp="1"/>
+          </p:cNvSpPr>
+          <p:nvPr>
+            <p:ph idx="1"/>
+          </p:nvPr>
+        </p:nvSpPr>
+        <p:spPr>
+          <a:xfrm>
+            <a:off x="5793289" y="2477541"/>
+            <a:ext cx="4496023" cy="3678303"/>
+          </a:xfrm>
+        </p:spPr>
+        <p:txBody>
+          <a:bodyPr/>
+          <a:lstStyle/>
+          <a:p>
+            <a:r>
+              <a:rPr lang="en-US" dirty="0"/>
+              <a:t>Constructors – a special method used to initialize a newly created object. It is used when an instance of the class is created using the ‘new’ keyword.</a:t>
+            </a:r>
+          </a:p>
+          <a:p>
+            <a:r>
+              <a:rPr lang="en-US" dirty="0"/>
+              <a:t>Encapsulation – restricts direct access to an object’s fields, and provides controlled access via getters and setters </a:t>
+            </a:r>
+          </a:p>
+          <a:p>
+            <a:r>
+              <a:rPr lang="en-US" dirty="0"/>
+              <a:t>This allows the internal implementation to change without breaking any code that may use the class</a:t>
+            </a:r>
+          </a:p>
+        </p:txBody>
+      </p:sp>
+      <p:pic>
+        <p:nvPicPr>
+          <p:cNvPr id="5" name="Picture 4">
+            <a:extLst>
+              <a:ext uri="{FF2B5EF4-FFF2-40B4-BE49-F238E27FC236}">
+                <a16:creationId xmlns:a16="http://schemas.microsoft.com/office/drawing/2014/main" id="{3E3E1B14-5284-2514-07E2-677FA7A3E4B9}"/>
+              </a:ext>
+            </a:extLst>
+          </p:cNvPr>
+          <p:cNvPicPr>
+            <a:picLocks noChangeAspect="1"/>
+          </p:cNvPicPr>
+          <p:nvPr/>
+        </p:nvPicPr>
+        <p:blipFill>
+          <a:blip r:embed="rId2"/>
+          <a:stretch>
+            <a:fillRect/>
+          </a:stretch>
+        </p:blipFill>
+        <p:spPr>
+          <a:xfrm>
+            <a:off x="1369432" y="1945759"/>
+            <a:ext cx="3821571" cy="4805916"/>
+          </a:xfrm>
+          <a:prstGeom prst="rect">
+            <a:avLst/>
+          </a:prstGeom>
+        </p:spPr>
+      </p:pic>
+    </p:spTree>
+    <p:extLst>
+      <p:ext uri="{BB962C8B-B14F-4D97-AF65-F5344CB8AC3E}">
+        <p14:creationId xmlns:p14="http://schemas.microsoft.com/office/powerpoint/2010/main" val="3449572969"/>
+      </p:ext>
+    </p:extLst>
+  </p:cSld>
+  <p:clrMapOvr>
+    <a:masterClrMapping/>
+  </p:clrMapOvr>
+</p:sld>
+</file>
+
+<file path=ppt/slides/slide49.xml><?xml version="1.0" encoding="utf-8"?>
+<p:sld xmlns:a="http://schemas.openxmlformats.org/drawingml/2006/main" xmlns:r="http://schemas.openxmlformats.org/officeDocument/2006/relationships" xmlns:p="http://schemas.openxmlformats.org/presentationml/2006/main">
+  <p:cSld>
+    <p:spTree>
+      <p:nvGrpSpPr>
+        <p:cNvPr id="1" name=""/>
+        <p:cNvGrpSpPr/>
+        <p:nvPr/>
+      </p:nvGrpSpPr>
+      <p:grpSpPr>
+        <a:xfrm>
+          <a:off x="0" y="0"/>
+          <a:ext cx="0" cy="0"/>
+          <a:chOff x="0" y="0"/>
+          <a:chExt cx="0" cy="0"/>
+        </a:xfrm>
+      </p:grpSpPr>
+      <p:sp>
+        <p:nvSpPr>
+          <p:cNvPr id="2" name="Title 1">
+            <a:extLst>
+              <a:ext uri="{FF2B5EF4-FFF2-40B4-BE49-F238E27FC236}">
+                <a16:creationId xmlns:a16="http://schemas.microsoft.com/office/drawing/2014/main" id="{48D4BB53-0F12-5E4F-7DE6-6A430F716108}"/>
+              </a:ext>
+            </a:extLst>
+          </p:cNvPr>
+          <p:cNvSpPr>
+            <a:spLocks noGrp="1"/>
+          </p:cNvSpPr>
+          <p:nvPr>
+            <p:ph type="title"/>
+          </p:nvPr>
+        </p:nvSpPr>
+        <p:spPr/>
+        <p:txBody>
+          <a:bodyPr/>
+          <a:lstStyle/>
+          <a:p>
+            <a:r>
+              <a:rPr lang="en-US" dirty="0"/>
+              <a:t>Inheritance</a:t>
+            </a:r>
+          </a:p>
+        </p:txBody>
+      </p:sp>
+      <p:sp>
+        <p:nvSpPr>
+          <p:cNvPr id="3" name="Content Placeholder 2">
+            <a:extLst>
+              <a:ext uri="{FF2B5EF4-FFF2-40B4-BE49-F238E27FC236}">
+                <a16:creationId xmlns:a16="http://schemas.microsoft.com/office/drawing/2014/main" id="{5C557551-59CE-F8FD-E069-C9FEF339D73D}"/>
+              </a:ext>
+            </a:extLst>
+          </p:cNvPr>
+          <p:cNvSpPr>
+            <a:spLocks noGrp="1"/>
+          </p:cNvSpPr>
+          <p:nvPr>
+            <p:ph idx="1"/>
+          </p:nvPr>
+        </p:nvSpPr>
+        <p:spPr>
+          <a:xfrm>
+            <a:off x="5713172" y="2062886"/>
+            <a:ext cx="5897636" cy="2918765"/>
+          </a:xfrm>
+        </p:spPr>
+        <p:txBody>
+          <a:bodyPr>
+            <a:normAutofit fontScale="92500" lnSpcReduction="20000"/>
+          </a:bodyPr>
+          <a:lstStyle/>
+          <a:p>
+            <a:r>
+              <a:rPr lang="en-US" dirty="0"/>
+              <a:t>Inheritance – allows one class to acquire the fields and methods from another</a:t>
+            </a:r>
+          </a:p>
+          <a:p>
+            <a:r>
+              <a:rPr lang="en-US" dirty="0"/>
+              <a:t>Superclass (parent/base class) – The class whose features are inherited</a:t>
+            </a:r>
+          </a:p>
+          <a:p>
+            <a:r>
+              <a:rPr lang="en-US" dirty="0"/>
+              <a:t>Subclass (child/derived class) – The class that inherits from the superclass</a:t>
+            </a:r>
+          </a:p>
+          <a:p>
+            <a:r>
+              <a:rPr lang="en-US" dirty="0"/>
+              <a:t>Method Overriding – change the behavior of a method inherited from a parent class </a:t>
+            </a:r>
+          </a:p>
+          <a:p>
+            <a:r>
+              <a:rPr lang="en-US" dirty="0"/>
+              <a:t>Java supports: Single, Multilevel, and Hierarchical inheritance but NOT multiple class inheritance. i.e. extending more than one class directly </a:t>
+            </a:r>
+          </a:p>
+        </p:txBody>
+      </p:sp>
+      <p:pic>
+        <p:nvPicPr>
+          <p:cNvPr id="5" name="Picture 4">
+            <a:extLst>
+              <a:ext uri="{FF2B5EF4-FFF2-40B4-BE49-F238E27FC236}">
+                <a16:creationId xmlns:a16="http://schemas.microsoft.com/office/drawing/2014/main" id="{612C6F51-724C-23A5-9271-3F99F85BDF06}"/>
+              </a:ext>
+            </a:extLst>
+          </p:cNvPr>
+          <p:cNvPicPr>
+            <a:picLocks noChangeAspect="1"/>
+          </p:cNvPicPr>
+          <p:nvPr/>
+        </p:nvPicPr>
+        <p:blipFill>
+          <a:blip r:embed="rId2"/>
+          <a:stretch>
+            <a:fillRect/>
+          </a:stretch>
+        </p:blipFill>
+        <p:spPr>
+          <a:xfrm>
+            <a:off x="879944" y="1967193"/>
+            <a:ext cx="4296580" cy="4795114"/>
+          </a:xfrm>
+          <a:prstGeom prst="rect">
+            <a:avLst/>
+          </a:prstGeom>
+        </p:spPr>
+      </p:pic>
+      <p:pic>
+        <p:nvPicPr>
+          <p:cNvPr id="7" name="Picture 6">
+            <a:extLst>
+              <a:ext uri="{FF2B5EF4-FFF2-40B4-BE49-F238E27FC236}">
+                <a16:creationId xmlns:a16="http://schemas.microsoft.com/office/drawing/2014/main" id="{176CBB6D-1F31-3FA3-9E97-A28EA2E0DCF3}"/>
+              </a:ext>
+            </a:extLst>
+          </p:cNvPr>
+          <p:cNvPicPr>
+            <a:picLocks noChangeAspect="1"/>
+          </p:cNvPicPr>
+          <p:nvPr/>
+        </p:nvPicPr>
+        <p:blipFill>
+          <a:blip r:embed="rId3"/>
+          <a:stretch>
+            <a:fillRect/>
+          </a:stretch>
+        </p:blipFill>
+        <p:spPr>
+          <a:xfrm>
+            <a:off x="5640889" y="5106219"/>
+            <a:ext cx="6049219" cy="1505160"/>
+          </a:xfrm>
+          <a:prstGeom prst="rect">
+            <a:avLst/>
+          </a:prstGeom>
+        </p:spPr>
+      </p:pic>
+    </p:spTree>
+    <p:extLst>
+      <p:ext uri="{BB962C8B-B14F-4D97-AF65-F5344CB8AC3E}">
+        <p14:creationId xmlns:p14="http://schemas.microsoft.com/office/powerpoint/2010/main" val="2458831769"/>
       </p:ext>
     </p:extLst>
   </p:cSld>
@@ -22308,6 +22650,1546 @@
 </p:sld>
 </file>
 
+<file path=ppt/slides/slide50.xml><?xml version="1.0" encoding="utf-8"?>
+<p:sld xmlns:a="http://schemas.openxmlformats.org/drawingml/2006/main" xmlns:r="http://schemas.openxmlformats.org/officeDocument/2006/relationships" xmlns:p="http://schemas.openxmlformats.org/presentationml/2006/main">
+  <p:cSld>
+    <p:spTree>
+      <p:nvGrpSpPr>
+        <p:cNvPr id="1" name=""/>
+        <p:cNvGrpSpPr/>
+        <p:nvPr/>
+      </p:nvGrpSpPr>
+      <p:grpSpPr>
+        <a:xfrm>
+          <a:off x="0" y="0"/>
+          <a:ext cx="0" cy="0"/>
+          <a:chOff x="0" y="0"/>
+          <a:chExt cx="0" cy="0"/>
+        </a:xfrm>
+      </p:grpSpPr>
+      <p:sp>
+        <p:nvSpPr>
+          <p:cNvPr id="2" name="Title 1">
+            <a:extLst>
+              <a:ext uri="{FF2B5EF4-FFF2-40B4-BE49-F238E27FC236}">
+                <a16:creationId xmlns:a16="http://schemas.microsoft.com/office/drawing/2014/main" id="{4450859A-F856-ABA7-ADC6-CB7A3A352918}"/>
+              </a:ext>
+            </a:extLst>
+          </p:cNvPr>
+          <p:cNvSpPr>
+            <a:spLocks noGrp="1"/>
+          </p:cNvSpPr>
+          <p:nvPr>
+            <p:ph type="title"/>
+          </p:nvPr>
+        </p:nvSpPr>
+        <p:spPr/>
+        <p:txBody>
+          <a:bodyPr/>
+          <a:lstStyle/>
+          <a:p>
+            <a:r>
+              <a:rPr lang="en-US" dirty="0"/>
+              <a:t>Abstraction</a:t>
+            </a:r>
+          </a:p>
+        </p:txBody>
+      </p:sp>
+      <p:sp>
+        <p:nvSpPr>
+          <p:cNvPr id="3" name="Content Placeholder 2">
+            <a:extLst>
+              <a:ext uri="{FF2B5EF4-FFF2-40B4-BE49-F238E27FC236}">
+                <a16:creationId xmlns:a16="http://schemas.microsoft.com/office/drawing/2014/main" id="{6C314FC1-F878-7B08-A2F4-9EF374F69895}"/>
+              </a:ext>
+            </a:extLst>
+          </p:cNvPr>
+          <p:cNvSpPr>
+            <a:spLocks noGrp="1"/>
+          </p:cNvSpPr>
+          <p:nvPr>
+            <p:ph idx="1"/>
+          </p:nvPr>
+        </p:nvSpPr>
+        <p:spPr>
+          <a:xfrm>
+            <a:off x="5742432" y="2477541"/>
+            <a:ext cx="5195377" cy="3678303"/>
+          </a:xfrm>
+        </p:spPr>
+        <p:txBody>
+          <a:bodyPr>
+            <a:normAutofit fontScale="92500"/>
+          </a:bodyPr>
+          <a:lstStyle/>
+          <a:p>
+            <a:r>
+              <a:rPr lang="en-US" dirty="0"/>
+              <a:t>Abstraction – hides complex implementation details and exposes only the essential features of an object</a:t>
+            </a:r>
+          </a:p>
+          <a:p>
+            <a:r>
+              <a:rPr lang="en-US" dirty="0"/>
+              <a:t>Abstraction in Java is achieved through Abstract classes and Interfaces</a:t>
+            </a:r>
+          </a:p>
+          <a:p>
+            <a:r>
+              <a:rPr lang="en-US" dirty="0"/>
+              <a:t>Abstract Classes – are defined with the abstract keyword and cannot be instantiated directly, they must be extended by a subclass. They can contain a mix of abstract and concrete methods. </a:t>
+            </a:r>
+          </a:p>
+          <a:p>
+            <a:r>
+              <a:rPr lang="en-US" dirty="0"/>
+              <a:t>Interfaces – are defined with the interface keyword and can be used with the implements keyword. Java allows a class to implement more than one interface. </a:t>
+            </a:r>
+          </a:p>
+        </p:txBody>
+      </p:sp>
+      <p:pic>
+        <p:nvPicPr>
+          <p:cNvPr id="7" name="Picture 6">
+            <a:extLst>
+              <a:ext uri="{FF2B5EF4-FFF2-40B4-BE49-F238E27FC236}">
+                <a16:creationId xmlns:a16="http://schemas.microsoft.com/office/drawing/2014/main" id="{CCD63B5F-0FBB-3A21-630E-EA59EEBA1E94}"/>
+              </a:ext>
+            </a:extLst>
+          </p:cNvPr>
+          <p:cNvPicPr>
+            <a:picLocks noChangeAspect="1"/>
+          </p:cNvPicPr>
+          <p:nvPr/>
+        </p:nvPicPr>
+        <p:blipFill>
+          <a:blip r:embed="rId2"/>
+          <a:stretch>
+            <a:fillRect/>
+          </a:stretch>
+        </p:blipFill>
+        <p:spPr>
+          <a:xfrm>
+            <a:off x="1105335" y="1893366"/>
+            <a:ext cx="4203014" cy="4964634"/>
+          </a:xfrm>
+          <a:prstGeom prst="rect">
+            <a:avLst/>
+          </a:prstGeom>
+        </p:spPr>
+      </p:pic>
+    </p:spTree>
+    <p:extLst>
+      <p:ext uri="{BB962C8B-B14F-4D97-AF65-F5344CB8AC3E}">
+        <p14:creationId xmlns:p14="http://schemas.microsoft.com/office/powerpoint/2010/main" val="942260371"/>
+      </p:ext>
+    </p:extLst>
+  </p:cSld>
+  <p:clrMapOvr>
+    <a:masterClrMapping/>
+  </p:clrMapOvr>
+</p:sld>
+</file>
+
+<file path=ppt/slides/slide51.xml><?xml version="1.0" encoding="utf-8"?>
+<p:sld xmlns:a="http://schemas.openxmlformats.org/drawingml/2006/main" xmlns:r="http://schemas.openxmlformats.org/officeDocument/2006/relationships" xmlns:p="http://schemas.openxmlformats.org/presentationml/2006/main">
+  <p:cSld>
+    <p:spTree>
+      <p:nvGrpSpPr>
+        <p:cNvPr id="1" name=""/>
+        <p:cNvGrpSpPr/>
+        <p:nvPr/>
+      </p:nvGrpSpPr>
+      <p:grpSpPr>
+        <a:xfrm>
+          <a:off x="0" y="0"/>
+          <a:ext cx="0" cy="0"/>
+          <a:chOff x="0" y="0"/>
+          <a:chExt cx="0" cy="0"/>
+        </a:xfrm>
+      </p:grpSpPr>
+      <p:sp>
+        <p:nvSpPr>
+          <p:cNvPr id="2" name="Title 1">
+            <a:extLst>
+              <a:ext uri="{FF2B5EF4-FFF2-40B4-BE49-F238E27FC236}">
+                <a16:creationId xmlns:a16="http://schemas.microsoft.com/office/drawing/2014/main" id="{B814828F-6CA2-C637-2372-1C32C2A9C071}"/>
+              </a:ext>
+            </a:extLst>
+          </p:cNvPr>
+          <p:cNvSpPr>
+            <a:spLocks noGrp="1"/>
+          </p:cNvSpPr>
+          <p:nvPr>
+            <p:ph type="title"/>
+          </p:nvPr>
+        </p:nvSpPr>
+        <p:spPr/>
+        <p:txBody>
+          <a:bodyPr/>
+          <a:lstStyle/>
+          <a:p>
+            <a:r>
+              <a:rPr lang="en-US" dirty="0"/>
+              <a:t>Polymorphism</a:t>
+            </a:r>
+          </a:p>
+        </p:txBody>
+      </p:sp>
+      <p:sp>
+        <p:nvSpPr>
+          <p:cNvPr id="3" name="Content Placeholder 2">
+            <a:extLst>
+              <a:ext uri="{FF2B5EF4-FFF2-40B4-BE49-F238E27FC236}">
+                <a16:creationId xmlns:a16="http://schemas.microsoft.com/office/drawing/2014/main" id="{A330BD4F-573F-76A6-CAF2-6157E1FC8C16}"/>
+              </a:ext>
+            </a:extLst>
+          </p:cNvPr>
+          <p:cNvSpPr>
+            <a:spLocks noGrp="1"/>
+          </p:cNvSpPr>
+          <p:nvPr>
+            <p:ph idx="1"/>
+          </p:nvPr>
+        </p:nvSpPr>
+        <p:spPr>
+          <a:xfrm>
+            <a:off x="6195976" y="2240845"/>
+            <a:ext cx="5414832" cy="4198358"/>
+          </a:xfrm>
+        </p:spPr>
+        <p:txBody>
+          <a:bodyPr/>
+          <a:lstStyle/>
+          <a:p>
+            <a:r>
+              <a:rPr lang="en-US" dirty="0"/>
+              <a:t>Polymorphism – many forms; allows us to write code that can behave differently based on context provided </a:t>
+            </a:r>
+          </a:p>
+          <a:p>
+            <a:r>
+              <a:rPr lang="en-US" dirty="0"/>
+              <a:t>Achieved through Method Overriding and Method Overloading </a:t>
+            </a:r>
+          </a:p>
+          <a:p>
+            <a:r>
+              <a:rPr lang="en-US" dirty="0"/>
+              <a:t>Method Overriding – we’ve seen this in our last example with Abstraction; they go hand-in-hand</a:t>
+            </a:r>
+          </a:p>
+          <a:p>
+            <a:r>
+              <a:rPr lang="en-US" dirty="0"/>
+              <a:t>Method Overloading – calling methods that share the exact same name but differ in their parameter list</a:t>
+            </a:r>
+          </a:p>
+        </p:txBody>
+      </p:sp>
+      <p:pic>
+        <p:nvPicPr>
+          <p:cNvPr id="5" name="Picture 4">
+            <a:extLst>
+              <a:ext uri="{FF2B5EF4-FFF2-40B4-BE49-F238E27FC236}">
+                <a16:creationId xmlns:a16="http://schemas.microsoft.com/office/drawing/2014/main" id="{062E3043-98B3-1196-8811-37C61F67C2E5}"/>
+              </a:ext>
+            </a:extLst>
+          </p:cNvPr>
+          <p:cNvPicPr>
+            <a:picLocks noChangeAspect="1"/>
+          </p:cNvPicPr>
+          <p:nvPr/>
+        </p:nvPicPr>
+        <p:blipFill>
+          <a:blip r:embed="rId2"/>
+          <a:stretch>
+            <a:fillRect/>
+          </a:stretch>
+        </p:blipFill>
+        <p:spPr>
+          <a:xfrm>
+            <a:off x="835690" y="1940230"/>
+            <a:ext cx="5160335" cy="4772167"/>
+          </a:xfrm>
+          <a:prstGeom prst="rect">
+            <a:avLst/>
+          </a:prstGeom>
+        </p:spPr>
+      </p:pic>
+    </p:spTree>
+    <p:extLst>
+      <p:ext uri="{BB962C8B-B14F-4D97-AF65-F5344CB8AC3E}">
+        <p14:creationId xmlns:p14="http://schemas.microsoft.com/office/powerpoint/2010/main" val="3875273469"/>
+      </p:ext>
+    </p:extLst>
+  </p:cSld>
+  <p:clrMapOvr>
+    <a:masterClrMapping/>
+  </p:clrMapOvr>
+</p:sld>
+</file>
+
+<file path=ppt/slides/slide52.xml><?xml version="1.0" encoding="utf-8"?>
+<p:sld xmlns:a="http://schemas.openxmlformats.org/drawingml/2006/main" xmlns:r="http://schemas.openxmlformats.org/officeDocument/2006/relationships" xmlns:p="http://schemas.openxmlformats.org/presentationml/2006/main">
+  <p:cSld>
+    <p:spTree>
+      <p:nvGrpSpPr>
+        <p:cNvPr id="1" name="">
+          <a:extLst>
+            <a:ext uri="{FF2B5EF4-FFF2-40B4-BE49-F238E27FC236}">
+              <a16:creationId xmlns:a16="http://schemas.microsoft.com/office/drawing/2014/main" id="{1D1A1075-D9D7-EA5C-898E-53EA90EF1BE2}"/>
+            </a:ext>
+          </a:extLst>
+        </p:cNvPr>
+        <p:cNvGrpSpPr/>
+        <p:nvPr/>
+      </p:nvGrpSpPr>
+      <p:grpSpPr>
+        <a:xfrm>
+          <a:off x="0" y="0"/>
+          <a:ext cx="0" cy="0"/>
+          <a:chOff x="0" y="0"/>
+          <a:chExt cx="0" cy="0"/>
+        </a:xfrm>
+      </p:grpSpPr>
+      <p:sp>
+        <p:nvSpPr>
+          <p:cNvPr id="2" name="Title 1">
+            <a:extLst>
+              <a:ext uri="{FF2B5EF4-FFF2-40B4-BE49-F238E27FC236}">
+                <a16:creationId xmlns:a16="http://schemas.microsoft.com/office/drawing/2014/main" id="{A4550066-8F88-774C-9C1E-66C0525A3C3C}"/>
+              </a:ext>
+            </a:extLst>
+          </p:cNvPr>
+          <p:cNvSpPr>
+            <a:spLocks noGrp="1"/>
+          </p:cNvSpPr>
+          <p:nvPr>
+            <p:ph type="title"/>
+          </p:nvPr>
+        </p:nvSpPr>
+        <p:spPr/>
+        <p:txBody>
+          <a:bodyPr/>
+          <a:lstStyle/>
+          <a:p>
+            <a:r>
+              <a:rPr lang="en-US" dirty="0"/>
+              <a:t>Challenge – OOP</a:t>
+            </a:r>
+          </a:p>
+        </p:txBody>
+      </p:sp>
+      <p:sp>
+        <p:nvSpPr>
+          <p:cNvPr id="7" name="TextBox 6">
+            <a:extLst>
+              <a:ext uri="{FF2B5EF4-FFF2-40B4-BE49-F238E27FC236}">
+                <a16:creationId xmlns:a16="http://schemas.microsoft.com/office/drawing/2014/main" id="{6F0EC636-7E41-4698-1F56-7BE512B2571A}"/>
+              </a:ext>
+            </a:extLst>
+          </p:cNvPr>
+          <p:cNvSpPr txBox="1"/>
+          <p:nvPr/>
+        </p:nvSpPr>
+        <p:spPr>
+          <a:xfrm>
+            <a:off x="581192" y="2327591"/>
+            <a:ext cx="5028381" cy="369332"/>
+          </a:xfrm>
+          <a:prstGeom prst="rect">
+            <a:avLst/>
+          </a:prstGeom>
+          <a:noFill/>
+        </p:spPr>
+        <p:txBody>
+          <a:bodyPr wrap="square" rtlCol="0">
+            <a:spAutoFit/>
+          </a:bodyPr>
+          <a:lstStyle/>
+          <a:p>
+            <a:r>
+              <a:rPr lang="en-US" b="1" dirty="0"/>
+              <a:t>Task:  			   </a:t>
+            </a:r>
+          </a:p>
+        </p:txBody>
+      </p:sp>
+      <p:sp>
+        <p:nvSpPr>
+          <p:cNvPr id="4" name="TextBox 3">
+            <a:extLst>
+              <a:ext uri="{FF2B5EF4-FFF2-40B4-BE49-F238E27FC236}">
+                <a16:creationId xmlns:a16="http://schemas.microsoft.com/office/drawing/2014/main" id="{D8D0589B-5377-11A0-8701-7987303F5528}"/>
+              </a:ext>
+            </a:extLst>
+          </p:cNvPr>
+          <p:cNvSpPr txBox="1"/>
+          <p:nvPr/>
+        </p:nvSpPr>
+        <p:spPr>
+          <a:xfrm>
+            <a:off x="581192" y="2813135"/>
+            <a:ext cx="6097044" cy="338554"/>
+          </a:xfrm>
+          <a:prstGeom prst="rect">
+            <a:avLst/>
+          </a:prstGeom>
+          <a:noFill/>
+        </p:spPr>
+        <p:txBody>
+          <a:bodyPr wrap="square">
+            <a:spAutoFit/>
+          </a:bodyPr>
+          <a:lstStyle/>
+          <a:p>
+            <a:r>
+              <a:rPr lang="en-US" sz="1600" dirty="0"/>
+              <a:t>Complete Java </a:t>
+            </a:r>
+            <a:r>
+              <a:rPr lang="en-US" sz="1600" dirty="0" err="1"/>
+              <a:t>Hackerank</a:t>
+            </a:r>
+            <a:r>
+              <a:rPr lang="en-US" sz="1600" dirty="0"/>
+              <a:t> OOP coding challenges </a:t>
+            </a:r>
+          </a:p>
+        </p:txBody>
+      </p:sp>
+    </p:spTree>
+    <p:extLst>
+      <p:ext uri="{BB962C8B-B14F-4D97-AF65-F5344CB8AC3E}">
+        <p14:creationId xmlns:p14="http://schemas.microsoft.com/office/powerpoint/2010/main" val="7093057"/>
+      </p:ext>
+    </p:extLst>
+  </p:cSld>
+  <p:clrMapOvr>
+    <a:masterClrMapping/>
+  </p:clrMapOvr>
+</p:sld>
+</file>
+
+<file path=ppt/slides/slide53.xml><?xml version="1.0" encoding="utf-8"?>
+<p:sld xmlns:a="http://schemas.openxmlformats.org/drawingml/2006/main" xmlns:r="http://schemas.openxmlformats.org/officeDocument/2006/relationships" xmlns:p="http://schemas.openxmlformats.org/presentationml/2006/main">
+  <p:cSld>
+    <p:spTree>
+      <p:nvGrpSpPr>
+        <p:cNvPr id="1" name=""/>
+        <p:cNvGrpSpPr/>
+        <p:nvPr/>
+      </p:nvGrpSpPr>
+      <p:grpSpPr>
+        <a:xfrm>
+          <a:off x="0" y="0"/>
+          <a:ext cx="0" cy="0"/>
+          <a:chOff x="0" y="0"/>
+          <a:chExt cx="0" cy="0"/>
+        </a:xfrm>
+      </p:grpSpPr>
+      <p:sp>
+        <p:nvSpPr>
+          <p:cNvPr id="2" name="Title 1">
+            <a:extLst>
+              <a:ext uri="{FF2B5EF4-FFF2-40B4-BE49-F238E27FC236}">
+                <a16:creationId xmlns:a16="http://schemas.microsoft.com/office/drawing/2014/main" id="{EDAF5EFA-548F-3E42-EC50-860D37118C96}"/>
+              </a:ext>
+            </a:extLst>
+          </p:cNvPr>
+          <p:cNvSpPr>
+            <a:spLocks noGrp="1"/>
+          </p:cNvSpPr>
+          <p:nvPr>
+            <p:ph type="title"/>
+          </p:nvPr>
+        </p:nvSpPr>
+        <p:spPr/>
+        <p:txBody>
+          <a:bodyPr/>
+          <a:lstStyle/>
+          <a:p>
+            <a:r>
+              <a:rPr lang="en-US" dirty="0"/>
+              <a:t>Exceptions</a:t>
+            </a:r>
+          </a:p>
+        </p:txBody>
+      </p:sp>
+      <p:sp>
+        <p:nvSpPr>
+          <p:cNvPr id="3" name="Content Placeholder 2">
+            <a:extLst>
+              <a:ext uri="{FF2B5EF4-FFF2-40B4-BE49-F238E27FC236}">
+                <a16:creationId xmlns:a16="http://schemas.microsoft.com/office/drawing/2014/main" id="{37F2AE9B-B5DB-1951-8727-7319AF7119EF}"/>
+              </a:ext>
+            </a:extLst>
+          </p:cNvPr>
+          <p:cNvSpPr>
+            <a:spLocks noGrp="1"/>
+          </p:cNvSpPr>
+          <p:nvPr>
+            <p:ph idx="1"/>
+          </p:nvPr>
+        </p:nvSpPr>
+        <p:spPr/>
+        <p:txBody>
+          <a:bodyPr/>
+          <a:lstStyle/>
+          <a:p>
+            <a:r>
+              <a:rPr lang="en-US" dirty="0"/>
+              <a:t>An exception is an event that occurs that disrupts the normal flow of program execution</a:t>
+            </a:r>
+          </a:p>
+          <a:p>
+            <a:r>
+              <a:rPr lang="en-US" dirty="0"/>
+              <a:t>You may see:</a:t>
+            </a:r>
+          </a:p>
+          <a:p>
+            <a:pPr lvl="1"/>
+            <a:r>
+              <a:rPr lang="en-US" dirty="0"/>
+              <a:t>Compile Time errors: errors that prevent the compiler from building the program</a:t>
+            </a:r>
+          </a:p>
+          <a:p>
+            <a:pPr lvl="1"/>
+            <a:r>
+              <a:rPr lang="en-US" dirty="0"/>
+              <a:t>Runtime errors: errors that halt a program as it runs </a:t>
+            </a:r>
+          </a:p>
+          <a:p>
+            <a:pPr lvl="1"/>
+            <a:r>
+              <a:rPr lang="en-US" dirty="0"/>
+              <a:t>Logical errors: errors that may not stop the program or produce anything to the error output, but can still negatively impact the application</a:t>
+            </a:r>
+          </a:p>
+        </p:txBody>
+      </p:sp>
+    </p:spTree>
+    <p:extLst>
+      <p:ext uri="{BB962C8B-B14F-4D97-AF65-F5344CB8AC3E}">
+        <p14:creationId xmlns:p14="http://schemas.microsoft.com/office/powerpoint/2010/main" val="776660682"/>
+      </p:ext>
+    </p:extLst>
+  </p:cSld>
+  <p:clrMapOvr>
+    <a:masterClrMapping/>
+  </p:clrMapOvr>
+</p:sld>
+</file>
+
+<file path=ppt/slides/slide54.xml><?xml version="1.0" encoding="utf-8"?>
+<p:sld xmlns:a="http://schemas.openxmlformats.org/drawingml/2006/main" xmlns:r="http://schemas.openxmlformats.org/officeDocument/2006/relationships" xmlns:p="http://schemas.openxmlformats.org/presentationml/2006/main">
+  <p:cSld>
+    <p:spTree>
+      <p:nvGrpSpPr>
+        <p:cNvPr id="1" name=""/>
+        <p:cNvGrpSpPr/>
+        <p:nvPr/>
+      </p:nvGrpSpPr>
+      <p:grpSpPr>
+        <a:xfrm>
+          <a:off x="0" y="0"/>
+          <a:ext cx="0" cy="0"/>
+          <a:chOff x="0" y="0"/>
+          <a:chExt cx="0" cy="0"/>
+        </a:xfrm>
+      </p:grpSpPr>
+      <p:sp>
+        <p:nvSpPr>
+          <p:cNvPr id="2" name="Title 1">
+            <a:extLst>
+              <a:ext uri="{FF2B5EF4-FFF2-40B4-BE49-F238E27FC236}">
+                <a16:creationId xmlns:a16="http://schemas.microsoft.com/office/drawing/2014/main" id="{A7E77FED-4E88-378A-07A9-53CD7189BD1E}"/>
+              </a:ext>
+            </a:extLst>
+          </p:cNvPr>
+          <p:cNvSpPr>
+            <a:spLocks noGrp="1"/>
+          </p:cNvSpPr>
+          <p:nvPr>
+            <p:ph type="title"/>
+          </p:nvPr>
+        </p:nvSpPr>
+        <p:spPr/>
+        <p:txBody>
+          <a:bodyPr/>
+          <a:lstStyle/>
+          <a:p>
+            <a:r>
+              <a:rPr lang="en-US" dirty="0"/>
+              <a:t>Exception Hierarchy</a:t>
+            </a:r>
+          </a:p>
+        </p:txBody>
+      </p:sp>
+      <p:sp>
+        <p:nvSpPr>
+          <p:cNvPr id="3" name="Content Placeholder 2">
+            <a:extLst>
+              <a:ext uri="{FF2B5EF4-FFF2-40B4-BE49-F238E27FC236}">
+                <a16:creationId xmlns:a16="http://schemas.microsoft.com/office/drawing/2014/main" id="{DDAE2ED1-C53D-1898-9A92-0E4027A500D8}"/>
+              </a:ext>
+            </a:extLst>
+          </p:cNvPr>
+          <p:cNvSpPr>
+            <a:spLocks noGrp="1"/>
+          </p:cNvSpPr>
+          <p:nvPr>
+            <p:ph idx="1"/>
+          </p:nvPr>
+        </p:nvSpPr>
+        <p:spPr>
+          <a:xfrm>
+            <a:off x="581193" y="1948226"/>
+            <a:ext cx="11029615" cy="1013801"/>
+          </a:xfrm>
+        </p:spPr>
+        <p:txBody>
+          <a:bodyPr/>
+          <a:lstStyle/>
+          <a:p>
+            <a:r>
+              <a:rPr lang="en-US" dirty="0"/>
+              <a:t>Checked – The code will not compile unless handled or declared. How to solve? Handle with try-catch.</a:t>
+            </a:r>
+          </a:p>
+          <a:p>
+            <a:r>
+              <a:rPr lang="en-US" dirty="0"/>
+              <a:t>Unchecked – The compiler does not intervene. How to solve? Fix the underlying program logic.</a:t>
+            </a:r>
+          </a:p>
+        </p:txBody>
+      </p:sp>
+      <p:pic>
+        <p:nvPicPr>
+          <p:cNvPr id="5" name="Picture 4">
+            <a:extLst>
+              <a:ext uri="{FF2B5EF4-FFF2-40B4-BE49-F238E27FC236}">
+                <a16:creationId xmlns:a16="http://schemas.microsoft.com/office/drawing/2014/main" id="{CB1CA97F-41C2-D01C-CBB3-AAFC4CC08101}"/>
+              </a:ext>
+            </a:extLst>
+          </p:cNvPr>
+          <p:cNvPicPr>
+            <a:picLocks noChangeAspect="1"/>
+          </p:cNvPicPr>
+          <p:nvPr/>
+        </p:nvPicPr>
+        <p:blipFill>
+          <a:blip r:embed="rId2"/>
+          <a:stretch>
+            <a:fillRect/>
+          </a:stretch>
+        </p:blipFill>
+        <p:spPr>
+          <a:xfrm>
+            <a:off x="1440710" y="3194297"/>
+            <a:ext cx="9310577" cy="3213946"/>
+          </a:xfrm>
+          <a:prstGeom prst="rect">
+            <a:avLst/>
+          </a:prstGeom>
+        </p:spPr>
+      </p:pic>
+    </p:spTree>
+    <p:extLst>
+      <p:ext uri="{BB962C8B-B14F-4D97-AF65-F5344CB8AC3E}">
+        <p14:creationId xmlns:p14="http://schemas.microsoft.com/office/powerpoint/2010/main" val="3833384166"/>
+      </p:ext>
+    </p:extLst>
+  </p:cSld>
+  <p:clrMapOvr>
+    <a:masterClrMapping/>
+  </p:clrMapOvr>
+</p:sld>
+</file>
+
+<file path=ppt/slides/slide55.xml><?xml version="1.0" encoding="utf-8"?>
+<p:sld xmlns:a="http://schemas.openxmlformats.org/drawingml/2006/main" xmlns:r="http://schemas.openxmlformats.org/officeDocument/2006/relationships" xmlns:p="http://schemas.openxmlformats.org/presentationml/2006/main">
+  <p:cSld>
+    <p:spTree>
+      <p:nvGrpSpPr>
+        <p:cNvPr id="1" name=""/>
+        <p:cNvGrpSpPr/>
+        <p:nvPr/>
+      </p:nvGrpSpPr>
+      <p:grpSpPr>
+        <a:xfrm>
+          <a:off x="0" y="0"/>
+          <a:ext cx="0" cy="0"/>
+          <a:chOff x="0" y="0"/>
+          <a:chExt cx="0" cy="0"/>
+        </a:xfrm>
+      </p:grpSpPr>
+      <p:sp>
+        <p:nvSpPr>
+          <p:cNvPr id="2" name="Title 1">
+            <a:extLst>
+              <a:ext uri="{FF2B5EF4-FFF2-40B4-BE49-F238E27FC236}">
+                <a16:creationId xmlns:a16="http://schemas.microsoft.com/office/drawing/2014/main" id="{7FEBF5CF-E492-7A57-885F-A5D0B83FC891}"/>
+              </a:ext>
+            </a:extLst>
+          </p:cNvPr>
+          <p:cNvSpPr>
+            <a:spLocks noGrp="1"/>
+          </p:cNvSpPr>
+          <p:nvPr>
+            <p:ph type="title"/>
+          </p:nvPr>
+        </p:nvSpPr>
+        <p:spPr/>
+        <p:txBody>
+          <a:bodyPr/>
+          <a:lstStyle/>
+          <a:p>
+            <a:r>
+              <a:rPr lang="en-US" dirty="0"/>
+              <a:t>Exceptions</a:t>
+            </a:r>
+          </a:p>
+        </p:txBody>
+      </p:sp>
+      <p:sp>
+        <p:nvSpPr>
+          <p:cNvPr id="3" name="Content Placeholder 2">
+            <a:extLst>
+              <a:ext uri="{FF2B5EF4-FFF2-40B4-BE49-F238E27FC236}">
+                <a16:creationId xmlns:a16="http://schemas.microsoft.com/office/drawing/2014/main" id="{797CFEA6-571D-B387-9ACE-7F3034518115}"/>
+              </a:ext>
+            </a:extLst>
+          </p:cNvPr>
+          <p:cNvSpPr>
+            <a:spLocks noGrp="1"/>
+          </p:cNvSpPr>
+          <p:nvPr>
+            <p:ph idx="1"/>
+          </p:nvPr>
+        </p:nvSpPr>
+        <p:spPr>
+          <a:xfrm>
+            <a:off x="6198920" y="2394251"/>
+            <a:ext cx="5091254" cy="3678303"/>
+          </a:xfrm>
+        </p:spPr>
+        <p:txBody>
+          <a:bodyPr/>
+          <a:lstStyle/>
+          <a:p>
+            <a:r>
+              <a:rPr lang="en-US" dirty="0"/>
+              <a:t>Common Java exceptions (unchecked – subclasses of </a:t>
+            </a:r>
+            <a:r>
+              <a:rPr lang="en-US" dirty="0" err="1"/>
+              <a:t>RuntimeException</a:t>
+            </a:r>
+            <a:r>
+              <a:rPr lang="en-US" dirty="0"/>
+              <a:t>):</a:t>
+            </a:r>
+          </a:p>
+          <a:p>
+            <a:pPr lvl="1"/>
+            <a:r>
+              <a:rPr lang="en-US" dirty="0" err="1"/>
+              <a:t>ArithmeticException</a:t>
+            </a:r>
+            <a:endParaRPr lang="en-US" dirty="0"/>
+          </a:p>
+          <a:p>
+            <a:pPr lvl="1"/>
+            <a:r>
+              <a:rPr lang="en-US" dirty="0" err="1"/>
+              <a:t>NullPointerException</a:t>
+            </a:r>
+            <a:endParaRPr lang="en-US" dirty="0"/>
+          </a:p>
+          <a:p>
+            <a:pPr lvl="1"/>
+            <a:r>
+              <a:rPr lang="en-US" dirty="0" err="1"/>
+              <a:t>ArrayIndexOutOfBoundsException</a:t>
+            </a:r>
+            <a:endParaRPr lang="en-US" dirty="0"/>
+          </a:p>
+          <a:p>
+            <a:pPr lvl="1"/>
+            <a:r>
+              <a:rPr lang="en-US" dirty="0" err="1"/>
+              <a:t>InputMismatchException</a:t>
+            </a:r>
+            <a:endParaRPr lang="en-US" dirty="0"/>
+          </a:p>
+          <a:p>
+            <a:r>
+              <a:rPr lang="en-US" dirty="0"/>
+              <a:t>There is another variant of try-catch, often called try-with-resources (we will discuss this later)</a:t>
+            </a:r>
+          </a:p>
+        </p:txBody>
+      </p:sp>
+      <p:pic>
+        <p:nvPicPr>
+          <p:cNvPr id="5" name="Picture 4">
+            <a:extLst>
+              <a:ext uri="{FF2B5EF4-FFF2-40B4-BE49-F238E27FC236}">
+                <a16:creationId xmlns:a16="http://schemas.microsoft.com/office/drawing/2014/main" id="{D410701B-9381-53AF-DF46-92E24A4B830F}"/>
+              </a:ext>
+            </a:extLst>
+          </p:cNvPr>
+          <p:cNvPicPr>
+            <a:picLocks noChangeAspect="1"/>
+          </p:cNvPicPr>
+          <p:nvPr/>
+        </p:nvPicPr>
+        <p:blipFill>
+          <a:blip r:embed="rId2"/>
+          <a:stretch>
+            <a:fillRect/>
+          </a:stretch>
+        </p:blipFill>
+        <p:spPr>
+          <a:xfrm>
+            <a:off x="1294410" y="1874331"/>
+            <a:ext cx="4238204" cy="4983669"/>
+          </a:xfrm>
+          <a:prstGeom prst="rect">
+            <a:avLst/>
+          </a:prstGeom>
+        </p:spPr>
+      </p:pic>
+    </p:spTree>
+    <p:extLst>
+      <p:ext uri="{BB962C8B-B14F-4D97-AF65-F5344CB8AC3E}">
+        <p14:creationId xmlns:p14="http://schemas.microsoft.com/office/powerpoint/2010/main" val="2376676644"/>
+      </p:ext>
+    </p:extLst>
+  </p:cSld>
+  <p:clrMapOvr>
+    <a:masterClrMapping/>
+  </p:clrMapOvr>
+</p:sld>
+</file>
+
+<file path=ppt/slides/slide56.xml><?xml version="1.0" encoding="utf-8"?>
+<p:sld xmlns:a="http://schemas.openxmlformats.org/drawingml/2006/main" xmlns:r="http://schemas.openxmlformats.org/officeDocument/2006/relationships" xmlns:p="http://schemas.openxmlformats.org/presentationml/2006/main">
+  <p:cSld>
+    <p:spTree>
+      <p:nvGrpSpPr>
+        <p:cNvPr id="1" name=""/>
+        <p:cNvGrpSpPr/>
+        <p:nvPr/>
+      </p:nvGrpSpPr>
+      <p:grpSpPr>
+        <a:xfrm>
+          <a:off x="0" y="0"/>
+          <a:ext cx="0" cy="0"/>
+          <a:chOff x="0" y="0"/>
+          <a:chExt cx="0" cy="0"/>
+        </a:xfrm>
+      </p:grpSpPr>
+      <p:sp>
+        <p:nvSpPr>
+          <p:cNvPr id="2" name="Title 1">
+            <a:extLst>
+              <a:ext uri="{FF2B5EF4-FFF2-40B4-BE49-F238E27FC236}">
+                <a16:creationId xmlns:a16="http://schemas.microsoft.com/office/drawing/2014/main" id="{B6197AA9-0021-74F2-88EA-BB1044F071C2}"/>
+              </a:ext>
+            </a:extLst>
+          </p:cNvPr>
+          <p:cNvSpPr>
+            <a:spLocks noGrp="1"/>
+          </p:cNvSpPr>
+          <p:nvPr>
+            <p:ph type="title"/>
+          </p:nvPr>
+        </p:nvSpPr>
+        <p:spPr/>
+        <p:txBody>
+          <a:bodyPr/>
+          <a:lstStyle/>
+          <a:p>
+            <a:r>
+              <a:rPr lang="en-US"/>
+              <a:t>Exceptions</a:t>
+            </a:r>
+            <a:endParaRPr lang="en-US" dirty="0"/>
+          </a:p>
+        </p:txBody>
+      </p:sp>
+      <p:pic>
+        <p:nvPicPr>
+          <p:cNvPr id="9" name="Picture 8">
+            <a:extLst>
+              <a:ext uri="{FF2B5EF4-FFF2-40B4-BE49-F238E27FC236}">
+                <a16:creationId xmlns:a16="http://schemas.microsoft.com/office/drawing/2014/main" id="{D2B8E577-DB9A-7AB8-61AC-ECEF16C36198}"/>
+              </a:ext>
+            </a:extLst>
+          </p:cNvPr>
+          <p:cNvPicPr>
+            <a:picLocks noChangeAspect="1"/>
+          </p:cNvPicPr>
+          <p:nvPr/>
+        </p:nvPicPr>
+        <p:blipFill>
+          <a:blip r:embed="rId2"/>
+          <a:stretch>
+            <a:fillRect/>
+          </a:stretch>
+        </p:blipFill>
+        <p:spPr>
+          <a:xfrm>
+            <a:off x="6877070" y="0"/>
+            <a:ext cx="3839198" cy="6858000"/>
+          </a:xfrm>
+          <a:prstGeom prst="rect">
+            <a:avLst/>
+          </a:prstGeom>
+        </p:spPr>
+      </p:pic>
+      <p:sp>
+        <p:nvSpPr>
+          <p:cNvPr id="10" name="TextBox 9">
+            <a:extLst>
+              <a:ext uri="{FF2B5EF4-FFF2-40B4-BE49-F238E27FC236}">
+                <a16:creationId xmlns:a16="http://schemas.microsoft.com/office/drawing/2014/main" id="{20ED06A2-874B-F34E-EC18-CC061C9ADBC5}"/>
+              </a:ext>
+            </a:extLst>
+          </p:cNvPr>
+          <p:cNvSpPr txBox="1"/>
+          <p:nvPr/>
+        </p:nvSpPr>
+        <p:spPr>
+          <a:xfrm>
+            <a:off x="1006605" y="2598459"/>
+            <a:ext cx="5089395" cy="2862322"/>
+          </a:xfrm>
+          <a:prstGeom prst="rect">
+            <a:avLst/>
+          </a:prstGeom>
+          <a:noFill/>
+        </p:spPr>
+        <p:txBody>
+          <a:bodyPr wrap="square" rtlCol="0">
+            <a:spAutoFit/>
+          </a:bodyPr>
+          <a:lstStyle/>
+          <a:p>
+            <a:pPr marL="285750" indent="-285750">
+              <a:buClr>
+                <a:schemeClr val="accent2"/>
+              </a:buClr>
+              <a:buFont typeface="Wingdings" panose="05000000000000000000" pitchFamily="2" charset="2"/>
+              <a:buChar char="§"/>
+            </a:pPr>
+            <a:r>
+              <a:rPr lang="en-US" dirty="0"/>
+              <a:t>Notice:</a:t>
+            </a:r>
+          </a:p>
+          <a:p>
+            <a:pPr marL="742950" lvl="1" indent="-285750">
+              <a:buClr>
+                <a:schemeClr val="accent2"/>
+              </a:buClr>
+              <a:buFont typeface="Wingdings" panose="05000000000000000000" pitchFamily="2" charset="2"/>
+              <a:buChar char="§"/>
+            </a:pPr>
+            <a:r>
+              <a:rPr lang="en-US" dirty="0"/>
+              <a:t>Custom exceptions extend from base Exception class</a:t>
+            </a:r>
+          </a:p>
+          <a:p>
+            <a:pPr marL="742950" lvl="1" indent="-285750">
+              <a:buClr>
+                <a:schemeClr val="accent2"/>
+              </a:buClr>
+              <a:buFont typeface="Wingdings" panose="05000000000000000000" pitchFamily="2" charset="2"/>
+              <a:buChar char="§"/>
+            </a:pPr>
+            <a:r>
+              <a:rPr lang="en-US" dirty="0"/>
+              <a:t>We declare that a method may throw a specific type of exception via ‘throws’ keyword</a:t>
+            </a:r>
+          </a:p>
+          <a:p>
+            <a:pPr marL="742950" lvl="1" indent="-285750">
+              <a:buClr>
+                <a:schemeClr val="accent2"/>
+              </a:buClr>
+              <a:buFont typeface="Wingdings" panose="05000000000000000000" pitchFamily="2" charset="2"/>
+              <a:buChar char="§"/>
+            </a:pPr>
+            <a:r>
+              <a:rPr lang="en-US" dirty="0"/>
+              <a:t>We throw exceptions manually via the ‘throw’ keyword</a:t>
+            </a:r>
+          </a:p>
+          <a:p>
+            <a:pPr marL="742950" lvl="1" indent="-285750">
+              <a:buClr>
+                <a:schemeClr val="accent2"/>
+              </a:buClr>
+              <a:buFont typeface="Wingdings" panose="05000000000000000000" pitchFamily="2" charset="2"/>
+              <a:buChar char="§"/>
+            </a:pPr>
+            <a:r>
+              <a:rPr lang="en-US" dirty="0"/>
+              <a:t>We have methods inherited from the base Exception class, such as </a:t>
+            </a:r>
+            <a:r>
+              <a:rPr lang="en-US" dirty="0" err="1"/>
+              <a:t>getMessage</a:t>
+            </a:r>
+            <a:r>
+              <a:rPr lang="en-US" dirty="0"/>
+              <a:t>()</a:t>
+            </a:r>
+          </a:p>
+        </p:txBody>
+      </p:sp>
+    </p:spTree>
+    <p:extLst>
+      <p:ext uri="{BB962C8B-B14F-4D97-AF65-F5344CB8AC3E}">
+        <p14:creationId xmlns:p14="http://schemas.microsoft.com/office/powerpoint/2010/main" val="40148600"/>
+      </p:ext>
+    </p:extLst>
+  </p:cSld>
+  <p:clrMapOvr>
+    <a:masterClrMapping/>
+  </p:clrMapOvr>
+</p:sld>
+</file>
+
+<file path=ppt/slides/slide57.xml><?xml version="1.0" encoding="utf-8"?>
+<p:sld xmlns:a="http://schemas.openxmlformats.org/drawingml/2006/main" xmlns:r="http://schemas.openxmlformats.org/officeDocument/2006/relationships" xmlns:p="http://schemas.openxmlformats.org/presentationml/2006/main">
+  <p:cSld>
+    <p:spTree>
+      <p:nvGrpSpPr>
+        <p:cNvPr id="1" name=""/>
+        <p:cNvGrpSpPr/>
+        <p:nvPr/>
+      </p:nvGrpSpPr>
+      <p:grpSpPr>
+        <a:xfrm>
+          <a:off x="0" y="0"/>
+          <a:ext cx="0" cy="0"/>
+          <a:chOff x="0" y="0"/>
+          <a:chExt cx="0" cy="0"/>
+        </a:xfrm>
+      </p:grpSpPr>
+      <p:sp>
+        <p:nvSpPr>
+          <p:cNvPr id="2" name="Title 1">
+            <a:extLst>
+              <a:ext uri="{FF2B5EF4-FFF2-40B4-BE49-F238E27FC236}">
+                <a16:creationId xmlns:a16="http://schemas.microsoft.com/office/drawing/2014/main" id="{01018C98-B83E-37A3-48CF-E4515F6FBA71}"/>
+              </a:ext>
+            </a:extLst>
+          </p:cNvPr>
+          <p:cNvSpPr>
+            <a:spLocks noGrp="1"/>
+          </p:cNvSpPr>
+          <p:nvPr>
+            <p:ph type="title"/>
+          </p:nvPr>
+        </p:nvSpPr>
+        <p:spPr/>
+        <p:txBody>
+          <a:bodyPr/>
+          <a:lstStyle/>
+          <a:p>
+            <a:r>
+              <a:rPr lang="en-US" dirty="0"/>
+              <a:t>Maven</a:t>
+            </a:r>
+          </a:p>
+        </p:txBody>
+      </p:sp>
+      <p:sp>
+        <p:nvSpPr>
+          <p:cNvPr id="3" name="Content Placeholder 2">
+            <a:extLst>
+              <a:ext uri="{FF2B5EF4-FFF2-40B4-BE49-F238E27FC236}">
+                <a16:creationId xmlns:a16="http://schemas.microsoft.com/office/drawing/2014/main" id="{9433A203-2A90-A72B-AB79-F69A453085EF}"/>
+              </a:ext>
+            </a:extLst>
+          </p:cNvPr>
+          <p:cNvSpPr>
+            <a:spLocks noGrp="1"/>
+          </p:cNvSpPr>
+          <p:nvPr>
+            <p:ph idx="1"/>
+          </p:nvPr>
+        </p:nvSpPr>
+        <p:spPr>
+          <a:xfrm>
+            <a:off x="581191" y="4394560"/>
+            <a:ext cx="11029615" cy="2006239"/>
+          </a:xfrm>
+        </p:spPr>
+        <p:txBody>
+          <a:bodyPr>
+            <a:normAutofit lnSpcReduction="10000"/>
+          </a:bodyPr>
+          <a:lstStyle/>
+          <a:p>
+            <a:r>
+              <a:rPr lang="en-US" dirty="0"/>
+              <a:t>We can add libraries to our Java applications – code that other developers have written</a:t>
+            </a:r>
+          </a:p>
+          <a:p>
+            <a:r>
+              <a:rPr lang="en-US" dirty="0"/>
+              <a:t>These libraries can add functionality to our apps. For example, we may want a Postgres connector so our application can communicate with a Postgres database</a:t>
+            </a:r>
+          </a:p>
+          <a:p>
+            <a:r>
+              <a:rPr lang="en-US" dirty="0"/>
+              <a:t>Instead of manually downloading .jar files for these libraries, Maven helps provide automation for library management (as well as dependency management)</a:t>
+            </a:r>
+          </a:p>
+          <a:p>
+            <a:r>
+              <a:rPr lang="en-US" dirty="0"/>
+              <a:t>So… Maven is a build and dependency management tool for Java projects</a:t>
+            </a:r>
+          </a:p>
+        </p:txBody>
+      </p:sp>
+      <p:pic>
+        <p:nvPicPr>
+          <p:cNvPr id="5" name="Picture 4">
+            <a:extLst>
+              <a:ext uri="{FF2B5EF4-FFF2-40B4-BE49-F238E27FC236}">
+                <a16:creationId xmlns:a16="http://schemas.microsoft.com/office/drawing/2014/main" id="{5BB6A8E9-3B21-BA2A-022B-BB0524384DAB}"/>
+              </a:ext>
+            </a:extLst>
+          </p:cNvPr>
+          <p:cNvPicPr>
+            <a:picLocks noChangeAspect="1"/>
+          </p:cNvPicPr>
+          <p:nvPr/>
+        </p:nvPicPr>
+        <p:blipFill>
+          <a:blip r:embed="rId2"/>
+          <a:stretch>
+            <a:fillRect/>
+          </a:stretch>
+        </p:blipFill>
+        <p:spPr>
+          <a:xfrm>
+            <a:off x="849085" y="1867227"/>
+            <a:ext cx="10493829" cy="2150432"/>
+          </a:xfrm>
+          <a:prstGeom prst="rect">
+            <a:avLst/>
+          </a:prstGeom>
+        </p:spPr>
+      </p:pic>
+    </p:spTree>
+    <p:extLst>
+      <p:ext uri="{BB962C8B-B14F-4D97-AF65-F5344CB8AC3E}">
+        <p14:creationId xmlns:p14="http://schemas.microsoft.com/office/powerpoint/2010/main" val="3821204687"/>
+      </p:ext>
+    </p:extLst>
+  </p:cSld>
+  <p:clrMapOvr>
+    <a:masterClrMapping/>
+  </p:clrMapOvr>
+</p:sld>
+</file>
+
+<file path=ppt/slides/slide58.xml><?xml version="1.0" encoding="utf-8"?>
+<p:sld xmlns:a="http://schemas.openxmlformats.org/drawingml/2006/main" xmlns:r="http://schemas.openxmlformats.org/officeDocument/2006/relationships" xmlns:p="http://schemas.openxmlformats.org/presentationml/2006/main">
+  <p:cSld>
+    <p:spTree>
+      <p:nvGrpSpPr>
+        <p:cNvPr id="1" name=""/>
+        <p:cNvGrpSpPr/>
+        <p:nvPr/>
+      </p:nvGrpSpPr>
+      <p:grpSpPr>
+        <a:xfrm>
+          <a:off x="0" y="0"/>
+          <a:ext cx="0" cy="0"/>
+          <a:chOff x="0" y="0"/>
+          <a:chExt cx="0" cy="0"/>
+        </a:xfrm>
+      </p:grpSpPr>
+      <p:sp>
+        <p:nvSpPr>
+          <p:cNvPr id="2" name="Title 1">
+            <a:extLst>
+              <a:ext uri="{FF2B5EF4-FFF2-40B4-BE49-F238E27FC236}">
+                <a16:creationId xmlns:a16="http://schemas.microsoft.com/office/drawing/2014/main" id="{327CCE64-420B-A5C3-D9AC-B7A33DBDB0DD}"/>
+              </a:ext>
+            </a:extLst>
+          </p:cNvPr>
+          <p:cNvSpPr>
+            <a:spLocks noGrp="1"/>
+          </p:cNvSpPr>
+          <p:nvPr>
+            <p:ph type="title"/>
+          </p:nvPr>
+        </p:nvSpPr>
+        <p:spPr/>
+        <p:txBody>
+          <a:bodyPr/>
+          <a:lstStyle/>
+          <a:p>
+            <a:r>
+              <a:rPr lang="en-US" dirty="0"/>
+              <a:t>Maven &amp; </a:t>
+            </a:r>
+            <a:r>
+              <a:rPr lang="en-US" dirty="0" err="1"/>
+              <a:t>CLasspath</a:t>
+            </a:r>
+            <a:endParaRPr lang="en-US" dirty="0"/>
+          </a:p>
+        </p:txBody>
+      </p:sp>
+      <p:sp>
+        <p:nvSpPr>
+          <p:cNvPr id="3" name="Content Placeholder 2">
+            <a:extLst>
+              <a:ext uri="{FF2B5EF4-FFF2-40B4-BE49-F238E27FC236}">
+                <a16:creationId xmlns:a16="http://schemas.microsoft.com/office/drawing/2014/main" id="{D78A8F2B-AEC5-9523-B3DA-093FA9DB1958}"/>
+              </a:ext>
+            </a:extLst>
+          </p:cNvPr>
+          <p:cNvSpPr>
+            <a:spLocks noGrp="1"/>
+          </p:cNvSpPr>
+          <p:nvPr>
+            <p:ph idx="1"/>
+          </p:nvPr>
+        </p:nvSpPr>
+        <p:spPr>
+          <a:xfrm>
+            <a:off x="581192" y="2180496"/>
+            <a:ext cx="11029615" cy="4358527"/>
+          </a:xfrm>
+        </p:spPr>
+        <p:txBody>
+          <a:bodyPr>
+            <a:normAutofit/>
+          </a:bodyPr>
+          <a:lstStyle/>
+          <a:p>
+            <a:r>
+              <a:rPr lang="en-US" dirty="0"/>
+              <a:t>The Java </a:t>
+            </a:r>
+            <a:r>
+              <a:rPr lang="en-US" dirty="0" err="1"/>
+              <a:t>classpath</a:t>
+            </a:r>
+            <a:r>
+              <a:rPr lang="en-US" dirty="0"/>
+              <a:t> is a list of places where Java looks for classes and other resources our program needs</a:t>
+            </a:r>
+          </a:p>
+          <a:p>
+            <a:r>
+              <a:rPr lang="en-US" dirty="0"/>
+              <a:t>For example, if we use: import </a:t>
+            </a:r>
+            <a:r>
+              <a:rPr lang="en-US" dirty="0" err="1"/>
+              <a:t>io.bretty.console.table.TableBuilder</a:t>
+            </a:r>
+            <a:r>
+              <a:rPr lang="en-US" dirty="0"/>
+              <a:t>;</a:t>
+            </a:r>
+          </a:p>
+          <a:p>
+            <a:pPr lvl="1"/>
+            <a:r>
+              <a:rPr lang="en-US" dirty="0"/>
+              <a:t>Then our Java program needs to know where to look for the </a:t>
+            </a:r>
+            <a:r>
+              <a:rPr lang="en-US" dirty="0" err="1"/>
+              <a:t>TableBuilder.class</a:t>
+            </a:r>
+            <a:r>
+              <a:rPr lang="en-US" dirty="0"/>
+              <a:t> file </a:t>
+            </a:r>
+          </a:p>
+          <a:p>
+            <a:pPr lvl="1"/>
+            <a:r>
+              <a:rPr lang="en-US" dirty="0"/>
+              <a:t>The </a:t>
+            </a:r>
+            <a:r>
+              <a:rPr lang="en-US" dirty="0" err="1"/>
+              <a:t>classpath</a:t>
+            </a:r>
+            <a:r>
+              <a:rPr lang="en-US" dirty="0"/>
+              <a:t> tells Java where to find it</a:t>
+            </a:r>
+          </a:p>
+          <a:p>
+            <a:r>
+              <a:rPr lang="en-US" dirty="0"/>
+              <a:t>Some dependencies may be transitive. This is very difficult to manage manually.</a:t>
+            </a:r>
+          </a:p>
+          <a:p>
+            <a:r>
+              <a:rPr lang="en-US" dirty="0"/>
+              <a:t>We’d have to get the right versions of the jar files manually and compiling/running would need to be done manually:</a:t>
+            </a:r>
+          </a:p>
+          <a:p>
+            <a:pPr lvl="1"/>
+            <a:r>
+              <a:rPr lang="en-US" dirty="0" err="1"/>
+              <a:t>javac</a:t>
+            </a:r>
+            <a:r>
+              <a:rPr lang="en-US" dirty="0"/>
+              <a:t> -cp "lib/*" -d out </a:t>
+            </a:r>
+            <a:r>
+              <a:rPr lang="en-US" dirty="0" err="1"/>
+              <a:t>src</a:t>
+            </a:r>
+            <a:r>
+              <a:rPr lang="en-US" dirty="0"/>
+              <a:t>/Main.java</a:t>
+            </a:r>
+          </a:p>
+          <a:p>
+            <a:pPr lvl="1"/>
+            <a:r>
+              <a:rPr lang="en-US" dirty="0"/>
+              <a:t>java -cp "</a:t>
+            </a:r>
+            <a:r>
+              <a:rPr lang="en-US" dirty="0" err="1"/>
+              <a:t>out:lib</a:t>
+            </a:r>
+            <a:r>
+              <a:rPr lang="en-US" dirty="0"/>
+              <a:t>/*" Main</a:t>
+            </a:r>
+          </a:p>
+          <a:p>
+            <a:r>
+              <a:rPr lang="en-US" dirty="0">
+                <a:solidFill>
+                  <a:schemeClr val="accent2"/>
+                </a:solidFill>
+              </a:rPr>
+              <a:t>Instead, Maven handles setting up the </a:t>
+            </a:r>
+            <a:r>
+              <a:rPr lang="en-US" dirty="0" err="1">
+                <a:solidFill>
+                  <a:schemeClr val="accent2"/>
+                </a:solidFill>
+              </a:rPr>
+              <a:t>classpath</a:t>
+            </a:r>
+            <a:r>
+              <a:rPr lang="en-US" dirty="0">
+                <a:solidFill>
+                  <a:schemeClr val="accent2"/>
+                </a:solidFill>
+              </a:rPr>
+              <a:t> for us</a:t>
+            </a:r>
+          </a:p>
+        </p:txBody>
+      </p:sp>
+    </p:spTree>
+    <p:extLst>
+      <p:ext uri="{BB962C8B-B14F-4D97-AF65-F5344CB8AC3E}">
+        <p14:creationId xmlns:p14="http://schemas.microsoft.com/office/powerpoint/2010/main" val="2227436647"/>
+      </p:ext>
+    </p:extLst>
+  </p:cSld>
+  <p:clrMapOvr>
+    <a:masterClrMapping/>
+  </p:clrMapOvr>
+</p:sld>
+</file>
+
+<file path=ppt/slides/slide59.xml><?xml version="1.0" encoding="utf-8"?>
+<p:sld xmlns:a="http://schemas.openxmlformats.org/drawingml/2006/main" xmlns:r="http://schemas.openxmlformats.org/officeDocument/2006/relationships" xmlns:p="http://schemas.openxmlformats.org/presentationml/2006/main">
+  <p:cSld>
+    <p:spTree>
+      <p:nvGrpSpPr>
+        <p:cNvPr id="1" name=""/>
+        <p:cNvGrpSpPr/>
+        <p:nvPr/>
+      </p:nvGrpSpPr>
+      <p:grpSpPr>
+        <a:xfrm>
+          <a:off x="0" y="0"/>
+          <a:ext cx="0" cy="0"/>
+          <a:chOff x="0" y="0"/>
+          <a:chExt cx="0" cy="0"/>
+        </a:xfrm>
+      </p:grpSpPr>
+      <p:sp>
+        <p:nvSpPr>
+          <p:cNvPr id="2" name="Title 1">
+            <a:extLst>
+              <a:ext uri="{FF2B5EF4-FFF2-40B4-BE49-F238E27FC236}">
+                <a16:creationId xmlns:a16="http://schemas.microsoft.com/office/drawing/2014/main" id="{4B522EED-E96B-267B-B720-9C3A18E55D1D}"/>
+              </a:ext>
+            </a:extLst>
+          </p:cNvPr>
+          <p:cNvSpPr>
+            <a:spLocks noGrp="1"/>
+          </p:cNvSpPr>
+          <p:nvPr>
+            <p:ph type="title"/>
+          </p:nvPr>
+        </p:nvSpPr>
+        <p:spPr/>
+        <p:txBody>
+          <a:bodyPr/>
+          <a:lstStyle/>
+          <a:p>
+            <a:r>
+              <a:rPr lang="en-US" dirty="0"/>
+              <a:t>Maven manual install</a:t>
+            </a:r>
+          </a:p>
+        </p:txBody>
+      </p:sp>
+      <p:sp>
+        <p:nvSpPr>
+          <p:cNvPr id="3" name="Content Placeholder 2">
+            <a:extLst>
+              <a:ext uri="{FF2B5EF4-FFF2-40B4-BE49-F238E27FC236}">
+                <a16:creationId xmlns:a16="http://schemas.microsoft.com/office/drawing/2014/main" id="{82A4E2DB-04E4-AD97-B1ED-259FC9CC06D7}"/>
+              </a:ext>
+            </a:extLst>
+          </p:cNvPr>
+          <p:cNvSpPr>
+            <a:spLocks noGrp="1"/>
+          </p:cNvSpPr>
+          <p:nvPr>
+            <p:ph idx="1"/>
+          </p:nvPr>
+        </p:nvSpPr>
+        <p:spPr>
+          <a:xfrm>
+            <a:off x="581192" y="1871739"/>
+            <a:ext cx="11029615" cy="1248504"/>
+          </a:xfrm>
+        </p:spPr>
+        <p:txBody>
+          <a:bodyPr/>
+          <a:lstStyle/>
+          <a:p>
+            <a:r>
+              <a:rPr lang="en-US" dirty="0"/>
+              <a:t>You can download the binaries directly from their website</a:t>
+            </a:r>
+          </a:p>
+          <a:p>
+            <a:r>
+              <a:rPr lang="en-US" dirty="0"/>
+              <a:t>Then you can add the ‘bin’ folder to your PATH environment variable</a:t>
+            </a:r>
+          </a:p>
+        </p:txBody>
+      </p:sp>
+      <p:pic>
+        <p:nvPicPr>
+          <p:cNvPr id="6" name="Picture 5">
+            <a:extLst>
+              <a:ext uri="{FF2B5EF4-FFF2-40B4-BE49-F238E27FC236}">
+                <a16:creationId xmlns:a16="http://schemas.microsoft.com/office/drawing/2014/main" id="{A5EC3B4C-4104-D6F6-59CF-C393E560E98A}"/>
+              </a:ext>
+            </a:extLst>
+          </p:cNvPr>
+          <p:cNvPicPr>
+            <a:picLocks noChangeAspect="1"/>
+          </p:cNvPicPr>
+          <p:nvPr/>
+        </p:nvPicPr>
+        <p:blipFill>
+          <a:blip r:embed="rId2"/>
+          <a:stretch>
+            <a:fillRect/>
+          </a:stretch>
+        </p:blipFill>
+        <p:spPr>
+          <a:xfrm>
+            <a:off x="1346250" y="3535962"/>
+            <a:ext cx="3820058" cy="3057952"/>
+          </a:xfrm>
+          <a:prstGeom prst="rect">
+            <a:avLst/>
+          </a:prstGeom>
+        </p:spPr>
+      </p:pic>
+      <p:pic>
+        <p:nvPicPr>
+          <p:cNvPr id="8" name="Picture 7">
+            <a:extLst>
+              <a:ext uri="{FF2B5EF4-FFF2-40B4-BE49-F238E27FC236}">
+                <a16:creationId xmlns:a16="http://schemas.microsoft.com/office/drawing/2014/main" id="{7B00343D-39B0-F109-B513-053AD51CB386}"/>
+              </a:ext>
+            </a:extLst>
+          </p:cNvPr>
+          <p:cNvPicPr>
+            <a:picLocks noChangeAspect="1"/>
+          </p:cNvPicPr>
+          <p:nvPr/>
+        </p:nvPicPr>
+        <p:blipFill>
+          <a:blip r:embed="rId3"/>
+          <a:stretch>
+            <a:fillRect/>
+          </a:stretch>
+        </p:blipFill>
+        <p:spPr>
+          <a:xfrm>
+            <a:off x="5664530" y="3429000"/>
+            <a:ext cx="5430710" cy="3080693"/>
+          </a:xfrm>
+          <a:prstGeom prst="rect">
+            <a:avLst/>
+          </a:prstGeom>
+        </p:spPr>
+      </p:pic>
+    </p:spTree>
+    <p:extLst>
+      <p:ext uri="{BB962C8B-B14F-4D97-AF65-F5344CB8AC3E}">
+        <p14:creationId xmlns:p14="http://schemas.microsoft.com/office/powerpoint/2010/main" val="3603738476"/>
+      </p:ext>
+    </p:extLst>
+  </p:cSld>
+  <p:clrMapOvr>
+    <a:masterClrMapping/>
+  </p:clrMapOvr>
+</p:sld>
+</file>
+
 <file path=ppt/slides/slide6.xml><?xml version="1.0" encoding="utf-8"?>
 <p:sld xmlns:a="http://schemas.openxmlformats.org/drawingml/2006/main" xmlns:r="http://schemas.openxmlformats.org/officeDocument/2006/relationships" xmlns:p="http://schemas.openxmlformats.org/presentationml/2006/main">
   <p:cSld>
@@ -22701,6 +24583,1546 @@
     <p:extLst>
       <p:ext uri="{BB962C8B-B14F-4D97-AF65-F5344CB8AC3E}">
         <p14:creationId xmlns:p14="http://schemas.microsoft.com/office/powerpoint/2010/main" val="3587871389"/>
+      </p:ext>
+    </p:extLst>
+  </p:cSld>
+  <p:clrMapOvr>
+    <a:masterClrMapping/>
+  </p:clrMapOvr>
+</p:sld>
+</file>
+
+<file path=ppt/slides/slide60.xml><?xml version="1.0" encoding="utf-8"?>
+<p:sld xmlns:a="http://schemas.openxmlformats.org/drawingml/2006/main" xmlns:r="http://schemas.openxmlformats.org/officeDocument/2006/relationships" xmlns:p="http://schemas.openxmlformats.org/presentationml/2006/main">
+  <p:cSld>
+    <p:spTree>
+      <p:nvGrpSpPr>
+        <p:cNvPr id="1" name=""/>
+        <p:cNvGrpSpPr/>
+        <p:nvPr/>
+      </p:nvGrpSpPr>
+      <p:grpSpPr>
+        <a:xfrm>
+          <a:off x="0" y="0"/>
+          <a:ext cx="0" cy="0"/>
+          <a:chOff x="0" y="0"/>
+          <a:chExt cx="0" cy="0"/>
+        </a:xfrm>
+      </p:grpSpPr>
+      <p:sp>
+        <p:nvSpPr>
+          <p:cNvPr id="2" name="Title 1">
+            <a:extLst>
+              <a:ext uri="{FF2B5EF4-FFF2-40B4-BE49-F238E27FC236}">
+                <a16:creationId xmlns:a16="http://schemas.microsoft.com/office/drawing/2014/main" id="{7C968AFB-5E82-259A-95C7-5A3E4EA7C8B8}"/>
+              </a:ext>
+            </a:extLst>
+          </p:cNvPr>
+          <p:cNvSpPr>
+            <a:spLocks noGrp="1"/>
+          </p:cNvSpPr>
+          <p:nvPr>
+            <p:ph type="title"/>
+          </p:nvPr>
+        </p:nvSpPr>
+        <p:spPr/>
+        <p:txBody>
+          <a:bodyPr/>
+          <a:lstStyle/>
+          <a:p>
+            <a:r>
+              <a:rPr lang="en-US" dirty="0"/>
+              <a:t>Maven - POM</a:t>
+            </a:r>
+          </a:p>
+        </p:txBody>
+      </p:sp>
+      <p:sp>
+        <p:nvSpPr>
+          <p:cNvPr id="3" name="Content Placeholder 2">
+            <a:extLst>
+              <a:ext uri="{FF2B5EF4-FFF2-40B4-BE49-F238E27FC236}">
+                <a16:creationId xmlns:a16="http://schemas.microsoft.com/office/drawing/2014/main" id="{78EC0170-0A55-EA98-1FA9-12D420A9473A}"/>
+              </a:ext>
+            </a:extLst>
+          </p:cNvPr>
+          <p:cNvSpPr>
+            <a:spLocks noGrp="1"/>
+          </p:cNvSpPr>
+          <p:nvPr>
+            <p:ph idx="1"/>
+          </p:nvPr>
+        </p:nvSpPr>
+        <p:spPr>
+          <a:xfrm>
+            <a:off x="581192" y="2180496"/>
+            <a:ext cx="11029615" cy="1678985"/>
+          </a:xfrm>
+        </p:spPr>
+        <p:txBody>
+          <a:bodyPr>
+            <a:normAutofit fontScale="92500" lnSpcReduction="10000"/>
+          </a:bodyPr>
+          <a:lstStyle/>
+          <a:p>
+            <a:r>
+              <a:rPr lang="en-US" dirty="0"/>
+              <a:t>POM.xml – Project Object Model – Think of this as your Maven project’s instruction manual. It tells Maven:</a:t>
+            </a:r>
+          </a:p>
+          <a:p>
+            <a:pPr lvl="1"/>
+            <a:r>
+              <a:rPr lang="en-US" dirty="0"/>
+              <a:t>This is a Java project. Here’s its name, version, dependencies, and here is how I want it built. </a:t>
+            </a:r>
+          </a:p>
+          <a:p>
+            <a:r>
+              <a:rPr lang="en-US" dirty="0"/>
+              <a:t>It’s easy to setup Maven projects in most IDEs</a:t>
+            </a:r>
+          </a:p>
+          <a:p>
+            <a:pPr lvl="1"/>
+            <a:r>
+              <a:rPr lang="en-US" dirty="0"/>
+              <a:t>In </a:t>
+            </a:r>
+            <a:r>
+              <a:rPr lang="en-US" dirty="0" err="1"/>
+              <a:t>Intellij</a:t>
+            </a:r>
+            <a:r>
+              <a:rPr lang="en-US" dirty="0"/>
+              <a:t>, just create a Maven project after selecting ‘New Project’ – you will see the option</a:t>
+            </a:r>
+          </a:p>
+          <a:p>
+            <a:pPr lvl="1"/>
+            <a:r>
+              <a:rPr lang="en-US" dirty="0"/>
+              <a:t>For VS Code – use the command palette to launch the guided process</a:t>
+            </a:r>
+          </a:p>
+        </p:txBody>
+      </p:sp>
+      <p:pic>
+        <p:nvPicPr>
+          <p:cNvPr id="5" name="Picture 4">
+            <a:extLst>
+              <a:ext uri="{FF2B5EF4-FFF2-40B4-BE49-F238E27FC236}">
+                <a16:creationId xmlns:a16="http://schemas.microsoft.com/office/drawing/2014/main" id="{E915F57A-AB61-18DD-7E47-70CD9E8D1CCC}"/>
+              </a:ext>
+            </a:extLst>
+          </p:cNvPr>
+          <p:cNvPicPr>
+            <a:picLocks noChangeAspect="1"/>
+          </p:cNvPicPr>
+          <p:nvPr/>
+        </p:nvPicPr>
+        <p:blipFill>
+          <a:blip r:embed="rId2"/>
+          <a:stretch>
+            <a:fillRect/>
+          </a:stretch>
+        </p:blipFill>
+        <p:spPr>
+          <a:xfrm>
+            <a:off x="7253701" y="4572000"/>
+            <a:ext cx="3357921" cy="1211771"/>
+          </a:xfrm>
+          <a:prstGeom prst="rect">
+            <a:avLst/>
+          </a:prstGeom>
+        </p:spPr>
+      </p:pic>
+      <p:pic>
+        <p:nvPicPr>
+          <p:cNvPr id="7" name="Picture 6">
+            <a:extLst>
+              <a:ext uri="{FF2B5EF4-FFF2-40B4-BE49-F238E27FC236}">
+                <a16:creationId xmlns:a16="http://schemas.microsoft.com/office/drawing/2014/main" id="{83C95DFA-3C87-F1D2-0B73-FBBB1C60E733}"/>
+              </a:ext>
+            </a:extLst>
+          </p:cNvPr>
+          <p:cNvPicPr>
+            <a:picLocks noChangeAspect="1"/>
+          </p:cNvPicPr>
+          <p:nvPr/>
+        </p:nvPicPr>
+        <p:blipFill>
+          <a:blip r:embed="rId3"/>
+          <a:stretch>
+            <a:fillRect/>
+          </a:stretch>
+        </p:blipFill>
+        <p:spPr>
+          <a:xfrm>
+            <a:off x="1152758" y="4324021"/>
+            <a:ext cx="5376514" cy="2048196"/>
+          </a:xfrm>
+          <a:prstGeom prst="rect">
+            <a:avLst/>
+          </a:prstGeom>
+        </p:spPr>
+      </p:pic>
+    </p:spTree>
+    <p:extLst>
+      <p:ext uri="{BB962C8B-B14F-4D97-AF65-F5344CB8AC3E}">
+        <p14:creationId xmlns:p14="http://schemas.microsoft.com/office/powerpoint/2010/main" val="4199818941"/>
+      </p:ext>
+    </p:extLst>
+  </p:cSld>
+  <p:clrMapOvr>
+    <a:masterClrMapping/>
+  </p:clrMapOvr>
+</p:sld>
+</file>
+
+<file path=ppt/slides/slide61.xml><?xml version="1.0" encoding="utf-8"?>
+<p:sld xmlns:a="http://schemas.openxmlformats.org/drawingml/2006/main" xmlns:r="http://schemas.openxmlformats.org/officeDocument/2006/relationships" xmlns:p="http://schemas.openxmlformats.org/presentationml/2006/main">
+  <p:cSld>
+    <p:spTree>
+      <p:nvGrpSpPr>
+        <p:cNvPr id="1" name=""/>
+        <p:cNvGrpSpPr/>
+        <p:nvPr/>
+      </p:nvGrpSpPr>
+      <p:grpSpPr>
+        <a:xfrm>
+          <a:off x="0" y="0"/>
+          <a:ext cx="0" cy="0"/>
+          <a:chOff x="0" y="0"/>
+          <a:chExt cx="0" cy="0"/>
+        </a:xfrm>
+      </p:grpSpPr>
+      <p:sp>
+        <p:nvSpPr>
+          <p:cNvPr id="2" name="Title 1">
+            <a:extLst>
+              <a:ext uri="{FF2B5EF4-FFF2-40B4-BE49-F238E27FC236}">
+                <a16:creationId xmlns:a16="http://schemas.microsoft.com/office/drawing/2014/main" id="{9F2E1AB2-ED2A-F76F-C053-4BF34AF1B870}"/>
+              </a:ext>
+            </a:extLst>
+          </p:cNvPr>
+          <p:cNvSpPr>
+            <a:spLocks noGrp="1"/>
+          </p:cNvSpPr>
+          <p:nvPr>
+            <p:ph type="title"/>
+          </p:nvPr>
+        </p:nvSpPr>
+        <p:spPr/>
+        <p:txBody>
+          <a:bodyPr/>
+          <a:lstStyle/>
+          <a:p>
+            <a:r>
+              <a:rPr lang="en-US" dirty="0"/>
+              <a:t>POM - breakdown</a:t>
+            </a:r>
+          </a:p>
+        </p:txBody>
+      </p:sp>
+      <p:sp>
+        <p:nvSpPr>
+          <p:cNvPr id="3" name="Content Placeholder 2">
+            <a:extLst>
+              <a:ext uri="{FF2B5EF4-FFF2-40B4-BE49-F238E27FC236}">
+                <a16:creationId xmlns:a16="http://schemas.microsoft.com/office/drawing/2014/main" id="{591DA503-733A-2393-9068-3C41AA25E4D8}"/>
+              </a:ext>
+            </a:extLst>
+          </p:cNvPr>
+          <p:cNvSpPr>
+            <a:spLocks noGrp="1"/>
+          </p:cNvSpPr>
+          <p:nvPr>
+            <p:ph idx="1"/>
+          </p:nvPr>
+        </p:nvSpPr>
+        <p:spPr>
+          <a:xfrm>
+            <a:off x="6911439" y="2180496"/>
+            <a:ext cx="4699368" cy="3678303"/>
+          </a:xfrm>
+        </p:spPr>
+        <p:txBody>
+          <a:bodyPr/>
+          <a:lstStyle/>
+          <a:p>
+            <a:r>
+              <a:rPr lang="en-US" dirty="0" err="1"/>
+              <a:t>groupId</a:t>
+            </a:r>
+            <a:r>
+              <a:rPr lang="en-US" dirty="0"/>
+              <a:t> – organization/project group; usually a reverse domain</a:t>
+            </a:r>
+          </a:p>
+          <a:p>
+            <a:r>
+              <a:rPr lang="en-US" dirty="0" err="1"/>
+              <a:t>artifactId</a:t>
+            </a:r>
+            <a:r>
+              <a:rPr lang="en-US" dirty="0"/>
+              <a:t> – Name of the project</a:t>
+            </a:r>
+          </a:p>
+          <a:p>
+            <a:r>
+              <a:rPr lang="en-US" dirty="0"/>
+              <a:t>Version – our own version scheme we can control; SNAPSHOT suggests it is still in development</a:t>
+            </a:r>
+          </a:p>
+          <a:p>
+            <a:r>
+              <a:rPr lang="en-US" dirty="0"/>
+              <a:t>All three of these: ‘</a:t>
+            </a:r>
+            <a:r>
+              <a:rPr lang="en-US" dirty="0" err="1"/>
+              <a:t>groupId</a:t>
+            </a:r>
+            <a:r>
+              <a:rPr lang="en-US" dirty="0"/>
+              <a:t> : </a:t>
+            </a:r>
+            <a:r>
+              <a:rPr lang="en-US" dirty="0" err="1"/>
+              <a:t>artifactId</a:t>
+            </a:r>
+            <a:r>
+              <a:rPr lang="en-US" dirty="0"/>
+              <a:t> : version’ – make up what is called the artifact coordinates </a:t>
+            </a:r>
+          </a:p>
+        </p:txBody>
+      </p:sp>
+      <p:pic>
+        <p:nvPicPr>
+          <p:cNvPr id="5" name="Picture 4">
+            <a:extLst>
+              <a:ext uri="{FF2B5EF4-FFF2-40B4-BE49-F238E27FC236}">
+                <a16:creationId xmlns:a16="http://schemas.microsoft.com/office/drawing/2014/main" id="{C160E63D-52F7-96BC-5E6B-2C2A0E9ED204}"/>
+              </a:ext>
+            </a:extLst>
+          </p:cNvPr>
+          <p:cNvPicPr>
+            <a:picLocks noChangeAspect="1"/>
+          </p:cNvPicPr>
+          <p:nvPr/>
+        </p:nvPicPr>
+        <p:blipFill>
+          <a:blip r:embed="rId2"/>
+          <a:stretch>
+            <a:fillRect/>
+          </a:stretch>
+        </p:blipFill>
+        <p:spPr>
+          <a:xfrm>
+            <a:off x="369924" y="2778826"/>
+            <a:ext cx="6288930" cy="2772617"/>
+          </a:xfrm>
+          <a:prstGeom prst="rect">
+            <a:avLst/>
+          </a:prstGeom>
+        </p:spPr>
+      </p:pic>
+    </p:spTree>
+    <p:extLst>
+      <p:ext uri="{BB962C8B-B14F-4D97-AF65-F5344CB8AC3E}">
+        <p14:creationId xmlns:p14="http://schemas.microsoft.com/office/powerpoint/2010/main" val="2767868954"/>
+      </p:ext>
+    </p:extLst>
+  </p:cSld>
+  <p:clrMapOvr>
+    <a:masterClrMapping/>
+  </p:clrMapOvr>
+</p:sld>
+</file>
+
+<file path=ppt/slides/slide62.xml><?xml version="1.0" encoding="utf-8"?>
+<p:sld xmlns:a="http://schemas.openxmlformats.org/drawingml/2006/main" xmlns:r="http://schemas.openxmlformats.org/officeDocument/2006/relationships" xmlns:p="http://schemas.openxmlformats.org/presentationml/2006/main">
+  <p:cSld>
+    <p:spTree>
+      <p:nvGrpSpPr>
+        <p:cNvPr id="1" name=""/>
+        <p:cNvGrpSpPr/>
+        <p:nvPr/>
+      </p:nvGrpSpPr>
+      <p:grpSpPr>
+        <a:xfrm>
+          <a:off x="0" y="0"/>
+          <a:ext cx="0" cy="0"/>
+          <a:chOff x="0" y="0"/>
+          <a:chExt cx="0" cy="0"/>
+        </a:xfrm>
+      </p:grpSpPr>
+      <p:sp>
+        <p:nvSpPr>
+          <p:cNvPr id="2" name="Title 1">
+            <a:extLst>
+              <a:ext uri="{FF2B5EF4-FFF2-40B4-BE49-F238E27FC236}">
+                <a16:creationId xmlns:a16="http://schemas.microsoft.com/office/drawing/2014/main" id="{95890756-393A-9592-79EC-7E298A68E86F}"/>
+              </a:ext>
+            </a:extLst>
+          </p:cNvPr>
+          <p:cNvSpPr>
+            <a:spLocks noGrp="1"/>
+          </p:cNvSpPr>
+          <p:nvPr>
+            <p:ph type="title"/>
+          </p:nvPr>
+        </p:nvSpPr>
+        <p:spPr/>
+        <p:txBody>
+          <a:bodyPr/>
+          <a:lstStyle/>
+          <a:p>
+            <a:r>
+              <a:rPr lang="en-US" dirty="0"/>
+              <a:t>Pom – adding dependencies </a:t>
+            </a:r>
+          </a:p>
+        </p:txBody>
+      </p:sp>
+      <p:pic>
+        <p:nvPicPr>
+          <p:cNvPr id="11" name="Picture 10">
+            <a:extLst>
+              <a:ext uri="{FF2B5EF4-FFF2-40B4-BE49-F238E27FC236}">
+                <a16:creationId xmlns:a16="http://schemas.microsoft.com/office/drawing/2014/main" id="{55550104-76E1-F099-F993-9549E58193C6}"/>
+              </a:ext>
+            </a:extLst>
+          </p:cNvPr>
+          <p:cNvPicPr>
+            <a:picLocks noChangeAspect="1"/>
+          </p:cNvPicPr>
+          <p:nvPr/>
+        </p:nvPicPr>
+        <p:blipFill>
+          <a:blip r:embed="rId2"/>
+          <a:stretch>
+            <a:fillRect/>
+          </a:stretch>
+        </p:blipFill>
+        <p:spPr>
+          <a:xfrm>
+            <a:off x="4595750" y="2062921"/>
+            <a:ext cx="6895940" cy="4361131"/>
+          </a:xfrm>
+          <a:prstGeom prst="rect">
+            <a:avLst/>
+          </a:prstGeom>
+        </p:spPr>
+      </p:pic>
+      <p:sp>
+        <p:nvSpPr>
+          <p:cNvPr id="12" name="TextBox 11">
+            <a:extLst>
+              <a:ext uri="{FF2B5EF4-FFF2-40B4-BE49-F238E27FC236}">
+                <a16:creationId xmlns:a16="http://schemas.microsoft.com/office/drawing/2014/main" id="{772B48A9-3F31-A30F-7522-338533B065CE}"/>
+              </a:ext>
+            </a:extLst>
+          </p:cNvPr>
+          <p:cNvSpPr txBox="1"/>
+          <p:nvPr/>
+        </p:nvSpPr>
+        <p:spPr>
+          <a:xfrm>
+            <a:off x="581192" y="3366323"/>
+            <a:ext cx="3610798" cy="1754326"/>
+          </a:xfrm>
+          <a:prstGeom prst="rect">
+            <a:avLst/>
+          </a:prstGeom>
+          <a:noFill/>
+        </p:spPr>
+        <p:txBody>
+          <a:bodyPr wrap="square" rtlCol="0">
+            <a:spAutoFit/>
+          </a:bodyPr>
+          <a:lstStyle/>
+          <a:p>
+            <a:r>
+              <a:rPr lang="en-US" dirty="0"/>
+              <a:t>Note: this exact library/artifact will be used in an upcoming demo</a:t>
+            </a:r>
+          </a:p>
+          <a:p>
+            <a:endParaRPr lang="en-US" dirty="0"/>
+          </a:p>
+          <a:p>
+            <a:r>
+              <a:rPr lang="en-US" dirty="0"/>
+              <a:t>In IntelliJ, you may need to sync Maven from the UI to download and begin using the artifact</a:t>
+            </a:r>
+          </a:p>
+        </p:txBody>
+      </p:sp>
+    </p:spTree>
+    <p:extLst>
+      <p:ext uri="{BB962C8B-B14F-4D97-AF65-F5344CB8AC3E}">
+        <p14:creationId xmlns:p14="http://schemas.microsoft.com/office/powerpoint/2010/main" val="2236934115"/>
+      </p:ext>
+    </p:extLst>
+  </p:cSld>
+  <p:clrMapOvr>
+    <a:masterClrMapping/>
+  </p:clrMapOvr>
+</p:sld>
+</file>
+
+<file path=ppt/slides/slide63.xml><?xml version="1.0" encoding="utf-8"?>
+<p:sld xmlns:a="http://schemas.openxmlformats.org/drawingml/2006/main" xmlns:r="http://schemas.openxmlformats.org/officeDocument/2006/relationships" xmlns:p="http://schemas.openxmlformats.org/presentationml/2006/main">
+  <p:cSld>
+    <p:spTree>
+      <p:nvGrpSpPr>
+        <p:cNvPr id="1" name=""/>
+        <p:cNvGrpSpPr/>
+        <p:nvPr/>
+      </p:nvGrpSpPr>
+      <p:grpSpPr>
+        <a:xfrm>
+          <a:off x="0" y="0"/>
+          <a:ext cx="0" cy="0"/>
+          <a:chOff x="0" y="0"/>
+          <a:chExt cx="0" cy="0"/>
+        </a:xfrm>
+      </p:grpSpPr>
+      <p:sp>
+        <p:nvSpPr>
+          <p:cNvPr id="2" name="Title 1">
+            <a:extLst>
+              <a:ext uri="{FF2B5EF4-FFF2-40B4-BE49-F238E27FC236}">
+                <a16:creationId xmlns:a16="http://schemas.microsoft.com/office/drawing/2014/main" id="{BDA7BFD5-E9A0-2595-04D5-2DEA68B82113}"/>
+              </a:ext>
+            </a:extLst>
+          </p:cNvPr>
+          <p:cNvSpPr>
+            <a:spLocks noGrp="1"/>
+          </p:cNvSpPr>
+          <p:nvPr>
+            <p:ph type="title"/>
+          </p:nvPr>
+        </p:nvSpPr>
+        <p:spPr/>
+        <p:txBody>
+          <a:bodyPr/>
+          <a:lstStyle/>
+          <a:p>
+            <a:r>
+              <a:rPr lang="en-US" dirty="0"/>
+              <a:t>Maven Central</a:t>
+            </a:r>
+          </a:p>
+        </p:txBody>
+      </p:sp>
+      <p:sp>
+        <p:nvSpPr>
+          <p:cNvPr id="3" name="Content Placeholder 2">
+            <a:extLst>
+              <a:ext uri="{FF2B5EF4-FFF2-40B4-BE49-F238E27FC236}">
+                <a16:creationId xmlns:a16="http://schemas.microsoft.com/office/drawing/2014/main" id="{71AC223F-2623-A4B1-244B-927BA00232E2}"/>
+              </a:ext>
+            </a:extLst>
+          </p:cNvPr>
+          <p:cNvSpPr>
+            <a:spLocks noGrp="1"/>
+          </p:cNvSpPr>
+          <p:nvPr>
+            <p:ph idx="1"/>
+          </p:nvPr>
+        </p:nvSpPr>
+        <p:spPr>
+          <a:xfrm>
+            <a:off x="7432157" y="2180496"/>
+            <a:ext cx="4178649" cy="3678303"/>
+          </a:xfrm>
+        </p:spPr>
+        <p:txBody>
+          <a:bodyPr/>
+          <a:lstStyle/>
+          <a:p>
+            <a:r>
+              <a:rPr lang="en-US" dirty="0"/>
+              <a:t>The Maven Central repository is where libraries live</a:t>
+            </a:r>
+          </a:p>
+          <a:p>
+            <a:r>
+              <a:rPr lang="en-US" dirty="0"/>
+              <a:t>There are a handful of websites that essentially just add a layer to browse Maven Central</a:t>
+            </a:r>
+          </a:p>
+        </p:txBody>
+      </p:sp>
+      <p:pic>
+        <p:nvPicPr>
+          <p:cNvPr id="5" name="Picture 4">
+            <a:extLst>
+              <a:ext uri="{FF2B5EF4-FFF2-40B4-BE49-F238E27FC236}">
+                <a16:creationId xmlns:a16="http://schemas.microsoft.com/office/drawing/2014/main" id="{5A220CA8-321F-05D8-629B-C51A16901DC7}"/>
+              </a:ext>
+            </a:extLst>
+          </p:cNvPr>
+          <p:cNvPicPr>
+            <a:picLocks noChangeAspect="1"/>
+          </p:cNvPicPr>
+          <p:nvPr/>
+        </p:nvPicPr>
+        <p:blipFill>
+          <a:blip r:embed="rId2"/>
+          <a:stretch>
+            <a:fillRect/>
+          </a:stretch>
+        </p:blipFill>
+        <p:spPr>
+          <a:xfrm>
+            <a:off x="581192" y="2588989"/>
+            <a:ext cx="6411220" cy="2553056"/>
+          </a:xfrm>
+          <a:prstGeom prst="rect">
+            <a:avLst/>
+          </a:prstGeom>
+        </p:spPr>
+      </p:pic>
+    </p:spTree>
+    <p:extLst>
+      <p:ext uri="{BB962C8B-B14F-4D97-AF65-F5344CB8AC3E}">
+        <p14:creationId xmlns:p14="http://schemas.microsoft.com/office/powerpoint/2010/main" val="1799112410"/>
+      </p:ext>
+    </p:extLst>
+  </p:cSld>
+  <p:clrMapOvr>
+    <a:masterClrMapping/>
+  </p:clrMapOvr>
+</p:sld>
+</file>
+
+<file path=ppt/slides/slide64.xml><?xml version="1.0" encoding="utf-8"?>
+<p:sld xmlns:a="http://schemas.openxmlformats.org/drawingml/2006/main" xmlns:r="http://schemas.openxmlformats.org/officeDocument/2006/relationships" xmlns:p="http://schemas.openxmlformats.org/presentationml/2006/main">
+  <p:cSld>
+    <p:spTree>
+      <p:nvGrpSpPr>
+        <p:cNvPr id="1" name=""/>
+        <p:cNvGrpSpPr/>
+        <p:nvPr/>
+      </p:nvGrpSpPr>
+      <p:grpSpPr>
+        <a:xfrm>
+          <a:off x="0" y="0"/>
+          <a:ext cx="0" cy="0"/>
+          <a:chOff x="0" y="0"/>
+          <a:chExt cx="0" cy="0"/>
+        </a:xfrm>
+      </p:grpSpPr>
+      <p:sp>
+        <p:nvSpPr>
+          <p:cNvPr id="2" name="Title 1">
+            <a:extLst>
+              <a:ext uri="{FF2B5EF4-FFF2-40B4-BE49-F238E27FC236}">
+                <a16:creationId xmlns:a16="http://schemas.microsoft.com/office/drawing/2014/main" id="{12A80310-CC28-27BC-44D2-4ED1C675403D}"/>
+              </a:ext>
+            </a:extLst>
+          </p:cNvPr>
+          <p:cNvSpPr>
+            <a:spLocks noGrp="1"/>
+          </p:cNvSpPr>
+          <p:nvPr>
+            <p:ph type="title"/>
+          </p:nvPr>
+        </p:nvSpPr>
+        <p:spPr/>
+        <p:txBody>
+          <a:bodyPr/>
+          <a:lstStyle/>
+          <a:p>
+            <a:r>
+              <a:rPr lang="en-US" dirty="0"/>
+              <a:t>Maven Lifecycle</a:t>
+            </a:r>
+          </a:p>
+        </p:txBody>
+      </p:sp>
+      <p:sp>
+        <p:nvSpPr>
+          <p:cNvPr id="3" name="Content Placeholder 2">
+            <a:extLst>
+              <a:ext uri="{FF2B5EF4-FFF2-40B4-BE49-F238E27FC236}">
+                <a16:creationId xmlns:a16="http://schemas.microsoft.com/office/drawing/2014/main" id="{50BC5055-18C2-77F4-C2A5-51543DC31580}"/>
+              </a:ext>
+            </a:extLst>
+          </p:cNvPr>
+          <p:cNvSpPr>
+            <a:spLocks noGrp="1"/>
+          </p:cNvSpPr>
+          <p:nvPr>
+            <p:ph idx="1"/>
+          </p:nvPr>
+        </p:nvSpPr>
+        <p:spPr>
+          <a:xfrm>
+            <a:off x="581192" y="1963907"/>
+            <a:ext cx="11029615" cy="3678303"/>
+          </a:xfrm>
+        </p:spPr>
+        <p:txBody>
+          <a:bodyPr/>
+          <a:lstStyle/>
+          <a:p>
+            <a:r>
+              <a:rPr lang="en-US" dirty="0"/>
+              <a:t>You may hear these referred to as phases:</a:t>
+            </a:r>
+          </a:p>
+          <a:p>
+            <a:r>
+              <a:rPr lang="en-US" dirty="0"/>
+              <a:t>Validate – Checks that the project is valid and ready to be built</a:t>
+            </a:r>
+          </a:p>
+          <a:p>
+            <a:r>
+              <a:rPr lang="en-US" dirty="0"/>
+              <a:t>Compile – compiles your main Java source into bytecode</a:t>
+            </a:r>
+          </a:p>
+          <a:p>
+            <a:r>
+              <a:rPr lang="en-US" dirty="0"/>
+              <a:t>Test – compiles your test code and runs your tests</a:t>
+            </a:r>
+          </a:p>
+          <a:p>
+            <a:r>
+              <a:rPr lang="en-US" dirty="0"/>
+              <a:t>Package – takes the compiled application and packages it into its distributable format i.e. likely a .jar</a:t>
+            </a:r>
+          </a:p>
+          <a:p>
+            <a:r>
+              <a:rPr lang="en-US" dirty="0"/>
+              <a:t>Verify – runs checks that verify the packaged project meets additional quality/integration requirements. E.g. plugins may run integration tests</a:t>
+            </a:r>
+          </a:p>
+          <a:p>
+            <a:r>
+              <a:rPr lang="en-US" dirty="0"/>
+              <a:t>Install – installs your built artifact into your local Maven repository </a:t>
+            </a:r>
+          </a:p>
+          <a:p>
+            <a:r>
+              <a:rPr lang="en-US" dirty="0"/>
+              <a:t>Deploy – publishes the artifact to a remote Maven repository </a:t>
+            </a:r>
+          </a:p>
+        </p:txBody>
+      </p:sp>
+      <p:sp>
+        <p:nvSpPr>
+          <p:cNvPr id="4" name="TextBox 3">
+            <a:extLst>
+              <a:ext uri="{FF2B5EF4-FFF2-40B4-BE49-F238E27FC236}">
+                <a16:creationId xmlns:a16="http://schemas.microsoft.com/office/drawing/2014/main" id="{D973AB55-C6A1-4587-4079-27E9DB75532C}"/>
+              </a:ext>
+            </a:extLst>
+          </p:cNvPr>
+          <p:cNvSpPr txBox="1"/>
+          <p:nvPr/>
+        </p:nvSpPr>
+        <p:spPr>
+          <a:xfrm>
+            <a:off x="929841" y="5832678"/>
+            <a:ext cx="10332316" cy="646331"/>
+          </a:xfrm>
+          <a:prstGeom prst="rect">
+            <a:avLst/>
+          </a:prstGeom>
+          <a:noFill/>
+        </p:spPr>
+        <p:txBody>
+          <a:bodyPr wrap="none" rtlCol="0">
+            <a:spAutoFit/>
+          </a:bodyPr>
+          <a:lstStyle/>
+          <a:p>
+            <a:r>
+              <a:rPr lang="en-US" dirty="0"/>
+              <a:t>Plugins – a Maven plugin is a collection of executable build functionality that Maven can use to perform tasks </a:t>
+            </a:r>
+          </a:p>
+          <a:p>
+            <a:r>
+              <a:rPr lang="en-US" dirty="0"/>
+              <a:t>Plugin Goals – a specific action a plugin knows how to perform</a:t>
+            </a:r>
+          </a:p>
+        </p:txBody>
+      </p:sp>
+    </p:spTree>
+    <p:extLst>
+      <p:ext uri="{BB962C8B-B14F-4D97-AF65-F5344CB8AC3E}">
+        <p14:creationId xmlns:p14="http://schemas.microsoft.com/office/powerpoint/2010/main" val="4241576209"/>
+      </p:ext>
+    </p:extLst>
+  </p:cSld>
+  <p:clrMapOvr>
+    <a:masterClrMapping/>
+  </p:clrMapOvr>
+</p:sld>
+</file>
+
+<file path=ppt/slides/slide65.xml><?xml version="1.0" encoding="utf-8"?>
+<p:sld xmlns:a="http://schemas.openxmlformats.org/drawingml/2006/main" xmlns:r="http://schemas.openxmlformats.org/officeDocument/2006/relationships" xmlns:p="http://schemas.openxmlformats.org/presentationml/2006/main">
+  <p:cSld>
+    <p:spTree>
+      <p:nvGrpSpPr>
+        <p:cNvPr id="1" name=""/>
+        <p:cNvGrpSpPr/>
+        <p:nvPr/>
+      </p:nvGrpSpPr>
+      <p:grpSpPr>
+        <a:xfrm>
+          <a:off x="0" y="0"/>
+          <a:ext cx="0" cy="0"/>
+          <a:chOff x="0" y="0"/>
+          <a:chExt cx="0" cy="0"/>
+        </a:xfrm>
+      </p:grpSpPr>
+      <p:sp>
+        <p:nvSpPr>
+          <p:cNvPr id="2" name="Title 1">
+            <a:extLst>
+              <a:ext uri="{FF2B5EF4-FFF2-40B4-BE49-F238E27FC236}">
+                <a16:creationId xmlns:a16="http://schemas.microsoft.com/office/drawing/2014/main" id="{4C5248C6-B388-F7BF-B595-532F5655FBE6}"/>
+              </a:ext>
+            </a:extLst>
+          </p:cNvPr>
+          <p:cNvSpPr>
+            <a:spLocks noGrp="1"/>
+          </p:cNvSpPr>
+          <p:nvPr>
+            <p:ph type="title"/>
+          </p:nvPr>
+        </p:nvSpPr>
+        <p:spPr/>
+        <p:txBody>
+          <a:bodyPr/>
+          <a:lstStyle/>
+          <a:p>
+            <a:r>
+              <a:rPr lang="en-US" dirty="0"/>
+              <a:t>Putting it together</a:t>
+            </a:r>
+          </a:p>
+        </p:txBody>
+      </p:sp>
+      <p:sp>
+        <p:nvSpPr>
+          <p:cNvPr id="3" name="Content Placeholder 2">
+            <a:extLst>
+              <a:ext uri="{FF2B5EF4-FFF2-40B4-BE49-F238E27FC236}">
+                <a16:creationId xmlns:a16="http://schemas.microsoft.com/office/drawing/2014/main" id="{6DDC93F8-4689-041F-0EAF-46A457B4FEAA}"/>
+              </a:ext>
+            </a:extLst>
+          </p:cNvPr>
+          <p:cNvSpPr>
+            <a:spLocks noGrp="1"/>
+          </p:cNvSpPr>
+          <p:nvPr>
+            <p:ph idx="1"/>
+          </p:nvPr>
+        </p:nvSpPr>
+        <p:spPr>
+          <a:xfrm>
+            <a:off x="3941107" y="2233658"/>
+            <a:ext cx="4309785" cy="3678303"/>
+          </a:xfrm>
+        </p:spPr>
+        <p:txBody>
+          <a:bodyPr>
+            <a:normAutofit/>
+          </a:bodyPr>
+          <a:lstStyle/>
+          <a:p>
+            <a:pPr marL="0" indent="0" algn="ctr">
+              <a:buNone/>
+            </a:pPr>
+            <a:r>
+              <a:rPr lang="en-US" dirty="0" err="1"/>
+              <a:t>mvn</a:t>
+            </a:r>
+            <a:r>
+              <a:rPr lang="en-US" dirty="0"/>
+              <a:t> package</a:t>
+            </a:r>
+          </a:p>
+          <a:p>
+            <a:pPr marL="0" indent="0" algn="ctr">
+              <a:buNone/>
+            </a:pPr>
+            <a:r>
+              <a:rPr lang="en-US" dirty="0"/>
+              <a:t>     ↓</a:t>
+            </a:r>
+          </a:p>
+          <a:p>
+            <a:pPr marL="0" indent="0" algn="ctr">
+              <a:buNone/>
+            </a:pPr>
+            <a:r>
+              <a:rPr lang="en-US" dirty="0"/>
+              <a:t>package PHASE</a:t>
+            </a:r>
+          </a:p>
+          <a:p>
+            <a:pPr marL="0" indent="0" algn="ctr">
+              <a:buNone/>
+            </a:pPr>
+            <a:r>
+              <a:rPr lang="en-US" dirty="0"/>
+              <a:t>     ↓</a:t>
+            </a:r>
+          </a:p>
+          <a:p>
+            <a:pPr marL="0" indent="0" algn="ctr">
+              <a:buNone/>
+            </a:pPr>
+            <a:r>
+              <a:rPr lang="en-US" dirty="0"/>
+              <a:t>JAR-related plugin</a:t>
+            </a:r>
+          </a:p>
+          <a:p>
+            <a:pPr marL="0" indent="0" algn="ctr">
+              <a:buNone/>
+            </a:pPr>
+            <a:r>
+              <a:rPr lang="en-US" dirty="0"/>
+              <a:t>     ↓</a:t>
+            </a:r>
+          </a:p>
+          <a:p>
+            <a:pPr marL="0" indent="0" algn="ctr">
+              <a:buNone/>
+            </a:pPr>
+            <a:r>
+              <a:rPr lang="en-US" dirty="0"/>
+              <a:t>JAR creation goal</a:t>
+            </a:r>
+          </a:p>
+          <a:p>
+            <a:pPr marL="0" indent="0" algn="ctr">
+              <a:buNone/>
+            </a:pPr>
+            <a:r>
+              <a:rPr lang="en-US" dirty="0"/>
+              <a:t>     ↓</a:t>
+            </a:r>
+          </a:p>
+          <a:p>
+            <a:pPr marL="0" indent="0" algn="ctr">
+              <a:buNone/>
+            </a:pPr>
+            <a:r>
+              <a:rPr lang="en-US" dirty="0"/>
+              <a:t>my-app.jar</a:t>
+            </a:r>
+          </a:p>
+        </p:txBody>
+      </p:sp>
+    </p:spTree>
+    <p:extLst>
+      <p:ext uri="{BB962C8B-B14F-4D97-AF65-F5344CB8AC3E}">
+        <p14:creationId xmlns:p14="http://schemas.microsoft.com/office/powerpoint/2010/main" val="4122241870"/>
+      </p:ext>
+    </p:extLst>
+  </p:cSld>
+  <p:clrMapOvr>
+    <a:masterClrMapping/>
+  </p:clrMapOvr>
+</p:sld>
+</file>
+
+<file path=ppt/slides/slide66.xml><?xml version="1.0" encoding="utf-8"?>
+<p:sld xmlns:a="http://schemas.openxmlformats.org/drawingml/2006/main" xmlns:r="http://schemas.openxmlformats.org/officeDocument/2006/relationships" xmlns:p="http://schemas.openxmlformats.org/presentationml/2006/main">
+  <p:cSld>
+    <p:spTree>
+      <p:nvGrpSpPr>
+        <p:cNvPr id="1" name=""/>
+        <p:cNvGrpSpPr/>
+        <p:nvPr/>
+      </p:nvGrpSpPr>
+      <p:grpSpPr>
+        <a:xfrm>
+          <a:off x="0" y="0"/>
+          <a:ext cx="0" cy="0"/>
+          <a:chOff x="0" y="0"/>
+          <a:chExt cx="0" cy="0"/>
+        </a:xfrm>
+      </p:grpSpPr>
+      <p:sp>
+        <p:nvSpPr>
+          <p:cNvPr id="2" name="Title 1">
+            <a:extLst>
+              <a:ext uri="{FF2B5EF4-FFF2-40B4-BE49-F238E27FC236}">
+                <a16:creationId xmlns:a16="http://schemas.microsoft.com/office/drawing/2014/main" id="{0D78C3E1-7737-CBA8-E068-6749F82B0341}"/>
+              </a:ext>
+            </a:extLst>
+          </p:cNvPr>
+          <p:cNvSpPr>
+            <a:spLocks noGrp="1"/>
+          </p:cNvSpPr>
+          <p:nvPr>
+            <p:ph type="title"/>
+          </p:nvPr>
+        </p:nvSpPr>
+        <p:spPr/>
+        <p:txBody>
+          <a:bodyPr/>
+          <a:lstStyle/>
+          <a:p>
+            <a:r>
+              <a:rPr lang="en-US" dirty="0"/>
+              <a:t>Using a library</a:t>
+            </a:r>
+          </a:p>
+        </p:txBody>
+      </p:sp>
+      <p:sp>
+        <p:nvSpPr>
+          <p:cNvPr id="3" name="Content Placeholder 2">
+            <a:extLst>
+              <a:ext uri="{FF2B5EF4-FFF2-40B4-BE49-F238E27FC236}">
+                <a16:creationId xmlns:a16="http://schemas.microsoft.com/office/drawing/2014/main" id="{9469A797-F642-E265-B7F7-83E612E5A7AA}"/>
+              </a:ext>
+            </a:extLst>
+          </p:cNvPr>
+          <p:cNvSpPr>
+            <a:spLocks noGrp="1"/>
+          </p:cNvSpPr>
+          <p:nvPr>
+            <p:ph idx="1"/>
+          </p:nvPr>
+        </p:nvSpPr>
+        <p:spPr/>
+        <p:txBody>
+          <a:bodyPr/>
+          <a:lstStyle/>
+          <a:p>
+            <a:r>
+              <a:rPr lang="en-US" dirty="0"/>
+              <a:t>Please see ‘MavenDemo.java’ in your course materials</a:t>
+            </a:r>
+          </a:p>
+        </p:txBody>
+      </p:sp>
+    </p:spTree>
+    <p:extLst>
+      <p:ext uri="{BB962C8B-B14F-4D97-AF65-F5344CB8AC3E}">
+        <p14:creationId xmlns:p14="http://schemas.microsoft.com/office/powerpoint/2010/main" val="3837193662"/>
+      </p:ext>
+    </p:extLst>
+  </p:cSld>
+  <p:clrMapOvr>
+    <a:masterClrMapping/>
+  </p:clrMapOvr>
+</p:sld>
+</file>
+
+<file path=ppt/slides/slide67.xml><?xml version="1.0" encoding="utf-8"?>
+<p:sld xmlns:a="http://schemas.openxmlformats.org/drawingml/2006/main" xmlns:r="http://schemas.openxmlformats.org/officeDocument/2006/relationships" xmlns:p="http://schemas.openxmlformats.org/presentationml/2006/main">
+  <p:cSld>
+    <p:spTree>
+      <p:nvGrpSpPr>
+        <p:cNvPr id="1" name=""/>
+        <p:cNvGrpSpPr/>
+        <p:nvPr/>
+      </p:nvGrpSpPr>
+      <p:grpSpPr>
+        <a:xfrm>
+          <a:off x="0" y="0"/>
+          <a:ext cx="0" cy="0"/>
+          <a:chOff x="0" y="0"/>
+          <a:chExt cx="0" cy="0"/>
+        </a:xfrm>
+      </p:grpSpPr>
+      <p:sp>
+        <p:nvSpPr>
+          <p:cNvPr id="2" name="Title 1">
+            <a:extLst>
+              <a:ext uri="{FF2B5EF4-FFF2-40B4-BE49-F238E27FC236}">
+                <a16:creationId xmlns:a16="http://schemas.microsoft.com/office/drawing/2014/main" id="{9D2470A2-FB05-AE1B-AE88-FA789293B1F1}"/>
+              </a:ext>
+            </a:extLst>
+          </p:cNvPr>
+          <p:cNvSpPr>
+            <a:spLocks noGrp="1"/>
+          </p:cNvSpPr>
+          <p:nvPr>
+            <p:ph type="title"/>
+          </p:nvPr>
+        </p:nvSpPr>
+        <p:spPr/>
+        <p:txBody>
+          <a:bodyPr/>
+          <a:lstStyle/>
+          <a:p>
+            <a:r>
+              <a:rPr lang="en-US" dirty="0"/>
+              <a:t>The Reflection API</a:t>
+            </a:r>
+          </a:p>
+        </p:txBody>
+      </p:sp>
+      <p:sp>
+        <p:nvSpPr>
+          <p:cNvPr id="3" name="Content Placeholder 2">
+            <a:extLst>
+              <a:ext uri="{FF2B5EF4-FFF2-40B4-BE49-F238E27FC236}">
+                <a16:creationId xmlns:a16="http://schemas.microsoft.com/office/drawing/2014/main" id="{5C74899E-091B-905A-0988-180C23FA754E}"/>
+              </a:ext>
+            </a:extLst>
+          </p:cNvPr>
+          <p:cNvSpPr>
+            <a:spLocks noGrp="1"/>
+          </p:cNvSpPr>
+          <p:nvPr>
+            <p:ph idx="1"/>
+          </p:nvPr>
+        </p:nvSpPr>
+        <p:spPr>
+          <a:xfrm>
+            <a:off x="581192" y="2180496"/>
+            <a:ext cx="11029615" cy="4220304"/>
+          </a:xfrm>
+        </p:spPr>
+        <p:txBody>
+          <a:bodyPr/>
+          <a:lstStyle/>
+          <a:p>
+            <a:r>
+              <a:rPr lang="en-US" dirty="0"/>
+              <a:t>Reflection in Java is a feature that allows a program to examine and manipulate its own structure, behavior, and metadata at runtime. </a:t>
+            </a:r>
+          </a:p>
+          <a:p>
+            <a:r>
+              <a:rPr lang="en-US" dirty="0"/>
+              <a:t>It provides a way to inspect and modify classes, interfaces, fields, methods, and constructors at runtime, even if they are private or inaccessible through normal means. </a:t>
+            </a:r>
+          </a:p>
+          <a:p>
+            <a:r>
+              <a:rPr lang="en-US" dirty="0"/>
+              <a:t>Reflection is particularly useful for building generic code, implementing frameworks, and writing debugging tools. The API can be found in the </a:t>
+            </a:r>
+            <a:r>
+              <a:rPr lang="en-US" dirty="0" err="1"/>
+              <a:t>java.lang.reflect</a:t>
+            </a:r>
+            <a:r>
+              <a:rPr lang="en-US" dirty="0"/>
+              <a:t> package.</a:t>
+            </a:r>
+          </a:p>
+          <a:p>
+            <a:r>
+              <a:rPr lang="en-US" dirty="0"/>
+              <a:t>Frameworks like Spring use reflection heavily to discover annotations, create objects, inject dependencies, and call methods without the application code explicitly wiring everything together.</a:t>
+            </a:r>
+          </a:p>
+          <a:p>
+            <a:r>
+              <a:rPr lang="en-US" dirty="0"/>
+              <a:t>For the purposes of this course, and for preparing for interviews, we really just need to know all the above – no one is expecting you to create your own framework.</a:t>
+            </a:r>
+          </a:p>
+        </p:txBody>
+      </p:sp>
+    </p:spTree>
+    <p:extLst>
+      <p:ext uri="{BB962C8B-B14F-4D97-AF65-F5344CB8AC3E}">
+        <p14:creationId xmlns:p14="http://schemas.microsoft.com/office/powerpoint/2010/main" val="2833243274"/>
+      </p:ext>
+    </p:extLst>
+  </p:cSld>
+  <p:clrMapOvr>
+    <a:masterClrMapping/>
+  </p:clrMapOvr>
+</p:sld>
+</file>
+
+<file path=ppt/slides/slide68.xml><?xml version="1.0" encoding="utf-8"?>
+<p:sld xmlns:a="http://schemas.openxmlformats.org/drawingml/2006/main" xmlns:r="http://schemas.openxmlformats.org/officeDocument/2006/relationships" xmlns:p="http://schemas.openxmlformats.org/presentationml/2006/main">
+  <p:cSld>
+    <p:spTree>
+      <p:nvGrpSpPr>
+        <p:cNvPr id="1" name="">
+          <a:extLst>
+            <a:ext uri="{FF2B5EF4-FFF2-40B4-BE49-F238E27FC236}">
+              <a16:creationId xmlns:a16="http://schemas.microsoft.com/office/drawing/2014/main" id="{F2599CD4-C392-C9B0-9FDC-AE84E3208186}"/>
+            </a:ext>
+          </a:extLst>
+        </p:cNvPr>
+        <p:cNvGrpSpPr/>
+        <p:nvPr/>
+      </p:nvGrpSpPr>
+      <p:grpSpPr>
+        <a:xfrm>
+          <a:off x="0" y="0"/>
+          <a:ext cx="0" cy="0"/>
+          <a:chOff x="0" y="0"/>
+          <a:chExt cx="0" cy="0"/>
+        </a:xfrm>
+      </p:grpSpPr>
+      <p:sp>
+        <p:nvSpPr>
+          <p:cNvPr id="2" name="Title 1">
+            <a:extLst>
+              <a:ext uri="{FF2B5EF4-FFF2-40B4-BE49-F238E27FC236}">
+                <a16:creationId xmlns:a16="http://schemas.microsoft.com/office/drawing/2014/main" id="{C9092048-0C6A-E243-E624-B8FF0770F0D7}"/>
+              </a:ext>
+            </a:extLst>
+          </p:cNvPr>
+          <p:cNvSpPr>
+            <a:spLocks noGrp="1"/>
+          </p:cNvSpPr>
+          <p:nvPr>
+            <p:ph type="title"/>
+          </p:nvPr>
+        </p:nvSpPr>
+        <p:spPr/>
+        <p:txBody>
+          <a:bodyPr/>
+          <a:lstStyle/>
+          <a:p>
+            <a:r>
+              <a:rPr lang="en-US" dirty="0"/>
+              <a:t>Challenges – </a:t>
+            </a:r>
+            <a:r>
+              <a:rPr lang="en-US" dirty="0" err="1"/>
+              <a:t>DateTime</a:t>
+            </a:r>
+            <a:r>
+              <a:rPr lang="en-US" dirty="0"/>
+              <a:t> API</a:t>
+            </a:r>
+          </a:p>
+        </p:txBody>
+      </p:sp>
+      <p:sp>
+        <p:nvSpPr>
+          <p:cNvPr id="7" name="TextBox 6">
+            <a:extLst>
+              <a:ext uri="{FF2B5EF4-FFF2-40B4-BE49-F238E27FC236}">
+                <a16:creationId xmlns:a16="http://schemas.microsoft.com/office/drawing/2014/main" id="{4BE78CFF-0D12-9C18-C2AA-F68EBA310EF0}"/>
+              </a:ext>
+            </a:extLst>
+          </p:cNvPr>
+          <p:cNvSpPr txBox="1"/>
+          <p:nvPr/>
+        </p:nvSpPr>
+        <p:spPr>
+          <a:xfrm>
+            <a:off x="581192" y="2327591"/>
+            <a:ext cx="5028381" cy="369332"/>
+          </a:xfrm>
+          <a:prstGeom prst="rect">
+            <a:avLst/>
+          </a:prstGeom>
+          <a:noFill/>
+        </p:spPr>
+        <p:txBody>
+          <a:bodyPr wrap="square" rtlCol="0">
+            <a:spAutoFit/>
+          </a:bodyPr>
+          <a:lstStyle/>
+          <a:p>
+            <a:r>
+              <a:rPr lang="en-US" b="1" dirty="0"/>
+              <a:t>Tasks:  			   </a:t>
+            </a:r>
+          </a:p>
+        </p:txBody>
+      </p:sp>
+      <p:sp>
+        <p:nvSpPr>
+          <p:cNvPr id="4" name="TextBox 3">
+            <a:extLst>
+              <a:ext uri="{FF2B5EF4-FFF2-40B4-BE49-F238E27FC236}">
+                <a16:creationId xmlns:a16="http://schemas.microsoft.com/office/drawing/2014/main" id="{5E379B9A-E4AE-3033-9058-3EB3765050C3}"/>
+              </a:ext>
+            </a:extLst>
+          </p:cNvPr>
+          <p:cNvSpPr txBox="1"/>
+          <p:nvPr/>
+        </p:nvSpPr>
+        <p:spPr>
+          <a:xfrm>
+            <a:off x="581192" y="2813135"/>
+            <a:ext cx="6097044" cy="2062103"/>
+          </a:xfrm>
+          <a:prstGeom prst="rect">
+            <a:avLst/>
+          </a:prstGeom>
+          <a:noFill/>
+        </p:spPr>
+        <p:txBody>
+          <a:bodyPr wrap="square">
+            <a:spAutoFit/>
+          </a:bodyPr>
+          <a:lstStyle/>
+          <a:p>
+            <a:pPr marL="342900" indent="-342900">
+              <a:buAutoNum type="arabicPeriod"/>
+            </a:pPr>
+            <a:r>
+              <a:rPr lang="en-US" sz="1600" dirty="0"/>
+              <a:t>Write a program that prints:</a:t>
+            </a:r>
+          </a:p>
+          <a:p>
+            <a:pPr marL="800100" lvl="1" indent="-342900">
+              <a:buAutoNum type="arabicPeriod"/>
+            </a:pPr>
+            <a:r>
+              <a:rPr lang="en-US" sz="1600" dirty="0"/>
+              <a:t>Today’s date</a:t>
+            </a:r>
+          </a:p>
+          <a:p>
+            <a:pPr marL="800100" lvl="1" indent="-342900">
+              <a:buAutoNum type="arabicPeriod"/>
+            </a:pPr>
+            <a:r>
+              <a:rPr lang="en-US" sz="1600" dirty="0"/>
+              <a:t>The current year</a:t>
+            </a:r>
+          </a:p>
+          <a:p>
+            <a:pPr marL="800100" lvl="1" indent="-342900">
+              <a:buAutoNum type="arabicPeriod"/>
+            </a:pPr>
+            <a:r>
+              <a:rPr lang="en-US" sz="1600" dirty="0"/>
+              <a:t>The current month</a:t>
+            </a:r>
+          </a:p>
+          <a:p>
+            <a:pPr marL="800100" lvl="1" indent="-342900">
+              <a:buAutoNum type="arabicPeriod"/>
+            </a:pPr>
+            <a:r>
+              <a:rPr lang="en-US" sz="1600" dirty="0"/>
+              <a:t>The current day of the month</a:t>
+            </a:r>
+          </a:p>
+          <a:p>
+            <a:pPr marL="342900" indent="-342900">
+              <a:buAutoNum type="arabicPeriod"/>
+            </a:pPr>
+            <a:r>
+              <a:rPr lang="en-US" sz="1600" dirty="0"/>
+              <a:t>Calculate your Age.</a:t>
+            </a:r>
+          </a:p>
+          <a:p>
+            <a:pPr marL="342900" indent="-342900">
+              <a:buAutoNum type="arabicPeriod"/>
+            </a:pPr>
+            <a:r>
+              <a:rPr lang="en-US" sz="1600" dirty="0"/>
+              <a:t>Days until your birthday.</a:t>
+            </a:r>
+          </a:p>
+          <a:p>
+            <a:pPr marL="342900" indent="-342900">
+              <a:buAutoNum type="arabicPeriod"/>
+            </a:pPr>
+            <a:endParaRPr lang="en-US" sz="1600" dirty="0"/>
+          </a:p>
+        </p:txBody>
+      </p:sp>
+      <p:sp>
+        <p:nvSpPr>
+          <p:cNvPr id="5" name="TextBox 4">
+            <a:extLst>
+              <a:ext uri="{FF2B5EF4-FFF2-40B4-BE49-F238E27FC236}">
+                <a16:creationId xmlns:a16="http://schemas.microsoft.com/office/drawing/2014/main" id="{B6038B82-A896-100F-0757-2AFA1C909D45}"/>
+              </a:ext>
+            </a:extLst>
+          </p:cNvPr>
+          <p:cNvSpPr txBox="1"/>
+          <p:nvPr/>
+        </p:nvSpPr>
+        <p:spPr>
+          <a:xfrm>
+            <a:off x="6096000" y="2961866"/>
+            <a:ext cx="2662557" cy="1200329"/>
+          </a:xfrm>
+          <a:prstGeom prst="rect">
+            <a:avLst/>
+          </a:prstGeom>
+          <a:noFill/>
+        </p:spPr>
+        <p:txBody>
+          <a:bodyPr wrap="square">
+            <a:spAutoFit/>
+          </a:bodyPr>
+          <a:lstStyle/>
+          <a:p>
+            <a:r>
+              <a:rPr lang="en-US" dirty="0"/>
+              <a:t>Date: 2026-09-04</a:t>
+            </a:r>
+          </a:p>
+          <a:p>
+            <a:r>
+              <a:rPr lang="en-US" dirty="0"/>
+              <a:t>Year: 2026</a:t>
+            </a:r>
+          </a:p>
+          <a:p>
+            <a:r>
+              <a:rPr lang="en-US" dirty="0"/>
+              <a:t>Month: SEPTEMBER</a:t>
+            </a:r>
+          </a:p>
+          <a:p>
+            <a:r>
+              <a:rPr lang="en-US" dirty="0"/>
+              <a:t>Day: 4</a:t>
+            </a:r>
+          </a:p>
+        </p:txBody>
+      </p:sp>
+      <p:sp>
+        <p:nvSpPr>
+          <p:cNvPr id="8" name="TextBox 7">
+            <a:extLst>
+              <a:ext uri="{FF2B5EF4-FFF2-40B4-BE49-F238E27FC236}">
+                <a16:creationId xmlns:a16="http://schemas.microsoft.com/office/drawing/2014/main" id="{DC950877-8149-8D63-D132-255022F3B97D}"/>
+              </a:ext>
+            </a:extLst>
+          </p:cNvPr>
+          <p:cNvSpPr txBox="1"/>
+          <p:nvPr/>
+        </p:nvSpPr>
+        <p:spPr>
+          <a:xfrm>
+            <a:off x="6096000" y="4450664"/>
+            <a:ext cx="3864037" cy="646331"/>
+          </a:xfrm>
+          <a:prstGeom prst="rect">
+            <a:avLst/>
+          </a:prstGeom>
+          <a:noFill/>
+        </p:spPr>
+        <p:txBody>
+          <a:bodyPr wrap="square">
+            <a:spAutoFit/>
+          </a:bodyPr>
+          <a:lstStyle/>
+          <a:p>
+            <a:r>
+              <a:rPr lang="en-US" dirty="0"/>
+              <a:t>Enter your birth date: 2000-05-15</a:t>
+            </a:r>
+          </a:p>
+          <a:p>
+            <a:r>
+              <a:rPr lang="en-US" dirty="0"/>
+              <a:t>You are 26 years old.</a:t>
+            </a:r>
+          </a:p>
+        </p:txBody>
+      </p:sp>
+      <p:sp>
+        <p:nvSpPr>
+          <p:cNvPr id="10" name="TextBox 9">
+            <a:extLst>
+              <a:ext uri="{FF2B5EF4-FFF2-40B4-BE49-F238E27FC236}">
+                <a16:creationId xmlns:a16="http://schemas.microsoft.com/office/drawing/2014/main" id="{DC482DFB-AC16-30A1-8BD8-5F750976B9D5}"/>
+              </a:ext>
+            </a:extLst>
+          </p:cNvPr>
+          <p:cNvSpPr txBox="1"/>
+          <p:nvPr/>
+        </p:nvSpPr>
+        <p:spPr>
+          <a:xfrm>
+            <a:off x="6096000" y="5509513"/>
+            <a:ext cx="3629350" cy="646331"/>
+          </a:xfrm>
+          <a:prstGeom prst="rect">
+            <a:avLst/>
+          </a:prstGeom>
+          <a:noFill/>
+        </p:spPr>
+        <p:txBody>
+          <a:bodyPr wrap="square">
+            <a:spAutoFit/>
+          </a:bodyPr>
+          <a:lstStyle/>
+          <a:p>
+            <a:r>
+              <a:rPr lang="en-US" dirty="0"/>
+              <a:t>Enter your birthday: 1998-12-20</a:t>
+            </a:r>
+          </a:p>
+          <a:p>
+            <a:r>
+              <a:rPr lang="en-US" dirty="0"/>
+              <a:t>Days until your next birthday: 107</a:t>
+            </a:r>
+          </a:p>
+        </p:txBody>
+      </p:sp>
+      <p:sp>
+        <p:nvSpPr>
+          <p:cNvPr id="12" name="TextBox 11">
+            <a:extLst>
+              <a:ext uri="{FF2B5EF4-FFF2-40B4-BE49-F238E27FC236}">
+                <a16:creationId xmlns:a16="http://schemas.microsoft.com/office/drawing/2014/main" id="{75696FF2-506C-623B-C69B-BE713DF632A9}"/>
+              </a:ext>
+            </a:extLst>
+          </p:cNvPr>
+          <p:cNvSpPr txBox="1"/>
+          <p:nvPr/>
+        </p:nvSpPr>
+        <p:spPr>
+          <a:xfrm>
+            <a:off x="6096000" y="2327591"/>
+            <a:ext cx="3040966" cy="646331"/>
+          </a:xfrm>
+          <a:prstGeom prst="rect">
+            <a:avLst/>
+          </a:prstGeom>
+          <a:noFill/>
+        </p:spPr>
+        <p:txBody>
+          <a:bodyPr wrap="square" rtlCol="0">
+            <a:spAutoFit/>
+          </a:bodyPr>
+          <a:lstStyle/>
+          <a:p>
+            <a:r>
+              <a:rPr lang="en-US" b="1" dirty="0"/>
+              <a:t>Example Inputs/Outputs:  			   </a:t>
+            </a:r>
+          </a:p>
+        </p:txBody>
+      </p:sp>
+    </p:spTree>
+    <p:extLst>
+      <p:ext uri="{BB962C8B-B14F-4D97-AF65-F5344CB8AC3E}">
+        <p14:creationId xmlns:p14="http://schemas.microsoft.com/office/powerpoint/2010/main" val="1566916490"/>
       </p:ext>
     </p:extLst>
   </p:cSld>
